--- a/Lab2 презентация.pptx
+++ b/Lab2 презентация.pptx
@@ -2,7 +2,7 @@
 <file path=ppt/presentation.xml><?xml version="1.0" encoding="utf-8"?>
 <p:presentation xmlns:a="http://schemas.openxmlformats.org/drawingml/2006/main" xmlns:r="http://schemas.openxmlformats.org/officeDocument/2006/relationships" xmlns:p="http://schemas.openxmlformats.org/presentationml/2006/main" saveSubsetFonts="1">
   <p:sldMasterIdLst>
-    <p:sldMasterId id="2147483789" r:id="rId1"/>
+    <p:sldMasterId id="2147483898" r:id="rId1"/>
   </p:sldMasterIdLst>
   <p:notesMasterIdLst>
     <p:notesMasterId r:id="rId27"/>
@@ -41,9 +41,9 @@
   <p:notesSz cx="6858000" cy="9144000"/>
   <p:defaultTextStyle>
     <a:defPPr>
-      <a:defRPr lang="en-US"/>
+      <a:defRPr lang="ru-RU"/>
     </a:defPPr>
-    <a:lvl1pPr marL="0" algn="l" defTabSz="457200" rtl="0" eaLnBrk="1" latinLnBrk="0" hangingPunct="1">
+    <a:lvl1pPr marL="0" algn="l" defTabSz="914400" rtl="0" eaLnBrk="1" latinLnBrk="0" hangingPunct="1">
       <a:defRPr sz="1800" kern="1200">
         <a:solidFill>
           <a:schemeClr val="tx1"/>
@@ -53,7 +53,7 @@
         <a:cs typeface="+mn-cs"/>
       </a:defRPr>
     </a:lvl1pPr>
-    <a:lvl2pPr marL="457200" algn="l" defTabSz="457200" rtl="0" eaLnBrk="1" latinLnBrk="0" hangingPunct="1">
+    <a:lvl2pPr marL="457200" algn="l" defTabSz="914400" rtl="0" eaLnBrk="1" latinLnBrk="0" hangingPunct="1">
       <a:defRPr sz="1800" kern="1200">
         <a:solidFill>
           <a:schemeClr val="tx1"/>
@@ -63,7 +63,7 @@
         <a:cs typeface="+mn-cs"/>
       </a:defRPr>
     </a:lvl2pPr>
-    <a:lvl3pPr marL="914400" algn="l" defTabSz="457200" rtl="0" eaLnBrk="1" latinLnBrk="0" hangingPunct="1">
+    <a:lvl3pPr marL="914400" algn="l" defTabSz="914400" rtl="0" eaLnBrk="1" latinLnBrk="0" hangingPunct="1">
       <a:defRPr sz="1800" kern="1200">
         <a:solidFill>
           <a:schemeClr val="tx1"/>
@@ -73,7 +73,7 @@
         <a:cs typeface="+mn-cs"/>
       </a:defRPr>
     </a:lvl3pPr>
-    <a:lvl4pPr marL="1371600" algn="l" defTabSz="457200" rtl="0" eaLnBrk="1" latinLnBrk="0" hangingPunct="1">
+    <a:lvl4pPr marL="1371600" algn="l" defTabSz="914400" rtl="0" eaLnBrk="1" latinLnBrk="0" hangingPunct="1">
       <a:defRPr sz="1800" kern="1200">
         <a:solidFill>
           <a:schemeClr val="tx1"/>
@@ -83,7 +83,7 @@
         <a:cs typeface="+mn-cs"/>
       </a:defRPr>
     </a:lvl4pPr>
-    <a:lvl5pPr marL="1828800" algn="l" defTabSz="457200" rtl="0" eaLnBrk="1" latinLnBrk="0" hangingPunct="1">
+    <a:lvl5pPr marL="1828800" algn="l" defTabSz="914400" rtl="0" eaLnBrk="1" latinLnBrk="0" hangingPunct="1">
       <a:defRPr sz="1800" kern="1200">
         <a:solidFill>
           <a:schemeClr val="tx1"/>
@@ -93,7 +93,7 @@
         <a:cs typeface="+mn-cs"/>
       </a:defRPr>
     </a:lvl5pPr>
-    <a:lvl6pPr marL="2286000" algn="l" defTabSz="457200" rtl="0" eaLnBrk="1" latinLnBrk="0" hangingPunct="1">
+    <a:lvl6pPr marL="2286000" algn="l" defTabSz="914400" rtl="0" eaLnBrk="1" latinLnBrk="0" hangingPunct="1">
       <a:defRPr sz="1800" kern="1200">
         <a:solidFill>
           <a:schemeClr val="tx1"/>
@@ -103,7 +103,7 @@
         <a:cs typeface="+mn-cs"/>
       </a:defRPr>
     </a:lvl6pPr>
-    <a:lvl7pPr marL="2743200" algn="l" defTabSz="457200" rtl="0" eaLnBrk="1" latinLnBrk="0" hangingPunct="1">
+    <a:lvl7pPr marL="2743200" algn="l" defTabSz="914400" rtl="0" eaLnBrk="1" latinLnBrk="0" hangingPunct="1">
       <a:defRPr sz="1800" kern="1200">
         <a:solidFill>
           <a:schemeClr val="tx1"/>
@@ -113,7 +113,7 @@
         <a:cs typeface="+mn-cs"/>
       </a:defRPr>
     </a:lvl7pPr>
-    <a:lvl8pPr marL="3200400" algn="l" defTabSz="457200" rtl="0" eaLnBrk="1" latinLnBrk="0" hangingPunct="1">
+    <a:lvl8pPr marL="3200400" algn="l" defTabSz="914400" rtl="0" eaLnBrk="1" latinLnBrk="0" hangingPunct="1">
       <a:defRPr sz="1800" kern="1200">
         <a:solidFill>
           <a:schemeClr val="tx1"/>
@@ -123,7 +123,7 @@
         <a:cs typeface="+mn-cs"/>
       </a:defRPr>
     </a:lvl8pPr>
-    <a:lvl9pPr marL="3657600" algn="l" defTabSz="457200" rtl="0" eaLnBrk="1" latinLnBrk="0" hangingPunct="1">
+    <a:lvl9pPr marL="3657600" algn="l" defTabSz="914400" rtl="0" eaLnBrk="1" latinLnBrk="0" hangingPunct="1">
       <a:defRPr sz="1800" kern="1200">
         <a:solidFill>
           <a:schemeClr val="tx1"/>
@@ -239,7 +239,7 @@
           <a:p>
             <a:fld id="{77D2C45D-7CFD-4C19-8DB3-516A8761C648}" type="datetimeFigureOut">
               <a:rPr lang="ru-RU" smtClean="0"/>
-              <a:t>17.11.2025</a:t>
+              <a:t>02.03.2026</a:t>
             </a:fld>
             <a:endParaRPr lang="ru-RU"/>
           </a:p>
@@ -416,7 +416,7 @@
           <a:p>
             <a:fld id="{E4656EB3-781E-417F-B5EC-5DC0FACEE1EE}" type="datetimeFigureOut">
               <a:rPr lang="ru-RU" smtClean="0"/>
-              <a:t>17.11.2025</a:t>
+              <a:t>02.03.2026</a:t>
             </a:fld>
             <a:endParaRPr lang="ru-RU"/>
           </a:p>
@@ -786,7 +786,13 @@
       </p:grpSpPr>
       <p:sp>
         <p:nvSpPr>
-          <p:cNvPr id="2" name="Title 1"/>
+          <p:cNvPr id="2" name="Заголовок 1">
+            <a:extLst>
+              <a:ext uri="{FF2B5EF4-FFF2-40B4-BE49-F238E27FC236}">
+                <a16:creationId xmlns:a16="http://schemas.microsoft.com/office/drawing/2014/main" id="{9F132311-EE09-7132-6E08-3E21C15E021F}"/>
+              </a:ext>
+            </a:extLst>
+          </p:cNvPr>
           <p:cNvSpPr>
             <a:spLocks noGrp="1"/>
           </p:cNvSpPr>
@@ -796,32 +802,15 @@
         </p:nvSpPr>
         <p:spPr>
           <a:xfrm>
-            <a:off x="1751012" y="609601"/>
-            <a:ext cx="8676222" cy="3200400"/>
+            <a:off x="1524000" y="1122363"/>
+            <a:ext cx="9144000" cy="2387600"/>
           </a:xfrm>
         </p:spPr>
         <p:txBody>
-          <a:bodyPr anchor="b">
-            <a:normAutofit/>
-          </a:bodyPr>
+          <a:bodyPr anchor="b"/>
           <a:lstStyle>
             <a:lvl1pPr algn="ctr">
-              <a:defRPr sz="4800">
-                <a:effectLst>
-                  <a:glow rad="38100">
-                    <a:schemeClr val="bg1">
-                      <a:lumMod val="65000"/>
-                      <a:lumOff val="35000"/>
-                      <a:alpha val="50000"/>
-                    </a:schemeClr>
-                  </a:glow>
-                  <a:outerShdw blurRad="28575" dist="31750" dir="13200000" algn="tl" rotWithShape="0">
-                    <a:srgbClr val="000000">
-                      <a:alpha val="25000"/>
-                    </a:srgbClr>
-                  </a:outerShdw>
-                </a:effectLst>
-              </a:defRPr>
+              <a:defRPr sz="6000"/>
             </a:lvl1pPr>
           </a:lstStyle>
           <a:p>
@@ -829,13 +818,18 @@
               <a:rPr lang="ru-RU"/>
               <a:t>Образец заголовка</a:t>
             </a:r>
-            <a:endParaRPr lang="en-US" dirty="0"/>
-          </a:p>
-        </p:txBody>
-      </p:sp>
-      <p:sp>
-        <p:nvSpPr>
-          <p:cNvPr id="3" name="Subtitle 2"/>
+          </a:p>
+        </p:txBody>
+      </p:sp>
+      <p:sp>
+        <p:nvSpPr>
+          <p:cNvPr id="3" name="Подзаголовок 2">
+            <a:extLst>
+              <a:ext uri="{FF2B5EF4-FFF2-40B4-BE49-F238E27FC236}">
+                <a16:creationId xmlns:a16="http://schemas.microsoft.com/office/drawing/2014/main" id="{D4C8EE6D-9C66-7357-8D08-A2145D6BA58B}"/>
+              </a:ext>
+            </a:extLst>
+          </p:cNvPr>
           <p:cNvSpPr>
             <a:spLocks noGrp="1"/>
           </p:cNvSpPr>
@@ -845,113 +839,48 @@
         </p:nvSpPr>
         <p:spPr>
           <a:xfrm>
-            <a:off x="1751012" y="3886200"/>
-            <a:ext cx="8676222" cy="1905000"/>
+            <a:off x="1524000" y="3602038"/>
+            <a:ext cx="9144000" cy="1655762"/>
           </a:xfrm>
         </p:spPr>
         <p:txBody>
-          <a:bodyPr anchor="t">
-            <a:normAutofit/>
-          </a:bodyPr>
+          <a:bodyPr/>
           <a:lstStyle>
             <a:lvl1pPr marL="0" indent="0" algn="ctr">
               <a:buNone/>
-              <a:defRPr sz="2100">
-                <a:gradFill flip="none" rotWithShape="1">
-                  <a:gsLst>
-                    <a:gs pos="0">
-                      <a:schemeClr val="tx1"/>
-                    </a:gs>
-                    <a:gs pos="100000">
-                      <a:schemeClr val="tx1">
-                        <a:lumMod val="75000"/>
-                      </a:schemeClr>
-                    </a:gs>
-                  </a:gsLst>
-                  <a:lin ang="5400000" scaled="0"/>
-                  <a:tileRect/>
-                </a:gradFill>
-              </a:defRPr>
+              <a:defRPr sz="2400"/>
             </a:lvl1pPr>
             <a:lvl2pPr marL="457200" indent="0" algn="ctr">
               <a:buNone/>
-              <a:defRPr>
-                <a:solidFill>
-                  <a:schemeClr val="tx1">
-                    <a:tint val="75000"/>
-                  </a:schemeClr>
-                </a:solidFill>
-              </a:defRPr>
+              <a:defRPr sz="2000"/>
             </a:lvl2pPr>
             <a:lvl3pPr marL="914400" indent="0" algn="ctr">
               <a:buNone/>
-              <a:defRPr>
-                <a:solidFill>
-                  <a:schemeClr val="tx1">
-                    <a:tint val="75000"/>
-                  </a:schemeClr>
-                </a:solidFill>
-              </a:defRPr>
+              <a:defRPr sz="1800"/>
             </a:lvl3pPr>
             <a:lvl4pPr marL="1371600" indent="0" algn="ctr">
               <a:buNone/>
-              <a:defRPr>
-                <a:solidFill>
-                  <a:schemeClr val="tx1">
-                    <a:tint val="75000"/>
-                  </a:schemeClr>
-                </a:solidFill>
-              </a:defRPr>
+              <a:defRPr sz="1600"/>
             </a:lvl4pPr>
             <a:lvl5pPr marL="1828800" indent="0" algn="ctr">
               <a:buNone/>
-              <a:defRPr>
-                <a:solidFill>
-                  <a:schemeClr val="tx1">
-                    <a:tint val="75000"/>
-                  </a:schemeClr>
-                </a:solidFill>
-              </a:defRPr>
+              <a:defRPr sz="1600"/>
             </a:lvl5pPr>
             <a:lvl6pPr marL="2286000" indent="0" algn="ctr">
               <a:buNone/>
-              <a:defRPr>
-                <a:solidFill>
-                  <a:schemeClr val="tx1">
-                    <a:tint val="75000"/>
-                  </a:schemeClr>
-                </a:solidFill>
-              </a:defRPr>
+              <a:defRPr sz="1600"/>
             </a:lvl6pPr>
             <a:lvl7pPr marL="2743200" indent="0" algn="ctr">
               <a:buNone/>
-              <a:defRPr>
-                <a:solidFill>
-                  <a:schemeClr val="tx1">
-                    <a:tint val="75000"/>
-                  </a:schemeClr>
-                </a:solidFill>
-              </a:defRPr>
+              <a:defRPr sz="1600"/>
             </a:lvl7pPr>
             <a:lvl8pPr marL="3200400" indent="0" algn="ctr">
               <a:buNone/>
-              <a:defRPr>
-                <a:solidFill>
-                  <a:schemeClr val="tx1">
-                    <a:tint val="75000"/>
-                  </a:schemeClr>
-                </a:solidFill>
-              </a:defRPr>
+              <a:defRPr sz="1600"/>
             </a:lvl8pPr>
             <a:lvl9pPr marL="3657600" indent="0" algn="ctr">
               <a:buNone/>
-              <a:defRPr>
-                <a:solidFill>
-                  <a:schemeClr val="tx1">
-                    <a:tint val="75000"/>
-                  </a:schemeClr>
-                </a:solidFill>
-              </a:defRPr>
+              <a:defRPr sz="1600"/>
             </a:lvl9pPr>
           </a:lstStyle>
           <a:p>
@@ -959,13 +888,18 @@
               <a:rPr lang="ru-RU"/>
               <a:t>Образец подзаголовка</a:t>
             </a:r>
-            <a:endParaRPr lang="en-US" dirty="0"/>
-          </a:p>
-        </p:txBody>
-      </p:sp>
-      <p:sp>
-        <p:nvSpPr>
-          <p:cNvPr id="4" name="Date Placeholder 3"/>
+          </a:p>
+        </p:txBody>
+      </p:sp>
+      <p:sp>
+        <p:nvSpPr>
+          <p:cNvPr id="4" name="Дата 3">
+            <a:extLst>
+              <a:ext uri="{FF2B5EF4-FFF2-40B4-BE49-F238E27FC236}">
+                <a16:creationId xmlns:a16="http://schemas.microsoft.com/office/drawing/2014/main" id="{19B74D86-B386-D7DC-831A-04B278E302D5}"/>
+              </a:ext>
+            </a:extLst>
+          </p:cNvPr>
           <p:cNvSpPr>
             <a:spLocks noGrp="1"/>
           </p:cNvSpPr>
@@ -980,7 +914,7 @@
           <a:p>
             <a:fld id="{0F3EF48A-07EF-4B56-98CC-C04B85084176}" type="datetimeFigureOut">
               <a:rPr lang="ru-RU" smtClean="0"/>
-              <a:t>17.11.2025</a:t>
+              <a:t>02.03.2026</a:t>
             </a:fld>
             <a:endParaRPr lang="ru-RU"/>
           </a:p>
@@ -988,7 +922,13 @@
       </p:sp>
       <p:sp>
         <p:nvSpPr>
-          <p:cNvPr id="5" name="Footer Placeholder 4"/>
+          <p:cNvPr id="5" name="Нижний колонтитул 4">
+            <a:extLst>
+              <a:ext uri="{FF2B5EF4-FFF2-40B4-BE49-F238E27FC236}">
+                <a16:creationId xmlns:a16="http://schemas.microsoft.com/office/drawing/2014/main" id="{B229E6CA-5AC1-BB64-7770-87A22F543058}"/>
+              </a:ext>
+            </a:extLst>
+          </p:cNvPr>
           <p:cNvSpPr>
             <a:spLocks noGrp="1"/>
           </p:cNvSpPr>
@@ -1007,7 +947,13 @@
       </p:sp>
       <p:sp>
         <p:nvSpPr>
-          <p:cNvPr id="6" name="Slide Number Placeholder 5"/>
+          <p:cNvPr id="6" name="Номер слайда 5">
+            <a:extLst>
+              <a:ext uri="{FF2B5EF4-FFF2-40B4-BE49-F238E27FC236}">
+                <a16:creationId xmlns:a16="http://schemas.microsoft.com/office/drawing/2014/main" id="{E0F30793-415F-37E5-1A83-162595812E40}"/>
+              </a:ext>
+            </a:extLst>
+          </p:cNvPr>
           <p:cNvSpPr>
             <a:spLocks noGrp="1"/>
           </p:cNvSpPr>
@@ -1031,7 +977,7 @@
     </p:spTree>
     <p:extLst>
       <p:ext uri="{BB962C8B-B14F-4D97-AF65-F5344CB8AC3E}">
-        <p14:creationId xmlns:p14="http://schemas.microsoft.com/office/powerpoint/2010/main" val="2395370516"/>
+        <p14:creationId xmlns:p14="http://schemas.microsoft.com/office/powerpoint/2010/main" val="472608746"/>
       </p:ext>
     </p:extLst>
   </p:cSld>
@@ -1042,2113 +988,6 @@
 </file>
 
 <file path=ppt/slideLayouts/slideLayout10.xml><?xml version="1.0" encoding="utf-8"?>
-<p:sldLayout xmlns:a="http://schemas.openxmlformats.org/drawingml/2006/main" xmlns:r="http://schemas.openxmlformats.org/officeDocument/2006/relationships" xmlns:p="http://schemas.openxmlformats.org/presentationml/2006/main" preserve="1">
-  <p:cSld name="Панорамная фотография с подписью">
-    <p:spTree>
-      <p:nvGrpSpPr>
-        <p:cNvPr id="1" name=""/>
-        <p:cNvGrpSpPr/>
-        <p:nvPr/>
-      </p:nvGrpSpPr>
-      <p:grpSpPr>
-        <a:xfrm>
-          <a:off x="0" y="0"/>
-          <a:ext cx="0" cy="0"/>
-          <a:chOff x="0" y="0"/>
-          <a:chExt cx="0" cy="0"/>
-        </a:xfrm>
-      </p:grpSpPr>
-      <p:sp>
-        <p:nvSpPr>
-          <p:cNvPr id="2" name="Title 1"/>
-          <p:cNvSpPr>
-            <a:spLocks noGrp="1"/>
-          </p:cNvSpPr>
-          <p:nvPr>
-            <p:ph type="title"/>
-          </p:nvPr>
-        </p:nvSpPr>
-        <p:spPr>
-          <a:xfrm>
-            <a:off x="1141413" y="4732865"/>
-            <a:ext cx="9906000" cy="566738"/>
-          </a:xfrm>
-        </p:spPr>
-        <p:txBody>
-          <a:bodyPr anchor="b">
-            <a:normAutofit/>
-          </a:bodyPr>
-          <a:lstStyle>
-            <a:lvl1pPr algn="l">
-              <a:defRPr sz="2400" b="0"/>
-            </a:lvl1pPr>
-          </a:lstStyle>
-          <a:p>
-            <a:r>
-              <a:rPr lang="ru-RU"/>
-              <a:t>Образец заголовка</a:t>
-            </a:r>
-            <a:endParaRPr lang="en-US" dirty="0"/>
-          </a:p>
-        </p:txBody>
-      </p:sp>
-      <p:sp>
-        <p:nvSpPr>
-          <p:cNvPr id="3" name="Picture Placeholder 2"/>
-          <p:cNvSpPr>
-            <a:spLocks noGrp="1" noChangeAspect="1"/>
-          </p:cNvSpPr>
-          <p:nvPr>
-            <p:ph type="pic" idx="1"/>
-          </p:nvPr>
-        </p:nvSpPr>
-        <p:spPr>
-          <a:xfrm>
-            <a:off x="1979612" y="932112"/>
-            <a:ext cx="8225944" cy="3164976"/>
-          </a:xfrm>
-          <a:prstGeom prst="roundRect">
-            <a:avLst>
-              <a:gd name="adj" fmla="val 4380"/>
-            </a:avLst>
-          </a:prstGeom>
-          <a:ln w="38100">
-            <a:gradFill flip="none" rotWithShape="1">
-              <a:gsLst>
-                <a:gs pos="0">
-                  <a:schemeClr val="bg2"/>
-                </a:gs>
-                <a:gs pos="100000">
-                  <a:schemeClr val="bg2">
-                    <a:lumMod val="75000"/>
-                  </a:schemeClr>
-                </a:gs>
-              </a:gsLst>
-              <a:lin ang="5400000" scaled="0"/>
-              <a:tileRect/>
-            </a:gradFill>
-          </a:ln>
-          <a:effectLst>
-            <a:innerShdw blurRad="57150" dist="38100" dir="14460000">
-              <a:srgbClr val="000000">
-                <a:alpha val="70000"/>
-              </a:srgbClr>
-            </a:innerShdw>
-          </a:effectLst>
-        </p:spPr>
-        <p:txBody>
-          <a:bodyPr anchor="t">
-            <a:normAutofit/>
-          </a:bodyPr>
-          <a:lstStyle>
-            <a:lvl1pPr marL="0" indent="0" algn="ctr">
-              <a:buNone/>
-              <a:defRPr sz="1600"/>
-            </a:lvl1pPr>
-            <a:lvl2pPr marL="457200" indent="0">
-              <a:buNone/>
-              <a:defRPr sz="1600"/>
-            </a:lvl2pPr>
-            <a:lvl3pPr marL="914400" indent="0">
-              <a:buNone/>
-              <a:defRPr sz="1600"/>
-            </a:lvl3pPr>
-            <a:lvl4pPr marL="1371600" indent="0">
-              <a:buNone/>
-              <a:defRPr sz="1600"/>
-            </a:lvl4pPr>
-            <a:lvl5pPr marL="1828800" indent="0">
-              <a:buNone/>
-              <a:defRPr sz="1600"/>
-            </a:lvl5pPr>
-            <a:lvl6pPr marL="2286000" indent="0">
-              <a:buNone/>
-              <a:defRPr sz="1600"/>
-            </a:lvl6pPr>
-            <a:lvl7pPr marL="2743200" indent="0">
-              <a:buNone/>
-              <a:defRPr sz="1600"/>
-            </a:lvl7pPr>
-            <a:lvl8pPr marL="3200400" indent="0">
-              <a:buNone/>
-              <a:defRPr sz="1600"/>
-            </a:lvl8pPr>
-            <a:lvl9pPr marL="3657600" indent="0">
-              <a:buNone/>
-              <a:defRPr sz="1600"/>
-            </a:lvl9pPr>
-          </a:lstStyle>
-          <a:p>
-            <a:r>
-              <a:rPr lang="ru-RU"/>
-              <a:t>Вставка рисунка</a:t>
-            </a:r>
-            <a:endParaRPr lang="en-US" dirty="0"/>
-          </a:p>
-        </p:txBody>
-      </p:sp>
-      <p:sp>
-        <p:nvSpPr>
-          <p:cNvPr id="4" name="Text Placeholder 3"/>
-          <p:cNvSpPr>
-            <a:spLocks noGrp="1"/>
-          </p:cNvSpPr>
-          <p:nvPr>
-            <p:ph type="body" sz="half" idx="2"/>
-          </p:nvPr>
-        </p:nvSpPr>
-        <p:spPr>
-          <a:xfrm>
-            <a:off x="1141413" y="5299603"/>
-            <a:ext cx="9906000" cy="493712"/>
-          </a:xfrm>
-        </p:spPr>
-        <p:txBody>
-          <a:bodyPr>
-            <a:normAutofit/>
-          </a:bodyPr>
-          <a:lstStyle>
-            <a:lvl1pPr marL="0" indent="0">
-              <a:buNone/>
-              <a:defRPr sz="1400"/>
-            </a:lvl1pPr>
-            <a:lvl2pPr marL="457200" indent="0">
-              <a:buNone/>
-              <a:defRPr sz="1200"/>
-            </a:lvl2pPr>
-            <a:lvl3pPr marL="914400" indent="0">
-              <a:buNone/>
-              <a:defRPr sz="1000"/>
-            </a:lvl3pPr>
-            <a:lvl4pPr marL="1371600" indent="0">
-              <a:buNone/>
-              <a:defRPr sz="900"/>
-            </a:lvl4pPr>
-            <a:lvl5pPr marL="1828800" indent="0">
-              <a:buNone/>
-              <a:defRPr sz="900"/>
-            </a:lvl5pPr>
-            <a:lvl6pPr marL="2286000" indent="0">
-              <a:buNone/>
-              <a:defRPr sz="900"/>
-            </a:lvl6pPr>
-            <a:lvl7pPr marL="2743200" indent="0">
-              <a:buNone/>
-              <a:defRPr sz="900"/>
-            </a:lvl7pPr>
-            <a:lvl8pPr marL="3200400" indent="0">
-              <a:buNone/>
-              <a:defRPr sz="900"/>
-            </a:lvl8pPr>
-            <a:lvl9pPr marL="3657600" indent="0">
-              <a:buNone/>
-              <a:defRPr sz="900"/>
-            </a:lvl9pPr>
-          </a:lstStyle>
-          <a:p>
-            <a:pPr lvl="0"/>
-            <a:r>
-              <a:rPr lang="ru-RU"/>
-              <a:t>Образец текста</a:t>
-            </a:r>
-          </a:p>
-        </p:txBody>
-      </p:sp>
-      <p:sp>
-        <p:nvSpPr>
-          <p:cNvPr id="5" name="Date Placeholder 4"/>
-          <p:cNvSpPr>
-            <a:spLocks noGrp="1"/>
-          </p:cNvSpPr>
-          <p:nvPr>
-            <p:ph type="dt" sz="half" idx="10"/>
-          </p:nvPr>
-        </p:nvSpPr>
-        <p:spPr/>
-        <p:txBody>
-          <a:bodyPr/>
-          <a:lstStyle/>
-          <a:p>
-            <a:fld id="{0F3EF48A-07EF-4B56-98CC-C04B85084176}" type="datetimeFigureOut">
-              <a:rPr lang="ru-RU" smtClean="0"/>
-              <a:t>17.11.2025</a:t>
-            </a:fld>
-            <a:endParaRPr lang="ru-RU"/>
-          </a:p>
-        </p:txBody>
-      </p:sp>
-      <p:sp>
-        <p:nvSpPr>
-          <p:cNvPr id="6" name="Footer Placeholder 5"/>
-          <p:cNvSpPr>
-            <a:spLocks noGrp="1"/>
-          </p:cNvSpPr>
-          <p:nvPr>
-            <p:ph type="ftr" sz="quarter" idx="11"/>
-          </p:nvPr>
-        </p:nvSpPr>
-        <p:spPr/>
-        <p:txBody>
-          <a:bodyPr/>
-          <a:lstStyle/>
-          <a:p>
-            <a:endParaRPr lang="ru-RU"/>
-          </a:p>
-        </p:txBody>
-      </p:sp>
-      <p:sp>
-        <p:nvSpPr>
-          <p:cNvPr id="7" name="Slide Number Placeholder 6"/>
-          <p:cNvSpPr>
-            <a:spLocks noGrp="1"/>
-          </p:cNvSpPr>
-          <p:nvPr>
-            <p:ph type="sldNum" sz="quarter" idx="12"/>
-          </p:nvPr>
-        </p:nvSpPr>
-        <p:spPr/>
-        <p:txBody>
-          <a:bodyPr/>
-          <a:lstStyle/>
-          <a:p>
-            <a:fld id="{60571A86-228C-4398-8B0D-AB49A380E357}" type="slidenum">
-              <a:rPr lang="ru-RU" smtClean="0"/>
-              <a:t>‹#›</a:t>
-            </a:fld>
-            <a:endParaRPr lang="ru-RU"/>
-          </a:p>
-        </p:txBody>
-      </p:sp>
-    </p:spTree>
-    <p:extLst>
-      <p:ext uri="{BB962C8B-B14F-4D97-AF65-F5344CB8AC3E}">
-        <p14:creationId xmlns:p14="http://schemas.microsoft.com/office/powerpoint/2010/main" val="3667547192"/>
-      </p:ext>
-    </p:extLst>
-  </p:cSld>
-  <p:clrMapOvr>
-    <a:masterClrMapping/>
-  </p:clrMapOvr>
-</p:sldLayout>
-</file>
-
-<file path=ppt/slideLayouts/slideLayout11.xml><?xml version="1.0" encoding="utf-8"?>
-<p:sldLayout xmlns:a="http://schemas.openxmlformats.org/drawingml/2006/main" xmlns:r="http://schemas.openxmlformats.org/officeDocument/2006/relationships" xmlns:p="http://schemas.openxmlformats.org/presentationml/2006/main" preserve="1">
-  <p:cSld name="Заголовок и подпись">
-    <p:spTree>
-      <p:nvGrpSpPr>
-        <p:cNvPr id="1" name=""/>
-        <p:cNvGrpSpPr/>
-        <p:nvPr/>
-      </p:nvGrpSpPr>
-      <p:grpSpPr>
-        <a:xfrm>
-          <a:off x="0" y="0"/>
-          <a:ext cx="0" cy="0"/>
-          <a:chOff x="0" y="0"/>
-          <a:chExt cx="0" cy="0"/>
-        </a:xfrm>
-      </p:grpSpPr>
-      <p:sp>
-        <p:nvSpPr>
-          <p:cNvPr id="2" name="Title 1"/>
-          <p:cNvSpPr>
-            <a:spLocks noGrp="1"/>
-          </p:cNvSpPr>
-          <p:nvPr>
-            <p:ph type="title"/>
-          </p:nvPr>
-        </p:nvSpPr>
-        <p:spPr>
-          <a:xfrm>
-            <a:off x="1141412" y="609601"/>
-            <a:ext cx="9905999" cy="3124199"/>
-          </a:xfrm>
-        </p:spPr>
-        <p:txBody>
-          <a:bodyPr anchor="ctr">
-            <a:normAutofit/>
-          </a:bodyPr>
-          <a:lstStyle>
-            <a:lvl1pPr algn="l">
-              <a:defRPr sz="3200" b="0" cap="all"/>
-            </a:lvl1pPr>
-          </a:lstStyle>
-          <a:p>
-            <a:r>
-              <a:rPr lang="ru-RU"/>
-              <a:t>Образец заголовка</a:t>
-            </a:r>
-            <a:endParaRPr lang="en-US" dirty="0"/>
-          </a:p>
-        </p:txBody>
-      </p:sp>
-      <p:sp>
-        <p:nvSpPr>
-          <p:cNvPr id="3" name="Text Placeholder 2"/>
-          <p:cNvSpPr>
-            <a:spLocks noGrp="1"/>
-          </p:cNvSpPr>
-          <p:nvPr>
-            <p:ph type="body" idx="1"/>
-          </p:nvPr>
-        </p:nvSpPr>
-        <p:spPr>
-          <a:xfrm>
-            <a:off x="1141411" y="4343400"/>
-            <a:ext cx="9906000" cy="1447800"/>
-          </a:xfrm>
-        </p:spPr>
-        <p:txBody>
-          <a:bodyPr anchor="ctr">
-            <a:normAutofit/>
-          </a:bodyPr>
-          <a:lstStyle>
-            <a:lvl1pPr marL="0" indent="0" algn="l">
-              <a:buNone/>
-              <a:defRPr sz="2000">
-                <a:gradFill flip="none" rotWithShape="1">
-                  <a:gsLst>
-                    <a:gs pos="0">
-                      <a:schemeClr val="tx1"/>
-                    </a:gs>
-                    <a:gs pos="100000">
-                      <a:schemeClr val="tx1">
-                        <a:lumMod val="75000"/>
-                      </a:schemeClr>
-                    </a:gs>
-                  </a:gsLst>
-                  <a:lin ang="5400000" scaled="0"/>
-                  <a:tileRect/>
-                </a:gradFill>
-              </a:defRPr>
-            </a:lvl1pPr>
-            <a:lvl2pPr marL="457200" indent="0">
-              <a:buNone/>
-              <a:defRPr sz="1800">
-                <a:solidFill>
-                  <a:schemeClr val="tx1">
-                    <a:tint val="75000"/>
-                  </a:schemeClr>
-                </a:solidFill>
-              </a:defRPr>
-            </a:lvl2pPr>
-            <a:lvl3pPr marL="914400" indent="0">
-              <a:buNone/>
-              <a:defRPr sz="1600">
-                <a:solidFill>
-                  <a:schemeClr val="tx1">
-                    <a:tint val="75000"/>
-                  </a:schemeClr>
-                </a:solidFill>
-              </a:defRPr>
-            </a:lvl3pPr>
-            <a:lvl4pPr marL="1371600" indent="0">
-              <a:buNone/>
-              <a:defRPr sz="1400">
-                <a:solidFill>
-                  <a:schemeClr val="tx1">
-                    <a:tint val="75000"/>
-                  </a:schemeClr>
-                </a:solidFill>
-              </a:defRPr>
-            </a:lvl4pPr>
-            <a:lvl5pPr marL="1828800" indent="0">
-              <a:buNone/>
-              <a:defRPr sz="1400">
-                <a:solidFill>
-                  <a:schemeClr val="tx1">
-                    <a:tint val="75000"/>
-                  </a:schemeClr>
-                </a:solidFill>
-              </a:defRPr>
-            </a:lvl5pPr>
-            <a:lvl6pPr marL="2286000" indent="0">
-              <a:buNone/>
-              <a:defRPr sz="1400">
-                <a:solidFill>
-                  <a:schemeClr val="tx1">
-                    <a:tint val="75000"/>
-                  </a:schemeClr>
-                </a:solidFill>
-              </a:defRPr>
-            </a:lvl6pPr>
-            <a:lvl7pPr marL="2743200" indent="0">
-              <a:buNone/>
-              <a:defRPr sz="1400">
-                <a:solidFill>
-                  <a:schemeClr val="tx1">
-                    <a:tint val="75000"/>
-                  </a:schemeClr>
-                </a:solidFill>
-              </a:defRPr>
-            </a:lvl7pPr>
-            <a:lvl8pPr marL="3200400" indent="0">
-              <a:buNone/>
-              <a:defRPr sz="1400">
-                <a:solidFill>
-                  <a:schemeClr val="tx1">
-                    <a:tint val="75000"/>
-                  </a:schemeClr>
-                </a:solidFill>
-              </a:defRPr>
-            </a:lvl8pPr>
-            <a:lvl9pPr marL="3657600" indent="0">
-              <a:buNone/>
-              <a:defRPr sz="1400">
-                <a:solidFill>
-                  <a:schemeClr val="tx1">
-                    <a:tint val="75000"/>
-                  </a:schemeClr>
-                </a:solidFill>
-              </a:defRPr>
-            </a:lvl9pPr>
-          </a:lstStyle>
-          <a:p>
-            <a:pPr lvl="0"/>
-            <a:r>
-              <a:rPr lang="ru-RU"/>
-              <a:t>Образец текста</a:t>
-            </a:r>
-          </a:p>
-        </p:txBody>
-      </p:sp>
-      <p:sp>
-        <p:nvSpPr>
-          <p:cNvPr id="4" name="Date Placeholder 3"/>
-          <p:cNvSpPr>
-            <a:spLocks noGrp="1"/>
-          </p:cNvSpPr>
-          <p:nvPr>
-            <p:ph type="dt" sz="half" idx="10"/>
-          </p:nvPr>
-        </p:nvSpPr>
-        <p:spPr/>
-        <p:txBody>
-          <a:bodyPr/>
-          <a:lstStyle/>
-          <a:p>
-            <a:fld id="{0F3EF48A-07EF-4B56-98CC-C04B85084176}" type="datetimeFigureOut">
-              <a:rPr lang="ru-RU" smtClean="0"/>
-              <a:t>17.11.2025</a:t>
-            </a:fld>
-            <a:endParaRPr lang="ru-RU"/>
-          </a:p>
-        </p:txBody>
-      </p:sp>
-      <p:sp>
-        <p:nvSpPr>
-          <p:cNvPr id="5" name="Footer Placeholder 4"/>
-          <p:cNvSpPr>
-            <a:spLocks noGrp="1"/>
-          </p:cNvSpPr>
-          <p:nvPr>
-            <p:ph type="ftr" sz="quarter" idx="11"/>
-          </p:nvPr>
-        </p:nvSpPr>
-        <p:spPr/>
-        <p:txBody>
-          <a:bodyPr/>
-          <a:lstStyle/>
-          <a:p>
-            <a:endParaRPr lang="ru-RU"/>
-          </a:p>
-        </p:txBody>
-      </p:sp>
-      <p:sp>
-        <p:nvSpPr>
-          <p:cNvPr id="6" name="Slide Number Placeholder 5"/>
-          <p:cNvSpPr>
-            <a:spLocks noGrp="1"/>
-          </p:cNvSpPr>
-          <p:nvPr>
-            <p:ph type="sldNum" sz="quarter" idx="12"/>
-          </p:nvPr>
-        </p:nvSpPr>
-        <p:spPr/>
-        <p:txBody>
-          <a:bodyPr/>
-          <a:lstStyle/>
-          <a:p>
-            <a:fld id="{60571A86-228C-4398-8B0D-AB49A380E357}" type="slidenum">
-              <a:rPr lang="ru-RU" smtClean="0"/>
-              <a:t>‹#›</a:t>
-            </a:fld>
-            <a:endParaRPr lang="ru-RU"/>
-          </a:p>
-        </p:txBody>
-      </p:sp>
-    </p:spTree>
-    <p:extLst>
-      <p:ext uri="{BB962C8B-B14F-4D97-AF65-F5344CB8AC3E}">
-        <p14:creationId xmlns:p14="http://schemas.microsoft.com/office/powerpoint/2010/main" val="727142234"/>
-      </p:ext>
-    </p:extLst>
-  </p:cSld>
-  <p:clrMapOvr>
-    <a:masterClrMapping/>
-  </p:clrMapOvr>
-</p:sldLayout>
-</file>
-
-<file path=ppt/slideLayouts/slideLayout12.xml><?xml version="1.0" encoding="utf-8"?>
-<p:sldLayout xmlns:a="http://schemas.openxmlformats.org/drawingml/2006/main" xmlns:r="http://schemas.openxmlformats.org/officeDocument/2006/relationships" xmlns:p="http://schemas.openxmlformats.org/presentationml/2006/main" preserve="1">
-  <p:cSld name="Цитата с подписью">
-    <p:spTree>
-      <p:nvGrpSpPr>
-        <p:cNvPr id="1" name=""/>
-        <p:cNvGrpSpPr/>
-        <p:nvPr/>
-      </p:nvGrpSpPr>
-      <p:grpSpPr>
-        <a:xfrm>
-          <a:off x="0" y="0"/>
-          <a:ext cx="0" cy="0"/>
-          <a:chOff x="0" y="0"/>
-          <a:chExt cx="0" cy="0"/>
-        </a:xfrm>
-      </p:grpSpPr>
-      <p:sp>
-        <p:nvSpPr>
-          <p:cNvPr id="14" name="TextBox 13"/>
-          <p:cNvSpPr txBox="1"/>
-          <p:nvPr/>
-        </p:nvSpPr>
-        <p:spPr>
-          <a:xfrm>
-            <a:off x="836612" y="786824"/>
-            <a:ext cx="609600" cy="584776"/>
-          </a:xfrm>
-          <a:prstGeom prst="rect">
-            <a:avLst/>
-          </a:prstGeom>
-        </p:spPr>
-        <p:txBody>
-          <a:bodyPr vert="horz" lIns="91440" tIns="45720" rIns="91440" bIns="45720" rtlCol="0" anchor="ctr">
-            <a:noAutofit/>
-          </a:bodyPr>
-          <a:lstStyle>
-            <a:lvl1pPr>
-              <a:spcBef>
-                <a:spcPct val="0"/>
-              </a:spcBef>
-              <a:buNone/>
-              <a:defRPr sz="3200" b="0" cap="all">
-                <a:ln w="3175" cmpd="sng">
-                  <a:noFill/>
-                </a:ln>
-                <a:effectLst>
-                  <a:glow rad="38100">
-                    <a:schemeClr val="bg1">
-                      <a:lumMod val="65000"/>
-                      <a:lumOff val="35000"/>
-                      <a:alpha val="40000"/>
-                    </a:schemeClr>
-                  </a:glow>
-                  <a:outerShdw blurRad="28575" dist="38100" dir="14040000" algn="tl" rotWithShape="0">
-                    <a:srgbClr val="000000">
-                      <a:alpha val="25000"/>
-                    </a:srgbClr>
-                  </a:outerShdw>
-                </a:effectLst>
-              </a:defRPr>
-            </a:lvl1pPr>
-            <a:lvl2pPr>
-              <a:defRPr>
-                <a:solidFill>
-                  <a:schemeClr val="tx2"/>
-                </a:solidFill>
-              </a:defRPr>
-            </a:lvl2pPr>
-            <a:lvl3pPr>
-              <a:defRPr>
-                <a:solidFill>
-                  <a:schemeClr val="tx2"/>
-                </a:solidFill>
-              </a:defRPr>
-            </a:lvl3pPr>
-            <a:lvl4pPr>
-              <a:defRPr>
-                <a:solidFill>
-                  <a:schemeClr val="tx2"/>
-                </a:solidFill>
-              </a:defRPr>
-            </a:lvl4pPr>
-            <a:lvl5pPr>
-              <a:defRPr>
-                <a:solidFill>
-                  <a:schemeClr val="tx2"/>
-                </a:solidFill>
-              </a:defRPr>
-            </a:lvl5pPr>
-            <a:lvl6pPr>
-              <a:defRPr>
-                <a:solidFill>
-                  <a:schemeClr val="tx2"/>
-                </a:solidFill>
-              </a:defRPr>
-            </a:lvl6pPr>
-            <a:lvl7pPr>
-              <a:defRPr>
-                <a:solidFill>
-                  <a:schemeClr val="tx2"/>
-                </a:solidFill>
-              </a:defRPr>
-            </a:lvl7pPr>
-            <a:lvl8pPr>
-              <a:defRPr>
-                <a:solidFill>
-                  <a:schemeClr val="tx2"/>
-                </a:solidFill>
-              </a:defRPr>
-            </a:lvl8pPr>
-            <a:lvl9pPr>
-              <a:defRPr>
-                <a:solidFill>
-                  <a:schemeClr val="tx2"/>
-                </a:solidFill>
-              </a:defRPr>
-            </a:lvl9pPr>
-          </a:lstStyle>
-          <a:p>
-            <a:pPr lvl="0"/>
-            <a:r>
-              <a:rPr lang="en-US" sz="8000" dirty="0">
-                <a:solidFill>
-                  <a:schemeClr val="accent1"/>
-                </a:solidFill>
-              </a:rPr>
-              <a:t>“</a:t>
-            </a:r>
-          </a:p>
-        </p:txBody>
-      </p:sp>
-      <p:sp>
-        <p:nvSpPr>
-          <p:cNvPr id="15" name="TextBox 14"/>
-          <p:cNvSpPr txBox="1"/>
-          <p:nvPr/>
-        </p:nvSpPr>
-        <p:spPr>
-          <a:xfrm>
-            <a:off x="10437812" y="2743200"/>
-            <a:ext cx="609600" cy="584776"/>
-          </a:xfrm>
-          <a:prstGeom prst="rect">
-            <a:avLst/>
-          </a:prstGeom>
-        </p:spPr>
-        <p:txBody>
-          <a:bodyPr vert="horz" lIns="91440" tIns="45720" rIns="91440" bIns="45720" rtlCol="0" anchor="ctr">
-            <a:noAutofit/>
-          </a:bodyPr>
-          <a:lstStyle>
-            <a:lvl1pPr>
-              <a:spcBef>
-                <a:spcPct val="0"/>
-              </a:spcBef>
-              <a:buNone/>
-              <a:defRPr sz="3200" b="0" cap="all">
-                <a:ln w="3175" cmpd="sng">
-                  <a:noFill/>
-                </a:ln>
-                <a:effectLst>
-                  <a:glow rad="38100">
-                    <a:schemeClr val="bg1">
-                      <a:lumMod val="65000"/>
-                      <a:lumOff val="35000"/>
-                      <a:alpha val="40000"/>
-                    </a:schemeClr>
-                  </a:glow>
-                  <a:outerShdw blurRad="28575" dist="38100" dir="14040000" algn="tl" rotWithShape="0">
-                    <a:srgbClr val="000000">
-                      <a:alpha val="25000"/>
-                    </a:srgbClr>
-                  </a:outerShdw>
-                </a:effectLst>
-              </a:defRPr>
-            </a:lvl1pPr>
-            <a:lvl2pPr>
-              <a:defRPr>
-                <a:solidFill>
-                  <a:schemeClr val="tx2"/>
-                </a:solidFill>
-              </a:defRPr>
-            </a:lvl2pPr>
-            <a:lvl3pPr>
-              <a:defRPr>
-                <a:solidFill>
-                  <a:schemeClr val="tx2"/>
-                </a:solidFill>
-              </a:defRPr>
-            </a:lvl3pPr>
-            <a:lvl4pPr>
-              <a:defRPr>
-                <a:solidFill>
-                  <a:schemeClr val="tx2"/>
-                </a:solidFill>
-              </a:defRPr>
-            </a:lvl4pPr>
-            <a:lvl5pPr>
-              <a:defRPr>
-                <a:solidFill>
-                  <a:schemeClr val="tx2"/>
-                </a:solidFill>
-              </a:defRPr>
-            </a:lvl5pPr>
-            <a:lvl6pPr>
-              <a:defRPr>
-                <a:solidFill>
-                  <a:schemeClr val="tx2"/>
-                </a:solidFill>
-              </a:defRPr>
-            </a:lvl6pPr>
-            <a:lvl7pPr>
-              <a:defRPr>
-                <a:solidFill>
-                  <a:schemeClr val="tx2"/>
-                </a:solidFill>
-              </a:defRPr>
-            </a:lvl7pPr>
-            <a:lvl8pPr>
-              <a:defRPr>
-                <a:solidFill>
-                  <a:schemeClr val="tx2"/>
-                </a:solidFill>
-              </a:defRPr>
-            </a:lvl8pPr>
-            <a:lvl9pPr>
-              <a:defRPr>
-                <a:solidFill>
-                  <a:schemeClr val="tx2"/>
-                </a:solidFill>
-              </a:defRPr>
-            </a:lvl9pPr>
-          </a:lstStyle>
-          <a:p>
-            <a:pPr lvl="0" algn="r"/>
-            <a:r>
-              <a:rPr lang="en-US" sz="8000" dirty="0">
-                <a:solidFill>
-                  <a:schemeClr val="accent1"/>
-                </a:solidFill>
-              </a:rPr>
-              <a:t>”</a:t>
-            </a:r>
-          </a:p>
-        </p:txBody>
-      </p:sp>
-      <p:sp>
-        <p:nvSpPr>
-          <p:cNvPr id="2" name="Title 1"/>
-          <p:cNvSpPr>
-            <a:spLocks noGrp="1"/>
-          </p:cNvSpPr>
-          <p:nvPr>
-            <p:ph type="title"/>
-          </p:nvPr>
-        </p:nvSpPr>
-        <p:spPr>
-          <a:xfrm>
-            <a:off x="1446213" y="609601"/>
-            <a:ext cx="9296398" cy="2743199"/>
-          </a:xfrm>
-        </p:spPr>
-        <p:txBody>
-          <a:bodyPr anchor="ctr">
-            <a:normAutofit/>
-          </a:bodyPr>
-          <a:lstStyle>
-            <a:lvl1pPr algn="l">
-              <a:defRPr sz="3200" b="0" cap="all">
-                <a:solidFill>
-                  <a:schemeClr val="tx1"/>
-                </a:solidFill>
-              </a:defRPr>
-            </a:lvl1pPr>
-          </a:lstStyle>
-          <a:p>
-            <a:r>
-              <a:rPr lang="ru-RU"/>
-              <a:t>Образец заголовка</a:t>
-            </a:r>
-            <a:endParaRPr lang="en-US" dirty="0"/>
-          </a:p>
-        </p:txBody>
-      </p:sp>
-      <p:sp>
-        <p:nvSpPr>
-          <p:cNvPr id="10" name="Text Placeholder 9"/>
-          <p:cNvSpPr>
-            <a:spLocks noGrp="1"/>
-          </p:cNvSpPr>
-          <p:nvPr>
-            <p:ph type="body" sz="quarter" idx="13"/>
-          </p:nvPr>
-        </p:nvSpPr>
-        <p:spPr>
-          <a:xfrm>
-            <a:off x="1674812" y="3352800"/>
-            <a:ext cx="8839202" cy="381000"/>
-          </a:xfrm>
-        </p:spPr>
-        <p:txBody>
-          <a:bodyPr anchor="ctr"/>
-          <a:lstStyle>
-            <a:lvl1pPr marL="0" indent="0">
-              <a:buFontTx/>
-              <a:buNone/>
-              <a:defRPr/>
-            </a:lvl1pPr>
-            <a:lvl2pPr marL="457200" indent="0">
-              <a:buFontTx/>
-              <a:buNone/>
-              <a:defRPr/>
-            </a:lvl2pPr>
-            <a:lvl3pPr marL="914400" indent="0">
-              <a:buFontTx/>
-              <a:buNone/>
-              <a:defRPr/>
-            </a:lvl3pPr>
-            <a:lvl4pPr marL="1371600" indent="0">
-              <a:buFontTx/>
-              <a:buNone/>
-              <a:defRPr/>
-            </a:lvl4pPr>
-            <a:lvl5pPr marL="1828800" indent="0">
-              <a:buFontTx/>
-              <a:buNone/>
-              <a:defRPr/>
-            </a:lvl5pPr>
-          </a:lstStyle>
-          <a:p>
-            <a:pPr lvl="0"/>
-            <a:r>
-              <a:rPr lang="ru-RU"/>
-              <a:t>Образец текста</a:t>
-            </a:r>
-          </a:p>
-        </p:txBody>
-      </p:sp>
-      <p:sp>
-        <p:nvSpPr>
-          <p:cNvPr id="3" name="Text Placeholder 2"/>
-          <p:cNvSpPr>
-            <a:spLocks noGrp="1"/>
-          </p:cNvSpPr>
-          <p:nvPr>
-            <p:ph type="body" idx="1"/>
-          </p:nvPr>
-        </p:nvSpPr>
-        <p:spPr>
-          <a:xfrm>
-            <a:off x="1141411" y="4343400"/>
-            <a:ext cx="9906000" cy="1447800"/>
-          </a:xfrm>
-        </p:spPr>
-        <p:txBody>
-          <a:bodyPr vert="horz" lIns="91440" tIns="45720" rIns="91440" bIns="45720" rtlCol="0" anchor="ctr">
-            <a:normAutofit/>
-          </a:bodyPr>
-          <a:lstStyle>
-            <a:lvl1pPr>
-              <a:buNone/>
-              <a:defRPr lang="en-US" sz="2000">
-                <a:gradFill flip="none" rotWithShape="1">
-                  <a:gsLst>
-                    <a:gs pos="0">
-                      <a:schemeClr val="tx1"/>
-                    </a:gs>
-                    <a:gs pos="100000">
-                      <a:schemeClr val="tx1">
-                        <a:lumMod val="75000"/>
-                      </a:schemeClr>
-                    </a:gs>
-                  </a:gsLst>
-                  <a:lin ang="5400000" scaled="0"/>
-                  <a:tileRect/>
-                </a:gradFill>
-              </a:defRPr>
-            </a:lvl1pPr>
-          </a:lstStyle>
-          <a:p>
-            <a:pPr marL="0" lvl="0" indent="0">
-              <a:buNone/>
-            </a:pPr>
-            <a:r>
-              <a:rPr lang="ru-RU"/>
-              <a:t>Образец текста</a:t>
-            </a:r>
-          </a:p>
-        </p:txBody>
-      </p:sp>
-      <p:sp>
-        <p:nvSpPr>
-          <p:cNvPr id="4" name="Date Placeholder 3"/>
-          <p:cNvSpPr>
-            <a:spLocks noGrp="1"/>
-          </p:cNvSpPr>
-          <p:nvPr>
-            <p:ph type="dt" sz="half" idx="10"/>
-          </p:nvPr>
-        </p:nvSpPr>
-        <p:spPr/>
-        <p:txBody>
-          <a:bodyPr/>
-          <a:lstStyle/>
-          <a:p>
-            <a:fld id="{0F3EF48A-07EF-4B56-98CC-C04B85084176}" type="datetimeFigureOut">
-              <a:rPr lang="ru-RU" smtClean="0"/>
-              <a:t>17.11.2025</a:t>
-            </a:fld>
-            <a:endParaRPr lang="ru-RU"/>
-          </a:p>
-        </p:txBody>
-      </p:sp>
-      <p:sp>
-        <p:nvSpPr>
-          <p:cNvPr id="5" name="Footer Placeholder 4"/>
-          <p:cNvSpPr>
-            <a:spLocks noGrp="1"/>
-          </p:cNvSpPr>
-          <p:nvPr>
-            <p:ph type="ftr" sz="quarter" idx="11"/>
-          </p:nvPr>
-        </p:nvSpPr>
-        <p:spPr/>
-        <p:txBody>
-          <a:bodyPr/>
-          <a:lstStyle/>
-          <a:p>
-            <a:endParaRPr lang="ru-RU"/>
-          </a:p>
-        </p:txBody>
-      </p:sp>
-      <p:sp>
-        <p:nvSpPr>
-          <p:cNvPr id="6" name="Slide Number Placeholder 5"/>
-          <p:cNvSpPr>
-            <a:spLocks noGrp="1"/>
-          </p:cNvSpPr>
-          <p:nvPr>
-            <p:ph type="sldNum" sz="quarter" idx="12"/>
-          </p:nvPr>
-        </p:nvSpPr>
-        <p:spPr/>
-        <p:txBody>
-          <a:bodyPr/>
-          <a:lstStyle/>
-          <a:p>
-            <a:fld id="{60571A86-228C-4398-8B0D-AB49A380E357}" type="slidenum">
-              <a:rPr lang="ru-RU" smtClean="0"/>
-              <a:t>‹#›</a:t>
-            </a:fld>
-            <a:endParaRPr lang="ru-RU"/>
-          </a:p>
-        </p:txBody>
-      </p:sp>
-    </p:spTree>
-    <p:extLst>
-      <p:ext uri="{BB962C8B-B14F-4D97-AF65-F5344CB8AC3E}">
-        <p14:creationId xmlns:p14="http://schemas.microsoft.com/office/powerpoint/2010/main" val="2435178025"/>
-      </p:ext>
-    </p:extLst>
-  </p:cSld>
-  <p:clrMapOvr>
-    <a:masterClrMapping/>
-  </p:clrMapOvr>
-</p:sldLayout>
-</file>
-
-<file path=ppt/slideLayouts/slideLayout13.xml><?xml version="1.0" encoding="utf-8"?>
-<p:sldLayout xmlns:a="http://schemas.openxmlformats.org/drawingml/2006/main" xmlns:r="http://schemas.openxmlformats.org/officeDocument/2006/relationships" xmlns:p="http://schemas.openxmlformats.org/presentationml/2006/main" preserve="1">
-  <p:cSld name="Карточка имени">
-    <p:spTree>
-      <p:nvGrpSpPr>
-        <p:cNvPr id="1" name=""/>
-        <p:cNvGrpSpPr/>
-        <p:nvPr/>
-      </p:nvGrpSpPr>
-      <p:grpSpPr>
-        <a:xfrm>
-          <a:off x="0" y="0"/>
-          <a:ext cx="0" cy="0"/>
-          <a:chOff x="0" y="0"/>
-          <a:chExt cx="0" cy="0"/>
-        </a:xfrm>
-      </p:grpSpPr>
-      <p:sp>
-        <p:nvSpPr>
-          <p:cNvPr id="2" name="Title 1"/>
-          <p:cNvSpPr>
-            <a:spLocks noGrp="1"/>
-          </p:cNvSpPr>
-          <p:nvPr>
-            <p:ph type="title"/>
-          </p:nvPr>
-        </p:nvSpPr>
-        <p:spPr>
-          <a:xfrm>
-            <a:off x="1141412" y="3308581"/>
-            <a:ext cx="9906000" cy="1468800"/>
-          </a:xfrm>
-        </p:spPr>
-        <p:txBody>
-          <a:bodyPr anchor="b">
-            <a:normAutofit/>
-          </a:bodyPr>
-          <a:lstStyle>
-            <a:lvl1pPr algn="l">
-              <a:defRPr sz="3200" b="0" cap="all"/>
-            </a:lvl1pPr>
-          </a:lstStyle>
-          <a:p>
-            <a:r>
-              <a:rPr lang="ru-RU"/>
-              <a:t>Образец заголовка</a:t>
-            </a:r>
-            <a:endParaRPr lang="en-US" dirty="0"/>
-          </a:p>
-        </p:txBody>
-      </p:sp>
-      <p:sp>
-        <p:nvSpPr>
-          <p:cNvPr id="3" name="Text Placeholder 2"/>
-          <p:cNvSpPr>
-            <a:spLocks noGrp="1"/>
-          </p:cNvSpPr>
-          <p:nvPr>
-            <p:ph type="body" idx="1"/>
-          </p:nvPr>
-        </p:nvSpPr>
-        <p:spPr>
-          <a:xfrm>
-            <a:off x="1141410" y="4777381"/>
-            <a:ext cx="9906001" cy="860400"/>
-          </a:xfrm>
-        </p:spPr>
-        <p:txBody>
-          <a:bodyPr vert="horz" lIns="91440" tIns="45720" rIns="91440" bIns="45720" rtlCol="0" anchor="t">
-            <a:normAutofit/>
-          </a:bodyPr>
-          <a:lstStyle>
-            <a:lvl1pPr>
-              <a:defRPr lang="en-US" sz="2000">
-                <a:gradFill flip="none" rotWithShape="1">
-                  <a:gsLst>
-                    <a:gs pos="0">
-                      <a:schemeClr val="tx1"/>
-                    </a:gs>
-                    <a:gs pos="100000">
-                      <a:schemeClr val="tx1">
-                        <a:lumMod val="75000"/>
-                      </a:schemeClr>
-                    </a:gs>
-                  </a:gsLst>
-                  <a:lin ang="5400000" scaled="0"/>
-                  <a:tileRect/>
-                </a:gradFill>
-              </a:defRPr>
-            </a:lvl1pPr>
-          </a:lstStyle>
-          <a:p>
-            <a:pPr marL="0" lvl="0" indent="0">
-              <a:buNone/>
-            </a:pPr>
-            <a:r>
-              <a:rPr lang="ru-RU"/>
-              <a:t>Образец текста</a:t>
-            </a:r>
-          </a:p>
-        </p:txBody>
-      </p:sp>
-      <p:sp>
-        <p:nvSpPr>
-          <p:cNvPr id="4" name="Date Placeholder 3"/>
-          <p:cNvSpPr>
-            <a:spLocks noGrp="1"/>
-          </p:cNvSpPr>
-          <p:nvPr>
-            <p:ph type="dt" sz="half" idx="10"/>
-          </p:nvPr>
-        </p:nvSpPr>
-        <p:spPr/>
-        <p:txBody>
-          <a:bodyPr/>
-          <a:lstStyle/>
-          <a:p>
-            <a:fld id="{0F3EF48A-07EF-4B56-98CC-C04B85084176}" type="datetimeFigureOut">
-              <a:rPr lang="ru-RU" smtClean="0"/>
-              <a:t>17.11.2025</a:t>
-            </a:fld>
-            <a:endParaRPr lang="ru-RU"/>
-          </a:p>
-        </p:txBody>
-      </p:sp>
-      <p:sp>
-        <p:nvSpPr>
-          <p:cNvPr id="5" name="Footer Placeholder 4"/>
-          <p:cNvSpPr>
-            <a:spLocks noGrp="1"/>
-          </p:cNvSpPr>
-          <p:nvPr>
-            <p:ph type="ftr" sz="quarter" idx="11"/>
-          </p:nvPr>
-        </p:nvSpPr>
-        <p:spPr/>
-        <p:txBody>
-          <a:bodyPr/>
-          <a:lstStyle/>
-          <a:p>
-            <a:endParaRPr lang="ru-RU"/>
-          </a:p>
-        </p:txBody>
-      </p:sp>
-      <p:sp>
-        <p:nvSpPr>
-          <p:cNvPr id="6" name="Slide Number Placeholder 5"/>
-          <p:cNvSpPr>
-            <a:spLocks noGrp="1"/>
-          </p:cNvSpPr>
-          <p:nvPr>
-            <p:ph type="sldNum" sz="quarter" idx="12"/>
-          </p:nvPr>
-        </p:nvSpPr>
-        <p:spPr/>
-        <p:txBody>
-          <a:bodyPr/>
-          <a:lstStyle/>
-          <a:p>
-            <a:fld id="{60571A86-228C-4398-8B0D-AB49A380E357}" type="slidenum">
-              <a:rPr lang="ru-RU" smtClean="0"/>
-              <a:t>‹#›</a:t>
-            </a:fld>
-            <a:endParaRPr lang="ru-RU"/>
-          </a:p>
-        </p:txBody>
-      </p:sp>
-    </p:spTree>
-    <p:extLst>
-      <p:ext uri="{BB962C8B-B14F-4D97-AF65-F5344CB8AC3E}">
-        <p14:creationId xmlns:p14="http://schemas.microsoft.com/office/powerpoint/2010/main" val="24681372"/>
-      </p:ext>
-    </p:extLst>
-  </p:cSld>
-  <p:clrMapOvr>
-    <a:masterClrMapping/>
-  </p:clrMapOvr>
-</p:sldLayout>
-</file>
-
-<file path=ppt/slideLayouts/slideLayout14.xml><?xml version="1.0" encoding="utf-8"?>
-<p:sldLayout xmlns:a="http://schemas.openxmlformats.org/drawingml/2006/main" xmlns:r="http://schemas.openxmlformats.org/officeDocument/2006/relationships" xmlns:p="http://schemas.openxmlformats.org/presentationml/2006/main" preserve="1">
-  <p:cSld name="Цитата карточки имени">
-    <p:spTree>
-      <p:nvGrpSpPr>
-        <p:cNvPr id="1" name=""/>
-        <p:cNvGrpSpPr/>
-        <p:nvPr/>
-      </p:nvGrpSpPr>
-      <p:grpSpPr>
-        <a:xfrm>
-          <a:off x="0" y="0"/>
-          <a:ext cx="0" cy="0"/>
-          <a:chOff x="0" y="0"/>
-          <a:chExt cx="0" cy="0"/>
-        </a:xfrm>
-      </p:grpSpPr>
-      <p:sp>
-        <p:nvSpPr>
-          <p:cNvPr id="14" name="TextBox 13"/>
-          <p:cNvSpPr txBox="1"/>
-          <p:nvPr/>
-        </p:nvSpPr>
-        <p:spPr>
-          <a:xfrm>
-            <a:off x="836612" y="786824"/>
-            <a:ext cx="609600" cy="584776"/>
-          </a:xfrm>
-          <a:prstGeom prst="rect">
-            <a:avLst/>
-          </a:prstGeom>
-        </p:spPr>
-        <p:txBody>
-          <a:bodyPr vert="horz" lIns="91440" tIns="45720" rIns="91440" bIns="45720" rtlCol="0" anchor="ctr">
-            <a:noAutofit/>
-          </a:bodyPr>
-          <a:lstStyle>
-            <a:lvl1pPr>
-              <a:spcBef>
-                <a:spcPct val="0"/>
-              </a:spcBef>
-              <a:buNone/>
-              <a:defRPr sz="3200" b="0" cap="all">
-                <a:ln w="3175" cmpd="sng">
-                  <a:noFill/>
-                </a:ln>
-                <a:effectLst>
-                  <a:glow rad="38100">
-                    <a:schemeClr val="bg1">
-                      <a:lumMod val="65000"/>
-                      <a:lumOff val="35000"/>
-                      <a:alpha val="40000"/>
-                    </a:schemeClr>
-                  </a:glow>
-                  <a:outerShdw blurRad="28575" dist="38100" dir="14040000" algn="tl" rotWithShape="0">
-                    <a:srgbClr val="000000">
-                      <a:alpha val="25000"/>
-                    </a:srgbClr>
-                  </a:outerShdw>
-                </a:effectLst>
-              </a:defRPr>
-            </a:lvl1pPr>
-            <a:lvl2pPr>
-              <a:defRPr>
-                <a:solidFill>
-                  <a:schemeClr val="tx2"/>
-                </a:solidFill>
-              </a:defRPr>
-            </a:lvl2pPr>
-            <a:lvl3pPr>
-              <a:defRPr>
-                <a:solidFill>
-                  <a:schemeClr val="tx2"/>
-                </a:solidFill>
-              </a:defRPr>
-            </a:lvl3pPr>
-            <a:lvl4pPr>
-              <a:defRPr>
-                <a:solidFill>
-                  <a:schemeClr val="tx2"/>
-                </a:solidFill>
-              </a:defRPr>
-            </a:lvl4pPr>
-            <a:lvl5pPr>
-              <a:defRPr>
-                <a:solidFill>
-                  <a:schemeClr val="tx2"/>
-                </a:solidFill>
-              </a:defRPr>
-            </a:lvl5pPr>
-            <a:lvl6pPr>
-              <a:defRPr>
-                <a:solidFill>
-                  <a:schemeClr val="tx2"/>
-                </a:solidFill>
-              </a:defRPr>
-            </a:lvl6pPr>
-            <a:lvl7pPr>
-              <a:defRPr>
-                <a:solidFill>
-                  <a:schemeClr val="tx2"/>
-                </a:solidFill>
-              </a:defRPr>
-            </a:lvl7pPr>
-            <a:lvl8pPr>
-              <a:defRPr>
-                <a:solidFill>
-                  <a:schemeClr val="tx2"/>
-                </a:solidFill>
-              </a:defRPr>
-            </a:lvl8pPr>
-            <a:lvl9pPr>
-              <a:defRPr>
-                <a:solidFill>
-                  <a:schemeClr val="tx2"/>
-                </a:solidFill>
-              </a:defRPr>
-            </a:lvl9pPr>
-          </a:lstStyle>
-          <a:p>
-            <a:pPr lvl="0"/>
-            <a:r>
-              <a:rPr lang="en-US" sz="8000" dirty="0">
-                <a:solidFill>
-                  <a:schemeClr val="accent1"/>
-                </a:solidFill>
-              </a:rPr>
-              <a:t>“</a:t>
-            </a:r>
-          </a:p>
-        </p:txBody>
-      </p:sp>
-      <p:sp>
-        <p:nvSpPr>
-          <p:cNvPr id="15" name="TextBox 14"/>
-          <p:cNvSpPr txBox="1"/>
-          <p:nvPr/>
-        </p:nvSpPr>
-        <p:spPr>
-          <a:xfrm>
-            <a:off x="10437812" y="2743200"/>
-            <a:ext cx="609600" cy="584776"/>
-          </a:xfrm>
-          <a:prstGeom prst="rect">
-            <a:avLst/>
-          </a:prstGeom>
-        </p:spPr>
-        <p:txBody>
-          <a:bodyPr vert="horz" lIns="91440" tIns="45720" rIns="91440" bIns="45720" rtlCol="0" anchor="ctr">
-            <a:noAutofit/>
-          </a:bodyPr>
-          <a:lstStyle>
-            <a:lvl1pPr>
-              <a:spcBef>
-                <a:spcPct val="0"/>
-              </a:spcBef>
-              <a:buNone/>
-              <a:defRPr sz="3200" b="0" cap="all">
-                <a:ln w="3175" cmpd="sng">
-                  <a:noFill/>
-                </a:ln>
-                <a:effectLst>
-                  <a:glow rad="38100">
-                    <a:schemeClr val="bg1">
-                      <a:lumMod val="65000"/>
-                      <a:lumOff val="35000"/>
-                      <a:alpha val="40000"/>
-                    </a:schemeClr>
-                  </a:glow>
-                  <a:outerShdw blurRad="28575" dist="38100" dir="14040000" algn="tl" rotWithShape="0">
-                    <a:srgbClr val="000000">
-                      <a:alpha val="25000"/>
-                    </a:srgbClr>
-                  </a:outerShdw>
-                </a:effectLst>
-              </a:defRPr>
-            </a:lvl1pPr>
-            <a:lvl2pPr>
-              <a:defRPr>
-                <a:solidFill>
-                  <a:schemeClr val="tx2"/>
-                </a:solidFill>
-              </a:defRPr>
-            </a:lvl2pPr>
-            <a:lvl3pPr>
-              <a:defRPr>
-                <a:solidFill>
-                  <a:schemeClr val="tx2"/>
-                </a:solidFill>
-              </a:defRPr>
-            </a:lvl3pPr>
-            <a:lvl4pPr>
-              <a:defRPr>
-                <a:solidFill>
-                  <a:schemeClr val="tx2"/>
-                </a:solidFill>
-              </a:defRPr>
-            </a:lvl4pPr>
-            <a:lvl5pPr>
-              <a:defRPr>
-                <a:solidFill>
-                  <a:schemeClr val="tx2"/>
-                </a:solidFill>
-              </a:defRPr>
-            </a:lvl5pPr>
-            <a:lvl6pPr>
-              <a:defRPr>
-                <a:solidFill>
-                  <a:schemeClr val="tx2"/>
-                </a:solidFill>
-              </a:defRPr>
-            </a:lvl6pPr>
-            <a:lvl7pPr>
-              <a:defRPr>
-                <a:solidFill>
-                  <a:schemeClr val="tx2"/>
-                </a:solidFill>
-              </a:defRPr>
-            </a:lvl7pPr>
-            <a:lvl8pPr>
-              <a:defRPr>
-                <a:solidFill>
-                  <a:schemeClr val="tx2"/>
-                </a:solidFill>
-              </a:defRPr>
-            </a:lvl8pPr>
-            <a:lvl9pPr>
-              <a:defRPr>
-                <a:solidFill>
-                  <a:schemeClr val="tx2"/>
-                </a:solidFill>
-              </a:defRPr>
-            </a:lvl9pPr>
-          </a:lstStyle>
-          <a:p>
-            <a:pPr lvl="0" algn="r"/>
-            <a:r>
-              <a:rPr lang="en-US" sz="8000" dirty="0">
-                <a:solidFill>
-                  <a:schemeClr val="accent1"/>
-                </a:solidFill>
-              </a:rPr>
-              <a:t>”</a:t>
-            </a:r>
-          </a:p>
-        </p:txBody>
-      </p:sp>
-      <p:sp>
-        <p:nvSpPr>
-          <p:cNvPr id="2" name="Title 1"/>
-          <p:cNvSpPr>
-            <a:spLocks noGrp="1"/>
-          </p:cNvSpPr>
-          <p:nvPr>
-            <p:ph type="title"/>
-          </p:nvPr>
-        </p:nvSpPr>
-        <p:spPr>
-          <a:xfrm>
-            <a:off x="1446213" y="609601"/>
-            <a:ext cx="9296398" cy="2743199"/>
-          </a:xfrm>
-        </p:spPr>
-        <p:txBody>
-          <a:bodyPr anchor="ctr">
-            <a:normAutofit/>
-          </a:bodyPr>
-          <a:lstStyle>
-            <a:lvl1pPr algn="l">
-              <a:defRPr sz="3200" b="0" cap="all">
-                <a:gradFill flip="none" rotWithShape="1">
-                  <a:gsLst>
-                    <a:gs pos="0">
-                      <a:schemeClr val="tx1"/>
-                    </a:gs>
-                    <a:gs pos="100000">
-                      <a:schemeClr val="tx1">
-                        <a:lumMod val="75000"/>
-                      </a:schemeClr>
-                    </a:gs>
-                  </a:gsLst>
-                  <a:lin ang="5400000" scaled="0"/>
-                  <a:tileRect/>
-                </a:gradFill>
-              </a:defRPr>
-            </a:lvl1pPr>
-          </a:lstStyle>
-          <a:p>
-            <a:r>
-              <a:rPr lang="ru-RU"/>
-              <a:t>Образец заголовка</a:t>
-            </a:r>
-            <a:endParaRPr lang="en-US" dirty="0"/>
-          </a:p>
-        </p:txBody>
-      </p:sp>
-      <p:sp>
-        <p:nvSpPr>
-          <p:cNvPr id="10" name="Text Placeholder 9"/>
-          <p:cNvSpPr>
-            <a:spLocks noGrp="1"/>
-          </p:cNvSpPr>
-          <p:nvPr>
-            <p:ph type="body" sz="quarter" idx="13"/>
-          </p:nvPr>
-        </p:nvSpPr>
-        <p:spPr>
-          <a:xfrm>
-            <a:off x="1141412" y="3886200"/>
-            <a:ext cx="9906000" cy="889000"/>
-          </a:xfrm>
-        </p:spPr>
-        <p:txBody>
-          <a:bodyPr vert="horz" lIns="91440" tIns="45720" rIns="91440" bIns="45720" rtlCol="0" anchor="b">
-            <a:normAutofit/>
-          </a:bodyPr>
-          <a:lstStyle>
-            <a:lvl1pPr>
-              <a:buNone/>
-              <a:defRPr lang="en-US" sz="2400" b="0" cap="all" dirty="0">
-                <a:ln w="3175" cmpd="sng">
-                  <a:noFill/>
-                </a:ln>
-                <a:gradFill flip="none" rotWithShape="1">
-                  <a:gsLst>
-                    <a:gs pos="0">
-                      <a:schemeClr val="tx1"/>
-                    </a:gs>
-                    <a:gs pos="100000">
-                      <a:schemeClr val="tx1">
-                        <a:lumMod val="75000"/>
-                      </a:schemeClr>
-                    </a:gs>
-                  </a:gsLst>
-                  <a:lin ang="5400000" scaled="0"/>
-                  <a:tileRect/>
-                </a:gradFill>
-                <a:effectLst>
-                  <a:glow rad="38100">
-                    <a:schemeClr val="bg1">
-                      <a:lumMod val="65000"/>
-                      <a:lumOff val="35000"/>
-                      <a:alpha val="40000"/>
-                    </a:schemeClr>
-                  </a:glow>
-                  <a:outerShdw blurRad="28575" dist="38100" dir="14040000" algn="tl" rotWithShape="0">
-                    <a:srgbClr val="000000">
-                      <a:alpha val="25000"/>
-                    </a:srgbClr>
-                  </a:outerShdw>
-                </a:effectLst>
-              </a:defRPr>
-            </a:lvl1pPr>
-          </a:lstStyle>
-          <a:p>
-            <a:pPr marL="0" lvl="0">
-              <a:spcBef>
-                <a:spcPct val="0"/>
-              </a:spcBef>
-              <a:buNone/>
-            </a:pPr>
-            <a:r>
-              <a:rPr lang="ru-RU"/>
-              <a:t>Образец текста</a:t>
-            </a:r>
-          </a:p>
-        </p:txBody>
-      </p:sp>
-      <p:sp>
-        <p:nvSpPr>
-          <p:cNvPr id="3" name="Text Placeholder 2"/>
-          <p:cNvSpPr>
-            <a:spLocks noGrp="1"/>
-          </p:cNvSpPr>
-          <p:nvPr>
-            <p:ph type="body" idx="1"/>
-          </p:nvPr>
-        </p:nvSpPr>
-        <p:spPr>
-          <a:xfrm>
-            <a:off x="1141411" y="4775200"/>
-            <a:ext cx="9906000" cy="1016000"/>
-          </a:xfrm>
-        </p:spPr>
-        <p:txBody>
-          <a:bodyPr anchor="t">
-            <a:normAutofit/>
-          </a:bodyPr>
-          <a:lstStyle>
-            <a:lvl1pPr marL="0" indent="0" algn="l">
-              <a:buNone/>
-              <a:defRPr sz="1800">
-                <a:gradFill flip="none" rotWithShape="1">
-                  <a:gsLst>
-                    <a:gs pos="0">
-                      <a:schemeClr val="tx1"/>
-                    </a:gs>
-                    <a:gs pos="100000">
-                      <a:schemeClr val="tx1">
-                        <a:lumMod val="75000"/>
-                      </a:schemeClr>
-                    </a:gs>
-                  </a:gsLst>
-                  <a:lin ang="5400000" scaled="0"/>
-                  <a:tileRect/>
-                </a:gradFill>
-              </a:defRPr>
-            </a:lvl1pPr>
-            <a:lvl2pPr marL="457200" indent="0">
-              <a:buNone/>
-              <a:defRPr sz="1800">
-                <a:solidFill>
-                  <a:schemeClr val="tx1">
-                    <a:tint val="75000"/>
-                  </a:schemeClr>
-                </a:solidFill>
-              </a:defRPr>
-            </a:lvl2pPr>
-            <a:lvl3pPr marL="914400" indent="0">
-              <a:buNone/>
-              <a:defRPr sz="1600">
-                <a:solidFill>
-                  <a:schemeClr val="tx1">
-                    <a:tint val="75000"/>
-                  </a:schemeClr>
-                </a:solidFill>
-              </a:defRPr>
-            </a:lvl3pPr>
-            <a:lvl4pPr marL="1371600" indent="0">
-              <a:buNone/>
-              <a:defRPr sz="1400">
-                <a:solidFill>
-                  <a:schemeClr val="tx1">
-                    <a:tint val="75000"/>
-                  </a:schemeClr>
-                </a:solidFill>
-              </a:defRPr>
-            </a:lvl4pPr>
-            <a:lvl5pPr marL="1828800" indent="0">
-              <a:buNone/>
-              <a:defRPr sz="1400">
-                <a:solidFill>
-                  <a:schemeClr val="tx1">
-                    <a:tint val="75000"/>
-                  </a:schemeClr>
-                </a:solidFill>
-              </a:defRPr>
-            </a:lvl5pPr>
-            <a:lvl6pPr marL="2286000" indent="0">
-              <a:buNone/>
-              <a:defRPr sz="1400">
-                <a:solidFill>
-                  <a:schemeClr val="tx1">
-                    <a:tint val="75000"/>
-                  </a:schemeClr>
-                </a:solidFill>
-              </a:defRPr>
-            </a:lvl6pPr>
-            <a:lvl7pPr marL="2743200" indent="0">
-              <a:buNone/>
-              <a:defRPr sz="1400">
-                <a:solidFill>
-                  <a:schemeClr val="tx1">
-                    <a:tint val="75000"/>
-                  </a:schemeClr>
-                </a:solidFill>
-              </a:defRPr>
-            </a:lvl7pPr>
-            <a:lvl8pPr marL="3200400" indent="0">
-              <a:buNone/>
-              <a:defRPr sz="1400">
-                <a:solidFill>
-                  <a:schemeClr val="tx1">
-                    <a:tint val="75000"/>
-                  </a:schemeClr>
-                </a:solidFill>
-              </a:defRPr>
-            </a:lvl8pPr>
-            <a:lvl9pPr marL="3657600" indent="0">
-              <a:buNone/>
-              <a:defRPr sz="1400">
-                <a:solidFill>
-                  <a:schemeClr val="tx1">
-                    <a:tint val="75000"/>
-                  </a:schemeClr>
-                </a:solidFill>
-              </a:defRPr>
-            </a:lvl9pPr>
-          </a:lstStyle>
-          <a:p>
-            <a:pPr lvl="0"/>
-            <a:r>
-              <a:rPr lang="ru-RU"/>
-              <a:t>Образец текста</a:t>
-            </a:r>
-          </a:p>
-        </p:txBody>
-      </p:sp>
-      <p:sp>
-        <p:nvSpPr>
-          <p:cNvPr id="4" name="Date Placeholder 3"/>
-          <p:cNvSpPr>
-            <a:spLocks noGrp="1"/>
-          </p:cNvSpPr>
-          <p:nvPr>
-            <p:ph type="dt" sz="half" idx="10"/>
-          </p:nvPr>
-        </p:nvSpPr>
-        <p:spPr/>
-        <p:txBody>
-          <a:bodyPr/>
-          <a:lstStyle/>
-          <a:p>
-            <a:fld id="{0F3EF48A-07EF-4B56-98CC-C04B85084176}" type="datetimeFigureOut">
-              <a:rPr lang="ru-RU" smtClean="0"/>
-              <a:t>17.11.2025</a:t>
-            </a:fld>
-            <a:endParaRPr lang="ru-RU"/>
-          </a:p>
-        </p:txBody>
-      </p:sp>
-      <p:sp>
-        <p:nvSpPr>
-          <p:cNvPr id="5" name="Footer Placeholder 4"/>
-          <p:cNvSpPr>
-            <a:spLocks noGrp="1"/>
-          </p:cNvSpPr>
-          <p:nvPr>
-            <p:ph type="ftr" sz="quarter" idx="11"/>
-          </p:nvPr>
-        </p:nvSpPr>
-        <p:spPr/>
-        <p:txBody>
-          <a:bodyPr/>
-          <a:lstStyle/>
-          <a:p>
-            <a:endParaRPr lang="ru-RU"/>
-          </a:p>
-        </p:txBody>
-      </p:sp>
-      <p:sp>
-        <p:nvSpPr>
-          <p:cNvPr id="6" name="Slide Number Placeholder 5"/>
-          <p:cNvSpPr>
-            <a:spLocks noGrp="1"/>
-          </p:cNvSpPr>
-          <p:nvPr>
-            <p:ph type="sldNum" sz="quarter" idx="12"/>
-          </p:nvPr>
-        </p:nvSpPr>
-        <p:spPr/>
-        <p:txBody>
-          <a:bodyPr/>
-          <a:lstStyle/>
-          <a:p>
-            <a:fld id="{60571A86-228C-4398-8B0D-AB49A380E357}" type="slidenum">
-              <a:rPr lang="ru-RU" smtClean="0"/>
-              <a:t>‹#›</a:t>
-            </a:fld>
-            <a:endParaRPr lang="ru-RU"/>
-          </a:p>
-        </p:txBody>
-      </p:sp>
-    </p:spTree>
-    <p:extLst>
-      <p:ext uri="{BB962C8B-B14F-4D97-AF65-F5344CB8AC3E}">
-        <p14:creationId xmlns:p14="http://schemas.microsoft.com/office/powerpoint/2010/main" val="1965579846"/>
-      </p:ext>
-    </p:extLst>
-  </p:cSld>
-  <p:clrMapOvr>
-    <a:masterClrMapping/>
-  </p:clrMapOvr>
-</p:sldLayout>
-</file>
-
-<file path=ppt/slideLayouts/slideLayout15.xml><?xml version="1.0" encoding="utf-8"?>
-<p:sldLayout xmlns:a="http://schemas.openxmlformats.org/drawingml/2006/main" xmlns:r="http://schemas.openxmlformats.org/officeDocument/2006/relationships" xmlns:p="http://schemas.openxmlformats.org/presentationml/2006/main" preserve="1">
-  <p:cSld name="Истина или ложь">
-    <p:spTree>
-      <p:nvGrpSpPr>
-        <p:cNvPr id="1" name=""/>
-        <p:cNvGrpSpPr/>
-        <p:nvPr/>
-      </p:nvGrpSpPr>
-      <p:grpSpPr>
-        <a:xfrm>
-          <a:off x="0" y="0"/>
-          <a:ext cx="0" cy="0"/>
-          <a:chOff x="0" y="0"/>
-          <a:chExt cx="0" cy="0"/>
-        </a:xfrm>
-      </p:grpSpPr>
-      <p:sp>
-        <p:nvSpPr>
-          <p:cNvPr id="2" name="Title 1"/>
-          <p:cNvSpPr>
-            <a:spLocks noGrp="1"/>
-          </p:cNvSpPr>
-          <p:nvPr>
-            <p:ph type="title"/>
-          </p:nvPr>
-        </p:nvSpPr>
-        <p:spPr>
-          <a:xfrm>
-            <a:off x="1141412" y="609601"/>
-            <a:ext cx="9905999" cy="2743199"/>
-          </a:xfrm>
-        </p:spPr>
-        <p:txBody>
-          <a:bodyPr vert="horz" lIns="91440" tIns="45720" rIns="91440" bIns="45720" rtlCol="0" anchor="ctr">
-            <a:normAutofit/>
-          </a:bodyPr>
-          <a:lstStyle>
-            <a:lvl1pPr>
-              <a:defRPr lang="en-US" b="0" dirty="0"/>
-            </a:lvl1pPr>
-          </a:lstStyle>
-          <a:p>
-            <a:pPr marL="0" lvl="0"/>
-            <a:r>
-              <a:rPr lang="ru-RU"/>
-              <a:t>Образец заголовка</a:t>
-            </a:r>
-            <a:endParaRPr lang="en-US" dirty="0"/>
-          </a:p>
-        </p:txBody>
-      </p:sp>
-      <p:sp>
-        <p:nvSpPr>
-          <p:cNvPr id="10" name="Text Placeholder 9"/>
-          <p:cNvSpPr>
-            <a:spLocks noGrp="1"/>
-          </p:cNvSpPr>
-          <p:nvPr>
-            <p:ph type="body" sz="quarter" idx="13"/>
-          </p:nvPr>
-        </p:nvSpPr>
-        <p:spPr>
-          <a:xfrm>
-            <a:off x="1141412" y="3505200"/>
-            <a:ext cx="9906000" cy="838200"/>
-          </a:xfrm>
-        </p:spPr>
-        <p:txBody>
-          <a:bodyPr vert="horz" lIns="91440" tIns="45720" rIns="91440" bIns="45720" rtlCol="0" anchor="b">
-            <a:normAutofit/>
-          </a:bodyPr>
-          <a:lstStyle>
-            <a:lvl1pPr>
-              <a:buNone/>
-              <a:defRPr lang="en-US" sz="2800" b="0" cap="all" dirty="0">
-                <a:ln w="3175" cmpd="sng">
-                  <a:noFill/>
-                </a:ln>
-                <a:gradFill flip="none" rotWithShape="1">
-                  <a:gsLst>
-                    <a:gs pos="0">
-                      <a:schemeClr val="tx1"/>
-                    </a:gs>
-                    <a:gs pos="100000">
-                      <a:schemeClr val="tx1">
-                        <a:lumMod val="75000"/>
-                      </a:schemeClr>
-                    </a:gs>
-                  </a:gsLst>
-                  <a:lin ang="5400000" scaled="0"/>
-                  <a:tileRect/>
-                </a:gradFill>
-                <a:effectLst>
-                  <a:glow rad="38100">
-                    <a:schemeClr val="bg1">
-                      <a:lumMod val="65000"/>
-                      <a:lumOff val="35000"/>
-                      <a:alpha val="40000"/>
-                    </a:schemeClr>
-                  </a:glow>
-                  <a:outerShdw blurRad="28575" dist="38100" dir="14040000" algn="tl" rotWithShape="0">
-                    <a:srgbClr val="000000">
-                      <a:alpha val="25000"/>
-                    </a:srgbClr>
-                  </a:outerShdw>
-                </a:effectLst>
-              </a:defRPr>
-            </a:lvl1pPr>
-          </a:lstStyle>
-          <a:p>
-            <a:pPr marL="0" lvl="0">
-              <a:spcBef>
-                <a:spcPct val="0"/>
-              </a:spcBef>
-              <a:buNone/>
-            </a:pPr>
-            <a:r>
-              <a:rPr lang="ru-RU"/>
-              <a:t>Образец текста</a:t>
-            </a:r>
-          </a:p>
-        </p:txBody>
-      </p:sp>
-      <p:sp>
-        <p:nvSpPr>
-          <p:cNvPr id="3" name="Text Placeholder 2"/>
-          <p:cNvSpPr>
-            <a:spLocks noGrp="1"/>
-          </p:cNvSpPr>
-          <p:nvPr>
-            <p:ph type="body" idx="1"/>
-          </p:nvPr>
-        </p:nvSpPr>
-        <p:spPr>
-          <a:xfrm>
-            <a:off x="1141411" y="4343400"/>
-            <a:ext cx="9906000" cy="1447800"/>
-          </a:xfrm>
-        </p:spPr>
-        <p:txBody>
-          <a:bodyPr anchor="t">
-            <a:normAutofit/>
-          </a:bodyPr>
-          <a:lstStyle>
-            <a:lvl1pPr marL="0" indent="0" algn="l">
-              <a:buNone/>
-              <a:defRPr sz="1800">
-                <a:gradFill flip="none" rotWithShape="1">
-                  <a:gsLst>
-                    <a:gs pos="0">
-                      <a:schemeClr val="tx1"/>
-                    </a:gs>
-                    <a:gs pos="100000">
-                      <a:schemeClr val="tx1">
-                        <a:lumMod val="75000"/>
-                      </a:schemeClr>
-                    </a:gs>
-                  </a:gsLst>
-                  <a:lin ang="5400000" scaled="0"/>
-                  <a:tileRect/>
-                </a:gradFill>
-              </a:defRPr>
-            </a:lvl1pPr>
-            <a:lvl2pPr marL="457200" indent="0">
-              <a:buNone/>
-              <a:defRPr sz="1800">
-                <a:solidFill>
-                  <a:schemeClr val="tx1">
-                    <a:tint val="75000"/>
-                  </a:schemeClr>
-                </a:solidFill>
-              </a:defRPr>
-            </a:lvl2pPr>
-            <a:lvl3pPr marL="914400" indent="0">
-              <a:buNone/>
-              <a:defRPr sz="1600">
-                <a:solidFill>
-                  <a:schemeClr val="tx1">
-                    <a:tint val="75000"/>
-                  </a:schemeClr>
-                </a:solidFill>
-              </a:defRPr>
-            </a:lvl3pPr>
-            <a:lvl4pPr marL="1371600" indent="0">
-              <a:buNone/>
-              <a:defRPr sz="1400">
-                <a:solidFill>
-                  <a:schemeClr val="tx1">
-                    <a:tint val="75000"/>
-                  </a:schemeClr>
-                </a:solidFill>
-              </a:defRPr>
-            </a:lvl4pPr>
-            <a:lvl5pPr marL="1828800" indent="0">
-              <a:buNone/>
-              <a:defRPr sz="1400">
-                <a:solidFill>
-                  <a:schemeClr val="tx1">
-                    <a:tint val="75000"/>
-                  </a:schemeClr>
-                </a:solidFill>
-              </a:defRPr>
-            </a:lvl5pPr>
-            <a:lvl6pPr marL="2286000" indent="0">
-              <a:buNone/>
-              <a:defRPr sz="1400">
-                <a:solidFill>
-                  <a:schemeClr val="tx1">
-                    <a:tint val="75000"/>
-                  </a:schemeClr>
-                </a:solidFill>
-              </a:defRPr>
-            </a:lvl6pPr>
-            <a:lvl7pPr marL="2743200" indent="0">
-              <a:buNone/>
-              <a:defRPr sz="1400">
-                <a:solidFill>
-                  <a:schemeClr val="tx1">
-                    <a:tint val="75000"/>
-                  </a:schemeClr>
-                </a:solidFill>
-              </a:defRPr>
-            </a:lvl7pPr>
-            <a:lvl8pPr marL="3200400" indent="0">
-              <a:buNone/>
-              <a:defRPr sz="1400">
-                <a:solidFill>
-                  <a:schemeClr val="tx1">
-                    <a:tint val="75000"/>
-                  </a:schemeClr>
-                </a:solidFill>
-              </a:defRPr>
-            </a:lvl8pPr>
-            <a:lvl9pPr marL="3657600" indent="0">
-              <a:buNone/>
-              <a:defRPr sz="1400">
-                <a:solidFill>
-                  <a:schemeClr val="tx1">
-                    <a:tint val="75000"/>
-                  </a:schemeClr>
-                </a:solidFill>
-              </a:defRPr>
-            </a:lvl9pPr>
-          </a:lstStyle>
-          <a:p>
-            <a:pPr lvl="0"/>
-            <a:r>
-              <a:rPr lang="ru-RU"/>
-              <a:t>Образец текста</a:t>
-            </a:r>
-          </a:p>
-        </p:txBody>
-      </p:sp>
-      <p:sp>
-        <p:nvSpPr>
-          <p:cNvPr id="4" name="Date Placeholder 3"/>
-          <p:cNvSpPr>
-            <a:spLocks noGrp="1"/>
-          </p:cNvSpPr>
-          <p:nvPr>
-            <p:ph type="dt" sz="half" idx="10"/>
-          </p:nvPr>
-        </p:nvSpPr>
-        <p:spPr/>
-        <p:txBody>
-          <a:bodyPr/>
-          <a:lstStyle/>
-          <a:p>
-            <a:fld id="{0F3EF48A-07EF-4B56-98CC-C04B85084176}" type="datetimeFigureOut">
-              <a:rPr lang="ru-RU" smtClean="0"/>
-              <a:t>17.11.2025</a:t>
-            </a:fld>
-            <a:endParaRPr lang="ru-RU"/>
-          </a:p>
-        </p:txBody>
-      </p:sp>
-      <p:sp>
-        <p:nvSpPr>
-          <p:cNvPr id="5" name="Footer Placeholder 4"/>
-          <p:cNvSpPr>
-            <a:spLocks noGrp="1"/>
-          </p:cNvSpPr>
-          <p:nvPr>
-            <p:ph type="ftr" sz="quarter" idx="11"/>
-          </p:nvPr>
-        </p:nvSpPr>
-        <p:spPr/>
-        <p:txBody>
-          <a:bodyPr/>
-          <a:lstStyle/>
-          <a:p>
-            <a:endParaRPr lang="ru-RU"/>
-          </a:p>
-        </p:txBody>
-      </p:sp>
-      <p:sp>
-        <p:nvSpPr>
-          <p:cNvPr id="6" name="Slide Number Placeholder 5"/>
-          <p:cNvSpPr>
-            <a:spLocks noGrp="1"/>
-          </p:cNvSpPr>
-          <p:nvPr>
-            <p:ph type="sldNum" sz="quarter" idx="12"/>
-          </p:nvPr>
-        </p:nvSpPr>
-        <p:spPr/>
-        <p:txBody>
-          <a:bodyPr/>
-          <a:lstStyle/>
-          <a:p>
-            <a:fld id="{60571A86-228C-4398-8B0D-AB49A380E357}" type="slidenum">
-              <a:rPr lang="ru-RU" smtClean="0"/>
-              <a:t>‹#›</a:t>
-            </a:fld>
-            <a:endParaRPr lang="ru-RU"/>
-          </a:p>
-        </p:txBody>
-      </p:sp>
-    </p:spTree>
-    <p:extLst>
-      <p:ext uri="{BB962C8B-B14F-4D97-AF65-F5344CB8AC3E}">
-        <p14:creationId xmlns:p14="http://schemas.microsoft.com/office/powerpoint/2010/main" val="4122355327"/>
-      </p:ext>
-    </p:extLst>
-  </p:cSld>
-  <p:clrMapOvr>
-    <a:masterClrMapping/>
-  </p:clrMapOvr>
-</p:sldLayout>
-</file>
-
-<file path=ppt/slideLayouts/slideLayout16.xml><?xml version="1.0" encoding="utf-8"?>
 <p:sldLayout xmlns:a="http://schemas.openxmlformats.org/drawingml/2006/main" xmlns:r="http://schemas.openxmlformats.org/officeDocument/2006/relationships" xmlns:p="http://schemas.openxmlformats.org/presentationml/2006/main" type="vertTx" preserve="1">
   <p:cSld name="Заголовок и вертикальный текст">
     <p:spTree>
@@ -3167,7 +1006,13 @@
       </p:grpSpPr>
       <p:sp>
         <p:nvSpPr>
-          <p:cNvPr id="7" name="Title 1"/>
+          <p:cNvPr id="2" name="Заголовок 1">
+            <a:extLst>
+              <a:ext uri="{FF2B5EF4-FFF2-40B4-BE49-F238E27FC236}">
+                <a16:creationId xmlns:a16="http://schemas.microsoft.com/office/drawing/2014/main" id="{C23056DD-0991-DC7B-0736-B9284BC4E4A0}"/>
+              </a:ext>
+            </a:extLst>
+          </p:cNvPr>
           <p:cNvSpPr>
             <a:spLocks noGrp="1"/>
           </p:cNvSpPr>
@@ -3175,12 +1020,7 @@
             <p:ph type="title"/>
           </p:nvPr>
         </p:nvSpPr>
-        <p:spPr>
-          <a:xfrm>
-            <a:off x="1141413" y="609600"/>
-            <a:ext cx="9905998" cy="1905000"/>
-          </a:xfrm>
-        </p:spPr>
+        <p:spPr/>
         <p:txBody>
           <a:bodyPr/>
           <a:lstStyle/>
@@ -3189,13 +1029,18 @@
               <a:rPr lang="ru-RU"/>
               <a:t>Образец заголовка</a:t>
             </a:r>
-            <a:endParaRPr lang="en-US" dirty="0"/>
-          </a:p>
-        </p:txBody>
-      </p:sp>
-      <p:sp>
-        <p:nvSpPr>
-          <p:cNvPr id="3" name="Vertical Text Placeholder 2"/>
+          </a:p>
+        </p:txBody>
+      </p:sp>
+      <p:sp>
+        <p:nvSpPr>
+          <p:cNvPr id="3" name="Вертикальный текст 2">
+            <a:extLst>
+              <a:ext uri="{FF2B5EF4-FFF2-40B4-BE49-F238E27FC236}">
+                <a16:creationId xmlns:a16="http://schemas.microsoft.com/office/drawing/2014/main" id="{1978476D-5719-33CC-1CDB-C02F50EB6F67}"/>
+              </a:ext>
+            </a:extLst>
+          </p:cNvPr>
           <p:cNvSpPr>
             <a:spLocks noGrp="1"/>
           </p:cNvSpPr>
@@ -3205,7 +1050,7 @@
         </p:nvSpPr>
         <p:spPr/>
         <p:txBody>
-          <a:bodyPr vert="eaVert" anchor="t"/>
+          <a:bodyPr vert="eaVert"/>
           <a:lstStyle/>
           <a:p>
             <a:pPr lvl="0"/>
@@ -3241,13 +1086,18 @@
               <a:rPr lang="ru-RU"/>
               <a:t>Пятый уровень</a:t>
             </a:r>
-            <a:endParaRPr lang="en-US" dirty="0"/>
-          </a:p>
-        </p:txBody>
-      </p:sp>
-      <p:sp>
-        <p:nvSpPr>
-          <p:cNvPr id="4" name="Date Placeholder 3"/>
+          </a:p>
+        </p:txBody>
+      </p:sp>
+      <p:sp>
+        <p:nvSpPr>
+          <p:cNvPr id="4" name="Дата 3">
+            <a:extLst>
+              <a:ext uri="{FF2B5EF4-FFF2-40B4-BE49-F238E27FC236}">
+                <a16:creationId xmlns:a16="http://schemas.microsoft.com/office/drawing/2014/main" id="{232AA2D5-7911-19B1-03FF-4DAAA2F3D191}"/>
+              </a:ext>
+            </a:extLst>
+          </p:cNvPr>
           <p:cNvSpPr>
             <a:spLocks noGrp="1"/>
           </p:cNvSpPr>
@@ -3262,7 +1112,7 @@
           <a:p>
             <a:fld id="{0F3EF48A-07EF-4B56-98CC-C04B85084176}" type="datetimeFigureOut">
               <a:rPr lang="ru-RU" smtClean="0"/>
-              <a:t>17.11.2025</a:t>
+              <a:t>02.03.2026</a:t>
             </a:fld>
             <a:endParaRPr lang="ru-RU"/>
           </a:p>
@@ -3270,7 +1120,13 @@
       </p:sp>
       <p:sp>
         <p:nvSpPr>
-          <p:cNvPr id="5" name="Footer Placeholder 4"/>
+          <p:cNvPr id="5" name="Нижний колонтитул 4">
+            <a:extLst>
+              <a:ext uri="{FF2B5EF4-FFF2-40B4-BE49-F238E27FC236}">
+                <a16:creationId xmlns:a16="http://schemas.microsoft.com/office/drawing/2014/main" id="{6A6F81F1-03CF-EC67-7EB5-0206CEEEE74E}"/>
+              </a:ext>
+            </a:extLst>
+          </p:cNvPr>
           <p:cNvSpPr>
             <a:spLocks noGrp="1"/>
           </p:cNvSpPr>
@@ -3289,7 +1145,13 @@
       </p:sp>
       <p:sp>
         <p:nvSpPr>
-          <p:cNvPr id="6" name="Slide Number Placeholder 5"/>
+          <p:cNvPr id="6" name="Номер слайда 5">
+            <a:extLst>
+              <a:ext uri="{FF2B5EF4-FFF2-40B4-BE49-F238E27FC236}">
+                <a16:creationId xmlns:a16="http://schemas.microsoft.com/office/drawing/2014/main" id="{23A5B4F7-3C0D-6D31-B2CA-1D6EDAD94686}"/>
+              </a:ext>
+            </a:extLst>
+          </p:cNvPr>
           <p:cNvSpPr>
             <a:spLocks noGrp="1"/>
           </p:cNvSpPr>
@@ -3313,7 +1175,7 @@
     </p:spTree>
     <p:extLst>
       <p:ext uri="{BB962C8B-B14F-4D97-AF65-F5344CB8AC3E}">
-        <p14:creationId xmlns:p14="http://schemas.microsoft.com/office/powerpoint/2010/main" val="782478411"/>
+        <p14:creationId xmlns:p14="http://schemas.microsoft.com/office/powerpoint/2010/main" val="4040937146"/>
       </p:ext>
     </p:extLst>
   </p:cSld>
@@ -3323,7 +1185,7 @@
 </p:sldLayout>
 </file>
 
-<file path=ppt/slideLayouts/slideLayout17.xml><?xml version="1.0" encoding="utf-8"?>
+<file path=ppt/slideLayouts/slideLayout11.xml><?xml version="1.0" encoding="utf-8"?>
 <p:sldLayout xmlns:a="http://schemas.openxmlformats.org/drawingml/2006/main" xmlns:r="http://schemas.openxmlformats.org/officeDocument/2006/relationships" xmlns:p="http://schemas.openxmlformats.org/presentationml/2006/main" type="vertTitleAndTx" preserve="1">
   <p:cSld name="Вертикальный заголовок и текст">
     <p:spTree>
@@ -3342,7 +1204,13 @@
       </p:grpSpPr>
       <p:sp>
         <p:nvSpPr>
-          <p:cNvPr id="2" name="Vertical Title 1"/>
+          <p:cNvPr id="2" name="Вертикальный заголовок 1">
+            <a:extLst>
+              <a:ext uri="{FF2B5EF4-FFF2-40B4-BE49-F238E27FC236}">
+                <a16:creationId xmlns:a16="http://schemas.microsoft.com/office/drawing/2014/main" id="{BD0C9D81-02B3-BF76-ACCA-95876B9178DD}"/>
+              </a:ext>
+            </a:extLst>
+          </p:cNvPr>
           <p:cNvSpPr>
             <a:spLocks noGrp="1"/>
           </p:cNvSpPr>
@@ -3352,8 +1220,8 @@
         </p:nvSpPr>
         <p:spPr>
           <a:xfrm>
-            <a:off x="8836898" y="609599"/>
-            <a:ext cx="2210514" cy="5181601"/>
+            <a:off x="8724900" y="365125"/>
+            <a:ext cx="2628900" cy="5811838"/>
           </a:xfrm>
         </p:spPr>
         <p:txBody>
@@ -3364,13 +1232,18 @@
               <a:rPr lang="ru-RU"/>
               <a:t>Образец заголовка</a:t>
             </a:r>
-            <a:endParaRPr lang="en-US" dirty="0"/>
-          </a:p>
-        </p:txBody>
-      </p:sp>
-      <p:sp>
-        <p:nvSpPr>
-          <p:cNvPr id="3" name="Vertical Text Placeholder 2"/>
+          </a:p>
+        </p:txBody>
+      </p:sp>
+      <p:sp>
+        <p:nvSpPr>
+          <p:cNvPr id="3" name="Вертикальный текст 2">
+            <a:extLst>
+              <a:ext uri="{FF2B5EF4-FFF2-40B4-BE49-F238E27FC236}">
+                <a16:creationId xmlns:a16="http://schemas.microsoft.com/office/drawing/2014/main" id="{B17FBA24-35A0-3EC8-1F22-AB6D4B831BCE}"/>
+              </a:ext>
+            </a:extLst>
+          </p:cNvPr>
           <p:cNvSpPr>
             <a:spLocks noGrp="1"/>
           </p:cNvSpPr>
@@ -3380,12 +1253,12 @@
         </p:nvSpPr>
         <p:spPr>
           <a:xfrm>
-            <a:off x="1141412" y="609600"/>
-            <a:ext cx="7543800" cy="5181600"/>
+            <a:off x="838200" y="365125"/>
+            <a:ext cx="7734300" cy="5811838"/>
           </a:xfrm>
         </p:spPr>
         <p:txBody>
-          <a:bodyPr vert="eaVert" anchor="t"/>
+          <a:bodyPr vert="eaVert"/>
           <a:lstStyle/>
           <a:p>
             <a:pPr lvl="0"/>
@@ -3421,13 +1294,18 @@
               <a:rPr lang="ru-RU"/>
               <a:t>Пятый уровень</a:t>
             </a:r>
-            <a:endParaRPr lang="en-US" dirty="0"/>
-          </a:p>
-        </p:txBody>
-      </p:sp>
-      <p:sp>
-        <p:nvSpPr>
-          <p:cNvPr id="4" name="Date Placeholder 3"/>
+          </a:p>
+        </p:txBody>
+      </p:sp>
+      <p:sp>
+        <p:nvSpPr>
+          <p:cNvPr id="4" name="Дата 3">
+            <a:extLst>
+              <a:ext uri="{FF2B5EF4-FFF2-40B4-BE49-F238E27FC236}">
+                <a16:creationId xmlns:a16="http://schemas.microsoft.com/office/drawing/2014/main" id="{8FFB554C-C5A1-B813-5E39-ED3C0492327F}"/>
+              </a:ext>
+            </a:extLst>
+          </p:cNvPr>
           <p:cNvSpPr>
             <a:spLocks noGrp="1"/>
           </p:cNvSpPr>
@@ -3442,7 +1320,7 @@
           <a:p>
             <a:fld id="{0F3EF48A-07EF-4B56-98CC-C04B85084176}" type="datetimeFigureOut">
               <a:rPr lang="ru-RU" smtClean="0"/>
-              <a:t>17.11.2025</a:t>
+              <a:t>02.03.2026</a:t>
             </a:fld>
             <a:endParaRPr lang="ru-RU"/>
           </a:p>
@@ -3450,7 +1328,13 @@
       </p:sp>
       <p:sp>
         <p:nvSpPr>
-          <p:cNvPr id="5" name="Footer Placeholder 4"/>
+          <p:cNvPr id="5" name="Нижний колонтитул 4">
+            <a:extLst>
+              <a:ext uri="{FF2B5EF4-FFF2-40B4-BE49-F238E27FC236}">
+                <a16:creationId xmlns:a16="http://schemas.microsoft.com/office/drawing/2014/main" id="{413B41BB-1F8A-B746-3EF9-B3EB5C62AA54}"/>
+              </a:ext>
+            </a:extLst>
+          </p:cNvPr>
           <p:cNvSpPr>
             <a:spLocks noGrp="1"/>
           </p:cNvSpPr>
@@ -3469,7 +1353,13 @@
       </p:sp>
       <p:sp>
         <p:nvSpPr>
-          <p:cNvPr id="6" name="Slide Number Placeholder 5"/>
+          <p:cNvPr id="6" name="Номер слайда 5">
+            <a:extLst>
+              <a:ext uri="{FF2B5EF4-FFF2-40B4-BE49-F238E27FC236}">
+                <a16:creationId xmlns:a16="http://schemas.microsoft.com/office/drawing/2014/main" id="{24678C44-BBB9-A3DB-001E-58BA4BFE493A}"/>
+              </a:ext>
+            </a:extLst>
+          </p:cNvPr>
           <p:cNvSpPr>
             <a:spLocks noGrp="1"/>
           </p:cNvSpPr>
@@ -3493,7 +1383,7 @@
     </p:spTree>
     <p:extLst>
       <p:ext uri="{BB962C8B-B14F-4D97-AF65-F5344CB8AC3E}">
-        <p14:creationId xmlns:p14="http://schemas.microsoft.com/office/powerpoint/2010/main" val="318224940"/>
+        <p14:creationId xmlns:p14="http://schemas.microsoft.com/office/powerpoint/2010/main" val="4208027887"/>
       </p:ext>
     </p:extLst>
   </p:cSld>
@@ -3522,7 +1412,13 @@
       </p:grpSpPr>
       <p:sp>
         <p:nvSpPr>
-          <p:cNvPr id="2" name="Title 1"/>
+          <p:cNvPr id="2" name="Заголовок 1">
+            <a:extLst>
+              <a:ext uri="{FF2B5EF4-FFF2-40B4-BE49-F238E27FC236}">
+                <a16:creationId xmlns:a16="http://schemas.microsoft.com/office/drawing/2014/main" id="{5B60965B-7F55-B2CB-6672-1637E8901807}"/>
+              </a:ext>
+            </a:extLst>
+          </p:cNvPr>
           <p:cNvSpPr>
             <a:spLocks noGrp="1"/>
           </p:cNvSpPr>
@@ -3539,13 +1435,18 @@
               <a:rPr lang="ru-RU"/>
               <a:t>Образец заголовка</a:t>
             </a:r>
-            <a:endParaRPr lang="en-US" dirty="0"/>
-          </a:p>
-        </p:txBody>
-      </p:sp>
-      <p:sp>
-        <p:nvSpPr>
-          <p:cNvPr id="3" name="Content Placeholder 2"/>
+          </a:p>
+        </p:txBody>
+      </p:sp>
+      <p:sp>
+        <p:nvSpPr>
+          <p:cNvPr id="3" name="Объект 2">
+            <a:extLst>
+              <a:ext uri="{FF2B5EF4-FFF2-40B4-BE49-F238E27FC236}">
+                <a16:creationId xmlns:a16="http://schemas.microsoft.com/office/drawing/2014/main" id="{7E1F649C-C212-6D25-666A-23AB128380E4}"/>
+              </a:ext>
+            </a:extLst>
+          </p:cNvPr>
           <p:cNvSpPr>
             <a:spLocks noGrp="1"/>
           </p:cNvSpPr>
@@ -3555,7 +1456,7 @@
         </p:nvSpPr>
         <p:spPr/>
         <p:txBody>
-          <a:bodyPr anchor="ctr"/>
+          <a:bodyPr/>
           <a:lstStyle/>
           <a:p>
             <a:pPr lvl="0"/>
@@ -3591,13 +1492,18 @@
               <a:rPr lang="ru-RU"/>
               <a:t>Пятый уровень</a:t>
             </a:r>
-            <a:endParaRPr lang="en-US" dirty="0"/>
-          </a:p>
-        </p:txBody>
-      </p:sp>
-      <p:sp>
-        <p:nvSpPr>
-          <p:cNvPr id="4" name="Date Placeholder 3"/>
+          </a:p>
+        </p:txBody>
+      </p:sp>
+      <p:sp>
+        <p:nvSpPr>
+          <p:cNvPr id="4" name="Дата 3">
+            <a:extLst>
+              <a:ext uri="{FF2B5EF4-FFF2-40B4-BE49-F238E27FC236}">
+                <a16:creationId xmlns:a16="http://schemas.microsoft.com/office/drawing/2014/main" id="{25660AA9-9F79-A869-492F-F6CCE47D7CC9}"/>
+              </a:ext>
+            </a:extLst>
+          </p:cNvPr>
           <p:cNvSpPr>
             <a:spLocks noGrp="1"/>
           </p:cNvSpPr>
@@ -3612,7 +1518,7 @@
           <a:p>
             <a:fld id="{0F3EF48A-07EF-4B56-98CC-C04B85084176}" type="datetimeFigureOut">
               <a:rPr lang="ru-RU" smtClean="0"/>
-              <a:t>17.11.2025</a:t>
+              <a:t>02.03.2026</a:t>
             </a:fld>
             <a:endParaRPr lang="ru-RU"/>
           </a:p>
@@ -3620,7 +1526,13 @@
       </p:sp>
       <p:sp>
         <p:nvSpPr>
-          <p:cNvPr id="5" name="Footer Placeholder 4"/>
+          <p:cNvPr id="5" name="Нижний колонтитул 4">
+            <a:extLst>
+              <a:ext uri="{FF2B5EF4-FFF2-40B4-BE49-F238E27FC236}">
+                <a16:creationId xmlns:a16="http://schemas.microsoft.com/office/drawing/2014/main" id="{DAC8543B-5BB8-1377-60DC-A2E7287B7DFD}"/>
+              </a:ext>
+            </a:extLst>
+          </p:cNvPr>
           <p:cNvSpPr>
             <a:spLocks noGrp="1"/>
           </p:cNvSpPr>
@@ -3639,7 +1551,13 @@
       </p:sp>
       <p:sp>
         <p:nvSpPr>
-          <p:cNvPr id="6" name="Slide Number Placeholder 5"/>
+          <p:cNvPr id="6" name="Номер слайда 5">
+            <a:extLst>
+              <a:ext uri="{FF2B5EF4-FFF2-40B4-BE49-F238E27FC236}">
+                <a16:creationId xmlns:a16="http://schemas.microsoft.com/office/drawing/2014/main" id="{81C03D42-182C-9DBD-CE67-DC8AF6AD216A}"/>
+              </a:ext>
+            </a:extLst>
+          </p:cNvPr>
           <p:cNvSpPr>
             <a:spLocks noGrp="1"/>
           </p:cNvSpPr>
@@ -3663,7 +1581,7 @@
     </p:spTree>
     <p:extLst>
       <p:ext uri="{BB962C8B-B14F-4D97-AF65-F5344CB8AC3E}">
-        <p14:creationId xmlns:p14="http://schemas.microsoft.com/office/powerpoint/2010/main" val="3969433170"/>
+        <p14:creationId xmlns:p14="http://schemas.microsoft.com/office/powerpoint/2010/main" val="3828252675"/>
       </p:ext>
     </p:extLst>
   </p:cSld>
@@ -3692,7 +1610,13 @@
       </p:grpSpPr>
       <p:sp>
         <p:nvSpPr>
-          <p:cNvPr id="2" name="Title 1"/>
+          <p:cNvPr id="2" name="Заголовок 1">
+            <a:extLst>
+              <a:ext uri="{FF2B5EF4-FFF2-40B4-BE49-F238E27FC236}">
+                <a16:creationId xmlns:a16="http://schemas.microsoft.com/office/drawing/2014/main" id="{8B5D4506-0191-8BA8-0F72-D3DF38AD46A7}"/>
+              </a:ext>
+            </a:extLst>
+          </p:cNvPr>
           <p:cNvSpPr>
             <a:spLocks noGrp="1"/>
           </p:cNvSpPr>
@@ -3702,15 +1626,15 @@
         </p:nvSpPr>
         <p:spPr>
           <a:xfrm>
-            <a:off x="1751013" y="3308581"/>
-            <a:ext cx="8686800" cy="1468800"/>
+            <a:off x="831850" y="1709738"/>
+            <a:ext cx="10515600" cy="2852737"/>
           </a:xfrm>
         </p:spPr>
         <p:txBody>
           <a:bodyPr anchor="b"/>
           <a:lstStyle>
-            <a:lvl1pPr algn="r">
-              <a:defRPr sz="4000" b="0" cap="all"/>
+            <a:lvl1pPr>
+              <a:defRPr sz="6000"/>
             </a:lvl1pPr>
           </a:lstStyle>
           <a:p>
@@ -3718,13 +1642,18 @@
               <a:rPr lang="ru-RU"/>
               <a:t>Образец заголовка</a:t>
             </a:r>
-            <a:endParaRPr lang="en-US" dirty="0"/>
-          </a:p>
-        </p:txBody>
-      </p:sp>
-      <p:sp>
-        <p:nvSpPr>
-          <p:cNvPr id="3" name="Text Placeholder 2"/>
+          </a:p>
+        </p:txBody>
+      </p:sp>
+      <p:sp>
+        <p:nvSpPr>
+          <p:cNvPr id="3" name="Текст 2">
+            <a:extLst>
+              <a:ext uri="{FF2B5EF4-FFF2-40B4-BE49-F238E27FC236}">
+                <a16:creationId xmlns:a16="http://schemas.microsoft.com/office/drawing/2014/main" id="{985B9FDC-8D8C-1A30-BB6E-AFA23B41E818}"/>
+              </a:ext>
+            </a:extLst>
+          </p:cNvPr>
           <p:cNvSpPr>
             <a:spLocks noGrp="1"/>
           </p:cNvSpPr>
@@ -3734,37 +1663,26 @@
         </p:nvSpPr>
         <p:spPr>
           <a:xfrm>
-            <a:off x="1751011" y="4777381"/>
-            <a:ext cx="8686801" cy="860400"/>
+            <a:off x="831850" y="4589463"/>
+            <a:ext cx="10515600" cy="1500187"/>
           </a:xfrm>
         </p:spPr>
         <p:txBody>
-          <a:bodyPr anchor="t">
-            <a:normAutofit/>
-          </a:bodyPr>
+          <a:bodyPr/>
           <a:lstStyle>
-            <a:lvl1pPr marL="0" indent="0" algn="r">
+            <a:lvl1pPr marL="0" indent="0">
               <a:buNone/>
-              <a:defRPr sz="2000">
-                <a:gradFill flip="none" rotWithShape="1">
-                  <a:gsLst>
-                    <a:gs pos="0">
-                      <a:schemeClr val="tx1"/>
-                    </a:gs>
-                    <a:gs pos="100000">
-                      <a:schemeClr val="tx1">
-                        <a:lumMod val="75000"/>
-                      </a:schemeClr>
-                    </a:gs>
-                  </a:gsLst>
-                  <a:lin ang="5400000" scaled="0"/>
-                  <a:tileRect/>
-                </a:gradFill>
+              <a:defRPr sz="2400">
+                <a:solidFill>
+                  <a:schemeClr val="tx1">
+                    <a:tint val="75000"/>
+                  </a:schemeClr>
+                </a:solidFill>
               </a:defRPr>
             </a:lvl1pPr>
             <a:lvl2pPr marL="457200" indent="0">
               <a:buNone/>
-              <a:defRPr sz="1800">
+              <a:defRPr sz="2000">
                 <a:solidFill>
                   <a:schemeClr val="tx1">
                     <a:tint val="75000"/>
@@ -3774,7 +1692,7 @@
             </a:lvl2pPr>
             <a:lvl3pPr marL="914400" indent="0">
               <a:buNone/>
-              <a:defRPr sz="1600">
+              <a:defRPr sz="1800">
                 <a:solidFill>
                   <a:schemeClr val="tx1">
                     <a:tint val="75000"/>
@@ -3784,7 +1702,7 @@
             </a:lvl3pPr>
             <a:lvl4pPr marL="1371600" indent="0">
               <a:buNone/>
-              <a:defRPr sz="1400">
+              <a:defRPr sz="1600">
                 <a:solidFill>
                   <a:schemeClr val="tx1">
                     <a:tint val="75000"/>
@@ -3794,7 +1712,7 @@
             </a:lvl4pPr>
             <a:lvl5pPr marL="1828800" indent="0">
               <a:buNone/>
-              <a:defRPr sz="1400">
+              <a:defRPr sz="1600">
                 <a:solidFill>
                   <a:schemeClr val="tx1">
                     <a:tint val="75000"/>
@@ -3804,7 +1722,7 @@
             </a:lvl5pPr>
             <a:lvl6pPr marL="2286000" indent="0">
               <a:buNone/>
-              <a:defRPr sz="1400">
+              <a:defRPr sz="1600">
                 <a:solidFill>
                   <a:schemeClr val="tx1">
                     <a:tint val="75000"/>
@@ -3814,7 +1732,7 @@
             </a:lvl6pPr>
             <a:lvl7pPr marL="2743200" indent="0">
               <a:buNone/>
-              <a:defRPr sz="1400">
+              <a:defRPr sz="1600">
                 <a:solidFill>
                   <a:schemeClr val="tx1">
                     <a:tint val="75000"/>
@@ -3824,7 +1742,7 @@
             </a:lvl7pPr>
             <a:lvl8pPr marL="3200400" indent="0">
               <a:buNone/>
-              <a:defRPr sz="1400">
+              <a:defRPr sz="1600">
                 <a:solidFill>
                   <a:schemeClr val="tx1">
                     <a:tint val="75000"/>
@@ -3834,7 +1752,7 @@
             </a:lvl8pPr>
             <a:lvl9pPr marL="3657600" indent="0">
               <a:buNone/>
-              <a:defRPr sz="1400">
+              <a:defRPr sz="1600">
                 <a:solidFill>
                   <a:schemeClr val="tx1">
                     <a:tint val="75000"/>
@@ -3854,7 +1772,13 @@
       </p:sp>
       <p:sp>
         <p:nvSpPr>
-          <p:cNvPr id="4" name="Date Placeholder 3"/>
+          <p:cNvPr id="4" name="Дата 3">
+            <a:extLst>
+              <a:ext uri="{FF2B5EF4-FFF2-40B4-BE49-F238E27FC236}">
+                <a16:creationId xmlns:a16="http://schemas.microsoft.com/office/drawing/2014/main" id="{9AA5BCEB-72A9-7AD4-F171-1DE85D3DD5AA}"/>
+              </a:ext>
+            </a:extLst>
+          </p:cNvPr>
           <p:cNvSpPr>
             <a:spLocks noGrp="1"/>
           </p:cNvSpPr>
@@ -3869,7 +1793,7 @@
           <a:p>
             <a:fld id="{0F3EF48A-07EF-4B56-98CC-C04B85084176}" type="datetimeFigureOut">
               <a:rPr lang="ru-RU" smtClean="0"/>
-              <a:t>17.11.2025</a:t>
+              <a:t>02.03.2026</a:t>
             </a:fld>
             <a:endParaRPr lang="ru-RU"/>
           </a:p>
@@ -3877,7 +1801,13 @@
       </p:sp>
       <p:sp>
         <p:nvSpPr>
-          <p:cNvPr id="5" name="Footer Placeholder 4"/>
+          <p:cNvPr id="5" name="Нижний колонтитул 4">
+            <a:extLst>
+              <a:ext uri="{FF2B5EF4-FFF2-40B4-BE49-F238E27FC236}">
+                <a16:creationId xmlns:a16="http://schemas.microsoft.com/office/drawing/2014/main" id="{268D1FAA-2EBE-DC8E-0754-A50655A717A4}"/>
+              </a:ext>
+            </a:extLst>
+          </p:cNvPr>
           <p:cNvSpPr>
             <a:spLocks noGrp="1"/>
           </p:cNvSpPr>
@@ -3896,7 +1826,13 @@
       </p:sp>
       <p:sp>
         <p:nvSpPr>
-          <p:cNvPr id="6" name="Slide Number Placeholder 5"/>
+          <p:cNvPr id="6" name="Номер слайда 5">
+            <a:extLst>
+              <a:ext uri="{FF2B5EF4-FFF2-40B4-BE49-F238E27FC236}">
+                <a16:creationId xmlns:a16="http://schemas.microsoft.com/office/drawing/2014/main" id="{F1EB79BE-8953-F7BC-E106-B678416A4A68}"/>
+              </a:ext>
+            </a:extLst>
+          </p:cNvPr>
           <p:cNvSpPr>
             <a:spLocks noGrp="1"/>
           </p:cNvSpPr>
@@ -3920,7 +1856,7 @@
     </p:spTree>
     <p:extLst>
       <p:ext uri="{BB962C8B-B14F-4D97-AF65-F5344CB8AC3E}">
-        <p14:creationId xmlns:p14="http://schemas.microsoft.com/office/powerpoint/2010/main" val="400798403"/>
+        <p14:creationId xmlns:p14="http://schemas.microsoft.com/office/powerpoint/2010/main" val="454133109"/>
       </p:ext>
     </p:extLst>
   </p:cSld>
@@ -3949,7 +1885,13 @@
       </p:grpSpPr>
       <p:sp>
         <p:nvSpPr>
-          <p:cNvPr id="2" name="Title 1"/>
+          <p:cNvPr id="2" name="Заголовок 1">
+            <a:extLst>
+              <a:ext uri="{FF2B5EF4-FFF2-40B4-BE49-F238E27FC236}">
+                <a16:creationId xmlns:a16="http://schemas.microsoft.com/office/drawing/2014/main" id="{3B1B9621-848F-30B3-B837-6EE0CCB36B2D}"/>
+              </a:ext>
+            </a:extLst>
+          </p:cNvPr>
           <p:cNvSpPr>
             <a:spLocks noGrp="1"/>
           </p:cNvSpPr>
@@ -3966,13 +1908,18 @@
               <a:rPr lang="ru-RU"/>
               <a:t>Образец заголовка</a:t>
             </a:r>
-            <a:endParaRPr lang="en-US" dirty="0"/>
-          </a:p>
-        </p:txBody>
-      </p:sp>
-      <p:sp>
-        <p:nvSpPr>
-          <p:cNvPr id="3" name="Content Placeholder 2"/>
+          </a:p>
+        </p:txBody>
+      </p:sp>
+      <p:sp>
+        <p:nvSpPr>
+          <p:cNvPr id="3" name="Объект 2">
+            <a:extLst>
+              <a:ext uri="{FF2B5EF4-FFF2-40B4-BE49-F238E27FC236}">
+                <a16:creationId xmlns:a16="http://schemas.microsoft.com/office/drawing/2014/main" id="{8FD47198-F64F-8CC9-4572-7F44BBF243B0}"/>
+              </a:ext>
+            </a:extLst>
+          </p:cNvPr>
           <p:cNvSpPr>
             <a:spLocks noGrp="1"/>
           </p:cNvSpPr>
@@ -3982,43 +1929,13 @@
         </p:nvSpPr>
         <p:spPr>
           <a:xfrm>
-            <a:off x="1141412" y="2666999"/>
-            <a:ext cx="4876800" cy="3124201"/>
+            <a:off x="838200" y="1825625"/>
+            <a:ext cx="5181600" cy="4351338"/>
           </a:xfrm>
         </p:spPr>
         <p:txBody>
-          <a:bodyPr>
-            <a:normAutofit/>
-          </a:bodyPr>
-          <a:lstStyle>
-            <a:lvl1pPr>
-              <a:defRPr sz="1800"/>
-            </a:lvl1pPr>
-            <a:lvl2pPr>
-              <a:defRPr sz="1600"/>
-            </a:lvl2pPr>
-            <a:lvl3pPr>
-              <a:defRPr sz="1400"/>
-            </a:lvl3pPr>
-            <a:lvl4pPr>
-              <a:defRPr sz="1200"/>
-            </a:lvl4pPr>
-            <a:lvl5pPr>
-              <a:defRPr sz="1200"/>
-            </a:lvl5pPr>
-            <a:lvl6pPr>
-              <a:defRPr sz="1200"/>
-            </a:lvl6pPr>
-            <a:lvl7pPr>
-              <a:defRPr sz="1200"/>
-            </a:lvl7pPr>
-            <a:lvl8pPr>
-              <a:defRPr sz="1200"/>
-            </a:lvl8pPr>
-            <a:lvl9pPr>
-              <a:defRPr sz="1200"/>
-            </a:lvl9pPr>
-          </a:lstStyle>
+          <a:bodyPr/>
+          <a:lstStyle/>
           <a:p>
             <a:pPr lvl="0"/>
             <a:r>
@@ -4053,13 +1970,18 @@
               <a:rPr lang="ru-RU"/>
               <a:t>Пятый уровень</a:t>
             </a:r>
-            <a:endParaRPr lang="en-US" dirty="0"/>
-          </a:p>
-        </p:txBody>
-      </p:sp>
-      <p:sp>
-        <p:nvSpPr>
-          <p:cNvPr id="4" name="Content Placeholder 3"/>
+          </a:p>
+        </p:txBody>
+      </p:sp>
+      <p:sp>
+        <p:nvSpPr>
+          <p:cNvPr id="4" name="Объект 3">
+            <a:extLst>
+              <a:ext uri="{FF2B5EF4-FFF2-40B4-BE49-F238E27FC236}">
+                <a16:creationId xmlns:a16="http://schemas.microsoft.com/office/drawing/2014/main" id="{675C5E54-D601-0110-AA96-B7A10574979D}"/>
+              </a:ext>
+            </a:extLst>
+          </p:cNvPr>
           <p:cNvSpPr>
             <a:spLocks noGrp="1"/>
           </p:cNvSpPr>
@@ -4069,43 +1991,13 @@
         </p:nvSpPr>
         <p:spPr>
           <a:xfrm>
-            <a:off x="6170612" y="2667000"/>
-            <a:ext cx="4876800" cy="3124200"/>
+            <a:off x="6172200" y="1825625"/>
+            <a:ext cx="5181600" cy="4351338"/>
           </a:xfrm>
         </p:spPr>
         <p:txBody>
-          <a:bodyPr>
-            <a:normAutofit/>
-          </a:bodyPr>
-          <a:lstStyle>
-            <a:lvl1pPr>
-              <a:defRPr sz="1800"/>
-            </a:lvl1pPr>
-            <a:lvl2pPr>
-              <a:defRPr sz="1600"/>
-            </a:lvl2pPr>
-            <a:lvl3pPr>
-              <a:defRPr sz="1400"/>
-            </a:lvl3pPr>
-            <a:lvl4pPr>
-              <a:defRPr sz="1200"/>
-            </a:lvl4pPr>
-            <a:lvl5pPr>
-              <a:defRPr sz="1200"/>
-            </a:lvl5pPr>
-            <a:lvl6pPr>
-              <a:defRPr sz="1200"/>
-            </a:lvl6pPr>
-            <a:lvl7pPr>
-              <a:defRPr sz="1200"/>
-            </a:lvl7pPr>
-            <a:lvl8pPr>
-              <a:defRPr sz="1200"/>
-            </a:lvl8pPr>
-            <a:lvl9pPr>
-              <a:defRPr sz="1200"/>
-            </a:lvl9pPr>
-          </a:lstStyle>
+          <a:bodyPr/>
+          <a:lstStyle/>
           <a:p>
             <a:pPr lvl="0"/>
             <a:r>
@@ -4140,13 +2032,18 @@
               <a:rPr lang="ru-RU"/>
               <a:t>Пятый уровень</a:t>
             </a:r>
-            <a:endParaRPr lang="en-US" dirty="0"/>
-          </a:p>
-        </p:txBody>
-      </p:sp>
-      <p:sp>
-        <p:nvSpPr>
-          <p:cNvPr id="5" name="Date Placeholder 4"/>
+          </a:p>
+        </p:txBody>
+      </p:sp>
+      <p:sp>
+        <p:nvSpPr>
+          <p:cNvPr id="5" name="Дата 4">
+            <a:extLst>
+              <a:ext uri="{FF2B5EF4-FFF2-40B4-BE49-F238E27FC236}">
+                <a16:creationId xmlns:a16="http://schemas.microsoft.com/office/drawing/2014/main" id="{2A35280C-542F-B879-169F-265AA9385978}"/>
+              </a:ext>
+            </a:extLst>
+          </p:cNvPr>
           <p:cNvSpPr>
             <a:spLocks noGrp="1"/>
           </p:cNvSpPr>
@@ -4161,7 +2058,7 @@
           <a:p>
             <a:fld id="{0F3EF48A-07EF-4B56-98CC-C04B85084176}" type="datetimeFigureOut">
               <a:rPr lang="ru-RU" smtClean="0"/>
-              <a:t>17.11.2025</a:t>
+              <a:t>02.03.2026</a:t>
             </a:fld>
             <a:endParaRPr lang="ru-RU"/>
           </a:p>
@@ -4169,7 +2066,13 @@
       </p:sp>
       <p:sp>
         <p:nvSpPr>
-          <p:cNvPr id="6" name="Footer Placeholder 5"/>
+          <p:cNvPr id="6" name="Нижний колонтитул 5">
+            <a:extLst>
+              <a:ext uri="{FF2B5EF4-FFF2-40B4-BE49-F238E27FC236}">
+                <a16:creationId xmlns:a16="http://schemas.microsoft.com/office/drawing/2014/main" id="{F216669B-DEEE-8532-AB5C-B4031DEA3439}"/>
+              </a:ext>
+            </a:extLst>
+          </p:cNvPr>
           <p:cNvSpPr>
             <a:spLocks noGrp="1"/>
           </p:cNvSpPr>
@@ -4188,7 +2091,13 @@
       </p:sp>
       <p:sp>
         <p:nvSpPr>
-          <p:cNvPr id="7" name="Slide Number Placeholder 6"/>
+          <p:cNvPr id="7" name="Номер слайда 6">
+            <a:extLst>
+              <a:ext uri="{FF2B5EF4-FFF2-40B4-BE49-F238E27FC236}">
+                <a16:creationId xmlns:a16="http://schemas.microsoft.com/office/drawing/2014/main" id="{7D3EDE64-E7AF-F5BD-3327-3AC17A6A3F29}"/>
+              </a:ext>
+            </a:extLst>
+          </p:cNvPr>
           <p:cNvSpPr>
             <a:spLocks noGrp="1"/>
           </p:cNvSpPr>
@@ -4212,7 +2121,7 @@
     </p:spTree>
     <p:extLst>
       <p:ext uri="{BB962C8B-B14F-4D97-AF65-F5344CB8AC3E}">
-        <p14:creationId xmlns:p14="http://schemas.microsoft.com/office/powerpoint/2010/main" val="2869692834"/>
+        <p14:creationId xmlns:p14="http://schemas.microsoft.com/office/powerpoint/2010/main" val="907190478"/>
       </p:ext>
     </p:extLst>
   </p:cSld>
@@ -4241,7 +2150,13 @@
       </p:grpSpPr>
       <p:sp>
         <p:nvSpPr>
-          <p:cNvPr id="2" name="Title 1"/>
+          <p:cNvPr id="2" name="Заголовок 1">
+            <a:extLst>
+              <a:ext uri="{FF2B5EF4-FFF2-40B4-BE49-F238E27FC236}">
+                <a16:creationId xmlns:a16="http://schemas.microsoft.com/office/drawing/2014/main" id="{95607362-6CF7-CD78-7965-A171A254E11B}"/>
+              </a:ext>
+            </a:extLst>
+          </p:cNvPr>
           <p:cNvSpPr>
             <a:spLocks noGrp="1"/>
           </p:cNvSpPr>
@@ -4249,26 +2164,32 @@
             <p:ph type="title"/>
           </p:nvPr>
         </p:nvSpPr>
-        <p:spPr/>
+        <p:spPr>
+          <a:xfrm>
+            <a:off x="839788" y="365125"/>
+            <a:ext cx="10515600" cy="1325563"/>
+          </a:xfrm>
+        </p:spPr>
         <p:txBody>
           <a:bodyPr/>
-          <a:lstStyle>
-            <a:lvl1pPr>
-              <a:defRPr/>
-            </a:lvl1pPr>
-          </a:lstStyle>
+          <a:lstStyle/>
           <a:p>
             <a:r>
               <a:rPr lang="ru-RU"/>
               <a:t>Образец заголовка</a:t>
             </a:r>
-            <a:endParaRPr lang="en-US" dirty="0"/>
-          </a:p>
-        </p:txBody>
-      </p:sp>
-      <p:sp>
-        <p:nvSpPr>
-          <p:cNvPr id="3" name="Text Placeholder 2"/>
+          </a:p>
+        </p:txBody>
+      </p:sp>
+      <p:sp>
+        <p:nvSpPr>
+          <p:cNvPr id="3" name="Текст 2">
+            <a:extLst>
+              <a:ext uri="{FF2B5EF4-FFF2-40B4-BE49-F238E27FC236}">
+                <a16:creationId xmlns:a16="http://schemas.microsoft.com/office/drawing/2014/main" id="{CF121DC6-76F5-769A-12B9-00984DA2432E}"/>
+              </a:ext>
+            </a:extLst>
+          </p:cNvPr>
           <p:cNvSpPr>
             <a:spLocks noGrp="1"/>
           </p:cNvSpPr>
@@ -4278,18 +2199,16 @@
         </p:nvSpPr>
         <p:spPr>
           <a:xfrm>
-            <a:off x="1429280" y="2658533"/>
-            <a:ext cx="4588931" cy="576262"/>
+            <a:off x="839788" y="1681163"/>
+            <a:ext cx="5157787" cy="823912"/>
           </a:xfrm>
         </p:spPr>
         <p:txBody>
-          <a:bodyPr anchor="b">
-            <a:noAutofit/>
-          </a:bodyPr>
+          <a:bodyPr anchor="b"/>
           <a:lstStyle>
             <a:lvl1pPr marL="0" indent="0">
               <a:buNone/>
-              <a:defRPr sz="2800" b="0"/>
+              <a:defRPr sz="2400" b="1"/>
             </a:lvl1pPr>
             <a:lvl2pPr marL="457200" indent="0">
               <a:buNone/>
@@ -4335,7 +2254,13 @@
       </p:sp>
       <p:sp>
         <p:nvSpPr>
-          <p:cNvPr id="4" name="Content Placeholder 3"/>
+          <p:cNvPr id="4" name="Объект 3">
+            <a:extLst>
+              <a:ext uri="{FF2B5EF4-FFF2-40B4-BE49-F238E27FC236}">
+                <a16:creationId xmlns:a16="http://schemas.microsoft.com/office/drawing/2014/main" id="{42FFB19C-B0D2-A86A-D6ED-52FFB51D9DD8}"/>
+              </a:ext>
+            </a:extLst>
+          </p:cNvPr>
           <p:cNvSpPr>
             <a:spLocks noGrp="1"/>
           </p:cNvSpPr>
@@ -4345,43 +2270,13 @@
         </p:nvSpPr>
         <p:spPr>
           <a:xfrm>
-            <a:off x="1141412" y="3243262"/>
-            <a:ext cx="4876800" cy="2547937"/>
+            <a:off x="839788" y="2505075"/>
+            <a:ext cx="5157787" cy="3684588"/>
           </a:xfrm>
         </p:spPr>
         <p:txBody>
-          <a:bodyPr anchor="t">
-            <a:normAutofit/>
-          </a:bodyPr>
-          <a:lstStyle>
-            <a:lvl1pPr>
-              <a:defRPr sz="1800"/>
-            </a:lvl1pPr>
-            <a:lvl2pPr>
-              <a:defRPr sz="1600"/>
-            </a:lvl2pPr>
-            <a:lvl3pPr>
-              <a:defRPr sz="1400"/>
-            </a:lvl3pPr>
-            <a:lvl4pPr>
-              <a:defRPr sz="1200"/>
-            </a:lvl4pPr>
-            <a:lvl5pPr>
-              <a:defRPr sz="1200"/>
-            </a:lvl5pPr>
-            <a:lvl6pPr>
-              <a:defRPr sz="1200"/>
-            </a:lvl6pPr>
-            <a:lvl7pPr>
-              <a:defRPr sz="1200"/>
-            </a:lvl7pPr>
-            <a:lvl8pPr>
-              <a:defRPr sz="1200"/>
-            </a:lvl8pPr>
-            <a:lvl9pPr>
-              <a:defRPr sz="1200"/>
-            </a:lvl9pPr>
-          </a:lstStyle>
+          <a:bodyPr/>
+          <a:lstStyle/>
           <a:p>
             <a:pPr lvl="0"/>
             <a:r>
@@ -4416,13 +2311,18 @@
               <a:rPr lang="ru-RU"/>
               <a:t>Пятый уровень</a:t>
             </a:r>
-            <a:endParaRPr lang="en-US" dirty="0"/>
-          </a:p>
-        </p:txBody>
-      </p:sp>
-      <p:sp>
-        <p:nvSpPr>
-          <p:cNvPr id="5" name="Text Placeholder 4"/>
+          </a:p>
+        </p:txBody>
+      </p:sp>
+      <p:sp>
+        <p:nvSpPr>
+          <p:cNvPr id="5" name="Текст 4">
+            <a:extLst>
+              <a:ext uri="{FF2B5EF4-FFF2-40B4-BE49-F238E27FC236}">
+                <a16:creationId xmlns:a16="http://schemas.microsoft.com/office/drawing/2014/main" id="{79B524B2-2205-98D1-F834-BE1DE8CCDCFB}"/>
+              </a:ext>
+            </a:extLst>
+          </p:cNvPr>
           <p:cNvSpPr>
             <a:spLocks noGrp="1"/>
           </p:cNvSpPr>
@@ -4432,18 +2332,16 @@
         </p:nvSpPr>
         <p:spPr>
           <a:xfrm>
-            <a:off x="6443133" y="2667000"/>
-            <a:ext cx="4604280" cy="576262"/>
+            <a:off x="6172200" y="1681163"/>
+            <a:ext cx="5183188" cy="823912"/>
           </a:xfrm>
         </p:spPr>
         <p:txBody>
-          <a:bodyPr anchor="b">
-            <a:noAutofit/>
-          </a:bodyPr>
+          <a:bodyPr anchor="b"/>
           <a:lstStyle>
             <a:lvl1pPr marL="0" indent="0">
               <a:buNone/>
-              <a:defRPr sz="2800" b="0"/>
+              <a:defRPr sz="2400" b="1"/>
             </a:lvl1pPr>
             <a:lvl2pPr marL="457200" indent="0">
               <a:buNone/>
@@ -4489,7 +2387,13 @@
       </p:sp>
       <p:sp>
         <p:nvSpPr>
-          <p:cNvPr id="6" name="Content Placeholder 5"/>
+          <p:cNvPr id="6" name="Объект 5">
+            <a:extLst>
+              <a:ext uri="{FF2B5EF4-FFF2-40B4-BE49-F238E27FC236}">
+                <a16:creationId xmlns:a16="http://schemas.microsoft.com/office/drawing/2014/main" id="{88519CD3-8E0A-ADE7-73F6-27053BDC0557}"/>
+              </a:ext>
+            </a:extLst>
+          </p:cNvPr>
           <p:cNvSpPr>
             <a:spLocks noGrp="1"/>
           </p:cNvSpPr>
@@ -4499,43 +2403,13 @@
         </p:nvSpPr>
         <p:spPr>
           <a:xfrm>
-            <a:off x="6170612" y="3243262"/>
-            <a:ext cx="4876801" cy="2547937"/>
+            <a:off x="6172200" y="2505075"/>
+            <a:ext cx="5183188" cy="3684588"/>
           </a:xfrm>
         </p:spPr>
         <p:txBody>
-          <a:bodyPr anchor="t">
-            <a:normAutofit/>
-          </a:bodyPr>
-          <a:lstStyle>
-            <a:lvl1pPr>
-              <a:defRPr sz="1800"/>
-            </a:lvl1pPr>
-            <a:lvl2pPr>
-              <a:defRPr sz="1600"/>
-            </a:lvl2pPr>
-            <a:lvl3pPr>
-              <a:defRPr sz="1400"/>
-            </a:lvl3pPr>
-            <a:lvl4pPr>
-              <a:defRPr sz="1200"/>
-            </a:lvl4pPr>
-            <a:lvl5pPr>
-              <a:defRPr sz="1200"/>
-            </a:lvl5pPr>
-            <a:lvl6pPr>
-              <a:defRPr sz="1200"/>
-            </a:lvl6pPr>
-            <a:lvl7pPr>
-              <a:defRPr sz="1200"/>
-            </a:lvl7pPr>
-            <a:lvl8pPr>
-              <a:defRPr sz="1200"/>
-            </a:lvl8pPr>
-            <a:lvl9pPr>
-              <a:defRPr sz="1200"/>
-            </a:lvl9pPr>
-          </a:lstStyle>
+          <a:bodyPr/>
+          <a:lstStyle/>
           <a:p>
             <a:pPr lvl="0"/>
             <a:r>
@@ -4570,13 +2444,18 @@
               <a:rPr lang="ru-RU"/>
               <a:t>Пятый уровень</a:t>
             </a:r>
-            <a:endParaRPr lang="en-US" dirty="0"/>
-          </a:p>
-        </p:txBody>
-      </p:sp>
-      <p:sp>
-        <p:nvSpPr>
-          <p:cNvPr id="7" name="Date Placeholder 6"/>
+          </a:p>
+        </p:txBody>
+      </p:sp>
+      <p:sp>
+        <p:nvSpPr>
+          <p:cNvPr id="7" name="Дата 6">
+            <a:extLst>
+              <a:ext uri="{FF2B5EF4-FFF2-40B4-BE49-F238E27FC236}">
+                <a16:creationId xmlns:a16="http://schemas.microsoft.com/office/drawing/2014/main" id="{719BF9D8-319E-51AF-5F3F-4FCCBBC76122}"/>
+              </a:ext>
+            </a:extLst>
+          </p:cNvPr>
           <p:cNvSpPr>
             <a:spLocks noGrp="1"/>
           </p:cNvSpPr>
@@ -4591,7 +2470,7 @@
           <a:p>
             <a:fld id="{0F3EF48A-07EF-4B56-98CC-C04B85084176}" type="datetimeFigureOut">
               <a:rPr lang="ru-RU" smtClean="0"/>
-              <a:t>17.11.2025</a:t>
+              <a:t>02.03.2026</a:t>
             </a:fld>
             <a:endParaRPr lang="ru-RU"/>
           </a:p>
@@ -4599,7 +2478,13 @@
       </p:sp>
       <p:sp>
         <p:nvSpPr>
-          <p:cNvPr id="8" name="Footer Placeholder 7"/>
+          <p:cNvPr id="8" name="Нижний колонтитул 7">
+            <a:extLst>
+              <a:ext uri="{FF2B5EF4-FFF2-40B4-BE49-F238E27FC236}">
+                <a16:creationId xmlns:a16="http://schemas.microsoft.com/office/drawing/2014/main" id="{C460D1B3-3158-8402-45A7-1C8550540E29}"/>
+              </a:ext>
+            </a:extLst>
+          </p:cNvPr>
           <p:cNvSpPr>
             <a:spLocks noGrp="1"/>
           </p:cNvSpPr>
@@ -4618,7 +2503,13 @@
       </p:sp>
       <p:sp>
         <p:nvSpPr>
-          <p:cNvPr id="9" name="Slide Number Placeholder 8"/>
+          <p:cNvPr id="9" name="Номер слайда 8">
+            <a:extLst>
+              <a:ext uri="{FF2B5EF4-FFF2-40B4-BE49-F238E27FC236}">
+                <a16:creationId xmlns:a16="http://schemas.microsoft.com/office/drawing/2014/main" id="{97854780-4464-7741-9214-648C7368661C}"/>
+              </a:ext>
+            </a:extLst>
+          </p:cNvPr>
           <p:cNvSpPr>
             <a:spLocks noGrp="1"/>
           </p:cNvSpPr>
@@ -4642,7 +2533,7 @@
     </p:spTree>
     <p:extLst>
       <p:ext uri="{BB962C8B-B14F-4D97-AF65-F5344CB8AC3E}">
-        <p14:creationId xmlns:p14="http://schemas.microsoft.com/office/powerpoint/2010/main" val="2775576139"/>
+        <p14:creationId xmlns:p14="http://schemas.microsoft.com/office/powerpoint/2010/main" val="553321653"/>
       </p:ext>
     </p:extLst>
   </p:cSld>
@@ -4671,7 +2562,13 @@
       </p:grpSpPr>
       <p:sp>
         <p:nvSpPr>
-          <p:cNvPr id="2" name="Title 1"/>
+          <p:cNvPr id="2" name="Заголовок 1">
+            <a:extLst>
+              <a:ext uri="{FF2B5EF4-FFF2-40B4-BE49-F238E27FC236}">
+                <a16:creationId xmlns:a16="http://schemas.microsoft.com/office/drawing/2014/main" id="{6D2982CC-7ACE-5D85-DDE9-716D72E2BE0A}"/>
+              </a:ext>
+            </a:extLst>
+          </p:cNvPr>
           <p:cNvSpPr>
             <a:spLocks noGrp="1"/>
           </p:cNvSpPr>
@@ -4688,13 +2585,18 @@
               <a:rPr lang="ru-RU"/>
               <a:t>Образец заголовка</a:t>
             </a:r>
-            <a:endParaRPr lang="en-US" dirty="0"/>
-          </a:p>
-        </p:txBody>
-      </p:sp>
-      <p:sp>
-        <p:nvSpPr>
-          <p:cNvPr id="3" name="Date Placeholder 2"/>
+          </a:p>
+        </p:txBody>
+      </p:sp>
+      <p:sp>
+        <p:nvSpPr>
+          <p:cNvPr id="3" name="Дата 2">
+            <a:extLst>
+              <a:ext uri="{FF2B5EF4-FFF2-40B4-BE49-F238E27FC236}">
+                <a16:creationId xmlns:a16="http://schemas.microsoft.com/office/drawing/2014/main" id="{BE6ECB11-C88A-2C83-AC8E-7544E6EE1217}"/>
+              </a:ext>
+            </a:extLst>
+          </p:cNvPr>
           <p:cNvSpPr>
             <a:spLocks noGrp="1"/>
           </p:cNvSpPr>
@@ -4709,7 +2611,7 @@
           <a:p>
             <a:fld id="{0F3EF48A-07EF-4B56-98CC-C04B85084176}" type="datetimeFigureOut">
               <a:rPr lang="ru-RU" smtClean="0"/>
-              <a:t>17.11.2025</a:t>
+              <a:t>02.03.2026</a:t>
             </a:fld>
             <a:endParaRPr lang="ru-RU"/>
           </a:p>
@@ -4717,7 +2619,13 @@
       </p:sp>
       <p:sp>
         <p:nvSpPr>
-          <p:cNvPr id="4" name="Footer Placeholder 3"/>
+          <p:cNvPr id="4" name="Нижний колонтитул 3">
+            <a:extLst>
+              <a:ext uri="{FF2B5EF4-FFF2-40B4-BE49-F238E27FC236}">
+                <a16:creationId xmlns:a16="http://schemas.microsoft.com/office/drawing/2014/main" id="{8F8C025F-0059-DA52-EEFD-0330EFCC0ADC}"/>
+              </a:ext>
+            </a:extLst>
+          </p:cNvPr>
           <p:cNvSpPr>
             <a:spLocks noGrp="1"/>
           </p:cNvSpPr>
@@ -4736,7 +2644,13 @@
       </p:sp>
       <p:sp>
         <p:nvSpPr>
-          <p:cNvPr id="5" name="Slide Number Placeholder 4"/>
+          <p:cNvPr id="5" name="Номер слайда 4">
+            <a:extLst>
+              <a:ext uri="{FF2B5EF4-FFF2-40B4-BE49-F238E27FC236}">
+                <a16:creationId xmlns:a16="http://schemas.microsoft.com/office/drawing/2014/main" id="{E4329E1B-1437-2039-FE8D-BD33EF63ACAF}"/>
+              </a:ext>
+            </a:extLst>
+          </p:cNvPr>
           <p:cNvSpPr>
             <a:spLocks noGrp="1"/>
           </p:cNvSpPr>
@@ -4760,7 +2674,7 @@
     </p:spTree>
     <p:extLst>
       <p:ext uri="{BB962C8B-B14F-4D97-AF65-F5344CB8AC3E}">
-        <p14:creationId xmlns:p14="http://schemas.microsoft.com/office/powerpoint/2010/main" val="70184198"/>
+        <p14:creationId xmlns:p14="http://schemas.microsoft.com/office/powerpoint/2010/main" val="3319385184"/>
       </p:ext>
     </p:extLst>
   </p:cSld>
@@ -4789,7 +2703,13 @@
       </p:grpSpPr>
       <p:sp>
         <p:nvSpPr>
-          <p:cNvPr id="2" name="Date Placeholder 1"/>
+          <p:cNvPr id="2" name="Дата 1">
+            <a:extLst>
+              <a:ext uri="{FF2B5EF4-FFF2-40B4-BE49-F238E27FC236}">
+                <a16:creationId xmlns:a16="http://schemas.microsoft.com/office/drawing/2014/main" id="{867939E6-3468-1479-F2B4-0235769A08D9}"/>
+              </a:ext>
+            </a:extLst>
+          </p:cNvPr>
           <p:cNvSpPr>
             <a:spLocks noGrp="1"/>
           </p:cNvSpPr>
@@ -4804,7 +2724,7 @@
           <a:p>
             <a:fld id="{0F3EF48A-07EF-4B56-98CC-C04B85084176}" type="datetimeFigureOut">
               <a:rPr lang="ru-RU" smtClean="0"/>
-              <a:t>17.11.2025</a:t>
+              <a:t>02.03.2026</a:t>
             </a:fld>
             <a:endParaRPr lang="ru-RU"/>
           </a:p>
@@ -4812,7 +2732,13 @@
       </p:sp>
       <p:sp>
         <p:nvSpPr>
-          <p:cNvPr id="3" name="Footer Placeholder 2"/>
+          <p:cNvPr id="3" name="Нижний колонтитул 2">
+            <a:extLst>
+              <a:ext uri="{FF2B5EF4-FFF2-40B4-BE49-F238E27FC236}">
+                <a16:creationId xmlns:a16="http://schemas.microsoft.com/office/drawing/2014/main" id="{BDDB7269-F23B-7027-CC49-5212C6D8C757}"/>
+              </a:ext>
+            </a:extLst>
+          </p:cNvPr>
           <p:cNvSpPr>
             <a:spLocks noGrp="1"/>
           </p:cNvSpPr>
@@ -4831,7 +2757,13 @@
       </p:sp>
       <p:sp>
         <p:nvSpPr>
-          <p:cNvPr id="4" name="Slide Number Placeholder 3"/>
+          <p:cNvPr id="4" name="Номер слайда 3">
+            <a:extLst>
+              <a:ext uri="{FF2B5EF4-FFF2-40B4-BE49-F238E27FC236}">
+                <a16:creationId xmlns:a16="http://schemas.microsoft.com/office/drawing/2014/main" id="{2B0AF0BC-906D-68A4-1704-E0B2D2531019}"/>
+              </a:ext>
+            </a:extLst>
+          </p:cNvPr>
           <p:cNvSpPr>
             <a:spLocks noGrp="1"/>
           </p:cNvSpPr>
@@ -4855,7 +2787,7 @@
     </p:spTree>
     <p:extLst>
       <p:ext uri="{BB962C8B-B14F-4D97-AF65-F5344CB8AC3E}">
-        <p14:creationId xmlns:p14="http://schemas.microsoft.com/office/powerpoint/2010/main" val="3839994314"/>
+        <p14:creationId xmlns:p14="http://schemas.microsoft.com/office/powerpoint/2010/main" val="1873883359"/>
       </p:ext>
     </p:extLst>
   </p:cSld>
@@ -4884,7 +2816,13 @@
       </p:grpSpPr>
       <p:sp>
         <p:nvSpPr>
-          <p:cNvPr id="2" name="Title 1"/>
+          <p:cNvPr id="2" name="Заголовок 1">
+            <a:extLst>
+              <a:ext uri="{FF2B5EF4-FFF2-40B4-BE49-F238E27FC236}">
+                <a16:creationId xmlns:a16="http://schemas.microsoft.com/office/drawing/2014/main" id="{71C347AF-518E-28D2-9C23-206008DA4362}"/>
+              </a:ext>
+            </a:extLst>
+          </p:cNvPr>
           <p:cNvSpPr>
             <a:spLocks noGrp="1"/>
           </p:cNvSpPr>
@@ -4894,17 +2832,15 @@
         </p:nvSpPr>
         <p:spPr>
           <a:xfrm>
-            <a:off x="1141411" y="1600200"/>
-            <a:ext cx="3549121" cy="1371600"/>
+            <a:off x="839788" y="457200"/>
+            <a:ext cx="3932237" cy="1600200"/>
           </a:xfrm>
         </p:spPr>
         <p:txBody>
-          <a:bodyPr anchor="b">
-            <a:normAutofit/>
-          </a:bodyPr>
+          <a:bodyPr anchor="b"/>
           <a:lstStyle>
-            <a:lvl1pPr algn="l">
-              <a:defRPr sz="2400" b="0"/>
+            <a:lvl1pPr>
+              <a:defRPr sz="3200"/>
             </a:lvl1pPr>
           </a:lstStyle>
           <a:p>
@@ -4912,13 +2848,18 @@
               <a:rPr lang="ru-RU"/>
               <a:t>Образец заголовка</a:t>
             </a:r>
-            <a:endParaRPr lang="en-US" dirty="0"/>
-          </a:p>
-        </p:txBody>
-      </p:sp>
-      <p:sp>
-        <p:nvSpPr>
-          <p:cNvPr id="3" name="Content Placeholder 2"/>
+          </a:p>
+        </p:txBody>
+      </p:sp>
+      <p:sp>
+        <p:nvSpPr>
+          <p:cNvPr id="3" name="Объект 2">
+            <a:extLst>
+              <a:ext uri="{FF2B5EF4-FFF2-40B4-BE49-F238E27FC236}">
+                <a16:creationId xmlns:a16="http://schemas.microsoft.com/office/drawing/2014/main" id="{B26486CA-84DC-6B71-276F-DF2A1D592856}"/>
+              </a:ext>
+            </a:extLst>
+          </p:cNvPr>
           <p:cNvSpPr>
             <a:spLocks noGrp="1"/>
           </p:cNvSpPr>
@@ -4928,41 +2869,39 @@
         </p:nvSpPr>
         <p:spPr>
           <a:xfrm>
-            <a:off x="5103812" y="609601"/>
-            <a:ext cx="5943601" cy="5181600"/>
+            <a:off x="5183188" y="987425"/>
+            <a:ext cx="6172200" cy="4873625"/>
           </a:xfrm>
         </p:spPr>
         <p:txBody>
-          <a:bodyPr anchor="ctr">
-            <a:normAutofit/>
-          </a:bodyPr>
+          <a:bodyPr/>
           <a:lstStyle>
             <a:lvl1pPr>
-              <a:defRPr sz="2000"/>
+              <a:defRPr sz="3200"/>
             </a:lvl1pPr>
             <a:lvl2pPr>
-              <a:defRPr sz="1800"/>
+              <a:defRPr sz="2800"/>
             </a:lvl2pPr>
             <a:lvl3pPr>
-              <a:defRPr sz="1600"/>
+              <a:defRPr sz="2400"/>
             </a:lvl3pPr>
             <a:lvl4pPr>
-              <a:defRPr sz="1400"/>
+              <a:defRPr sz="2000"/>
             </a:lvl4pPr>
             <a:lvl5pPr>
-              <a:defRPr sz="1400"/>
+              <a:defRPr sz="2000"/>
             </a:lvl5pPr>
             <a:lvl6pPr>
-              <a:defRPr sz="1400"/>
+              <a:defRPr sz="2000"/>
             </a:lvl6pPr>
             <a:lvl7pPr>
-              <a:defRPr sz="1400"/>
+              <a:defRPr sz="2000"/>
             </a:lvl7pPr>
             <a:lvl8pPr>
-              <a:defRPr sz="1400"/>
+              <a:defRPr sz="2000"/>
             </a:lvl8pPr>
             <a:lvl9pPr>
-              <a:defRPr sz="1400"/>
+              <a:defRPr sz="2000"/>
             </a:lvl9pPr>
           </a:lstStyle>
           <a:p>
@@ -4999,13 +2938,18 @@
               <a:rPr lang="ru-RU"/>
               <a:t>Пятый уровень</a:t>
             </a:r>
-            <a:endParaRPr lang="en-US" dirty="0"/>
-          </a:p>
-        </p:txBody>
-      </p:sp>
-      <p:sp>
-        <p:nvSpPr>
-          <p:cNvPr id="4" name="Text Placeholder 3"/>
+          </a:p>
+        </p:txBody>
+      </p:sp>
+      <p:sp>
+        <p:nvSpPr>
+          <p:cNvPr id="4" name="Текст 3">
+            <a:extLst>
+              <a:ext uri="{FF2B5EF4-FFF2-40B4-BE49-F238E27FC236}">
+                <a16:creationId xmlns:a16="http://schemas.microsoft.com/office/drawing/2014/main" id="{CC87E330-B18C-E4E9-3A64-20D5CFE2F938}"/>
+              </a:ext>
+            </a:extLst>
+          </p:cNvPr>
           <p:cNvSpPr>
             <a:spLocks noGrp="1"/>
           </p:cNvSpPr>
@@ -5015,14 +2959,12 @@
         </p:nvSpPr>
         <p:spPr>
           <a:xfrm>
-            <a:off x="1141411" y="2971800"/>
-            <a:ext cx="3549121" cy="1828800"/>
+            <a:off x="839788" y="2057400"/>
+            <a:ext cx="3932237" cy="3811588"/>
           </a:xfrm>
         </p:spPr>
         <p:txBody>
-          <a:bodyPr>
-            <a:normAutofit/>
-          </a:bodyPr>
+          <a:bodyPr/>
           <a:lstStyle>
             <a:lvl1pPr marL="0" indent="0">
               <a:buNone/>
@@ -5030,35 +2972,35 @@
             </a:lvl1pPr>
             <a:lvl2pPr marL="457200" indent="0">
               <a:buNone/>
-              <a:defRPr sz="1200"/>
+              <a:defRPr sz="1400"/>
             </a:lvl2pPr>
             <a:lvl3pPr marL="914400" indent="0">
               <a:buNone/>
-              <a:defRPr sz="1000"/>
+              <a:defRPr sz="1200"/>
             </a:lvl3pPr>
             <a:lvl4pPr marL="1371600" indent="0">
               <a:buNone/>
-              <a:defRPr sz="900"/>
+              <a:defRPr sz="1000"/>
             </a:lvl4pPr>
             <a:lvl5pPr marL="1828800" indent="0">
               <a:buNone/>
-              <a:defRPr sz="900"/>
+              <a:defRPr sz="1000"/>
             </a:lvl5pPr>
             <a:lvl6pPr marL="2286000" indent="0">
               <a:buNone/>
-              <a:defRPr sz="900"/>
+              <a:defRPr sz="1000"/>
             </a:lvl6pPr>
             <a:lvl7pPr marL="2743200" indent="0">
               <a:buNone/>
-              <a:defRPr sz="900"/>
+              <a:defRPr sz="1000"/>
             </a:lvl7pPr>
             <a:lvl8pPr marL="3200400" indent="0">
               <a:buNone/>
-              <a:defRPr sz="900"/>
+              <a:defRPr sz="1000"/>
             </a:lvl8pPr>
             <a:lvl9pPr marL="3657600" indent="0">
               <a:buNone/>
-              <a:defRPr sz="900"/>
+              <a:defRPr sz="1000"/>
             </a:lvl9pPr>
           </a:lstStyle>
           <a:p>
@@ -5072,7 +3014,13 @@
       </p:sp>
       <p:sp>
         <p:nvSpPr>
-          <p:cNvPr id="5" name="Date Placeholder 4"/>
+          <p:cNvPr id="5" name="Дата 4">
+            <a:extLst>
+              <a:ext uri="{FF2B5EF4-FFF2-40B4-BE49-F238E27FC236}">
+                <a16:creationId xmlns:a16="http://schemas.microsoft.com/office/drawing/2014/main" id="{0430BE9D-7574-5B5B-0B6F-94FA7146647D}"/>
+              </a:ext>
+            </a:extLst>
+          </p:cNvPr>
           <p:cNvSpPr>
             <a:spLocks noGrp="1"/>
           </p:cNvSpPr>
@@ -5087,7 +3035,7 @@
           <a:p>
             <a:fld id="{0F3EF48A-07EF-4B56-98CC-C04B85084176}" type="datetimeFigureOut">
               <a:rPr lang="ru-RU" smtClean="0"/>
-              <a:t>17.11.2025</a:t>
+              <a:t>02.03.2026</a:t>
             </a:fld>
             <a:endParaRPr lang="ru-RU"/>
           </a:p>
@@ -5095,7 +3043,13 @@
       </p:sp>
       <p:sp>
         <p:nvSpPr>
-          <p:cNvPr id="6" name="Footer Placeholder 5"/>
+          <p:cNvPr id="6" name="Нижний колонтитул 5">
+            <a:extLst>
+              <a:ext uri="{FF2B5EF4-FFF2-40B4-BE49-F238E27FC236}">
+                <a16:creationId xmlns:a16="http://schemas.microsoft.com/office/drawing/2014/main" id="{80090C1A-B028-A849-698B-367546829C9F}"/>
+              </a:ext>
+            </a:extLst>
+          </p:cNvPr>
           <p:cNvSpPr>
             <a:spLocks noGrp="1"/>
           </p:cNvSpPr>
@@ -5114,7 +3068,13 @@
       </p:sp>
       <p:sp>
         <p:nvSpPr>
-          <p:cNvPr id="7" name="Slide Number Placeholder 6"/>
+          <p:cNvPr id="7" name="Номер слайда 6">
+            <a:extLst>
+              <a:ext uri="{FF2B5EF4-FFF2-40B4-BE49-F238E27FC236}">
+                <a16:creationId xmlns:a16="http://schemas.microsoft.com/office/drawing/2014/main" id="{35A1038D-A8C2-8EEA-1E47-C40D88537817}"/>
+              </a:ext>
+            </a:extLst>
+          </p:cNvPr>
           <p:cNvSpPr>
             <a:spLocks noGrp="1"/>
           </p:cNvSpPr>
@@ -5138,7 +3098,7 @@
     </p:spTree>
     <p:extLst>
       <p:ext uri="{BB962C8B-B14F-4D97-AF65-F5344CB8AC3E}">
-        <p14:creationId xmlns:p14="http://schemas.microsoft.com/office/powerpoint/2010/main" val="3696903728"/>
+        <p14:creationId xmlns:p14="http://schemas.microsoft.com/office/powerpoint/2010/main" val="2256587702"/>
       </p:ext>
     </p:extLst>
   </p:cSld>
@@ -5167,7 +3127,13 @@
       </p:grpSpPr>
       <p:sp>
         <p:nvSpPr>
-          <p:cNvPr id="2" name="Title 1"/>
+          <p:cNvPr id="2" name="Заголовок 1">
+            <a:extLst>
+              <a:ext uri="{FF2B5EF4-FFF2-40B4-BE49-F238E27FC236}">
+                <a16:creationId xmlns:a16="http://schemas.microsoft.com/office/drawing/2014/main" id="{5F602A0D-D1A5-4D81-8A7A-502C0B249D58}"/>
+              </a:ext>
+            </a:extLst>
+          </p:cNvPr>
           <p:cNvSpPr>
             <a:spLocks noGrp="1"/>
           </p:cNvSpPr>
@@ -5177,17 +3143,15 @@
         </p:nvSpPr>
         <p:spPr>
           <a:xfrm>
-            <a:off x="1141411" y="1600200"/>
-            <a:ext cx="5334001" cy="1371600"/>
+            <a:off x="839788" y="457200"/>
+            <a:ext cx="3932237" cy="1600200"/>
           </a:xfrm>
         </p:spPr>
         <p:txBody>
-          <a:bodyPr anchor="b">
-            <a:normAutofit/>
-          </a:bodyPr>
+          <a:bodyPr anchor="b"/>
           <a:lstStyle>
-            <a:lvl1pPr algn="l">
-              <a:defRPr sz="2800" b="0"/>
+            <a:lvl1pPr>
+              <a:defRPr sz="3200"/>
             </a:lvl1pPr>
           </a:lstStyle>
           <a:p>
@@ -5195,15 +3159,20 @@
               <a:rPr lang="ru-RU"/>
               <a:t>Образец заголовка</a:t>
             </a:r>
-            <a:endParaRPr lang="en-US" dirty="0"/>
-          </a:p>
-        </p:txBody>
-      </p:sp>
-      <p:sp>
-        <p:nvSpPr>
-          <p:cNvPr id="14" name="Picture Placeholder 2"/>
+          </a:p>
+        </p:txBody>
+      </p:sp>
+      <p:sp>
+        <p:nvSpPr>
+          <p:cNvPr id="3" name="Рисунок 2">
+            <a:extLst>
+              <a:ext uri="{FF2B5EF4-FFF2-40B4-BE49-F238E27FC236}">
+                <a16:creationId xmlns:a16="http://schemas.microsoft.com/office/drawing/2014/main" id="{88BCC6AF-4EDB-73C0-8A66-48A6038EC74A}"/>
+              </a:ext>
+            </a:extLst>
+          </p:cNvPr>
           <p:cNvSpPr>
-            <a:spLocks noGrp="1" noChangeAspect="1"/>
+            <a:spLocks noGrp="1"/>
           </p:cNvSpPr>
           <p:nvPr>
             <p:ph type="pic" idx="1"/>
@@ -5211,87 +3180,64 @@
         </p:nvSpPr>
         <p:spPr>
           <a:xfrm>
-            <a:off x="7433733" y="-18288"/>
-            <a:ext cx="3276599" cy="6903720"/>
+            <a:off x="5183188" y="987425"/>
+            <a:ext cx="6172200" cy="4873625"/>
           </a:xfrm>
-          <a:ln w="38100">
-            <a:gradFill flip="none" rotWithShape="1">
-              <a:gsLst>
-                <a:gs pos="0">
-                  <a:schemeClr val="bg2"/>
-                </a:gs>
-                <a:gs pos="100000">
-                  <a:schemeClr val="bg2">
-                    <a:lumMod val="75000"/>
-                  </a:schemeClr>
-                </a:gs>
-              </a:gsLst>
-              <a:lin ang="5400000" scaled="0"/>
-              <a:tileRect/>
-            </a:gradFill>
-          </a:ln>
-          <a:effectLst>
-            <a:innerShdw blurRad="57150" dist="38100" dir="10800000">
-              <a:srgbClr val="000000">
-                <a:alpha val="70000"/>
-              </a:srgbClr>
-            </a:innerShdw>
-          </a:effectLst>
         </p:spPr>
         <p:txBody>
-          <a:bodyPr anchor="t">
-            <a:normAutofit/>
-          </a:bodyPr>
+          <a:bodyPr/>
           <a:lstStyle>
-            <a:lvl1pPr marL="0" indent="0" algn="ctr">
+            <a:lvl1pPr marL="0" indent="0">
               <a:buNone/>
-              <a:defRPr sz="1600"/>
+              <a:defRPr sz="3200"/>
             </a:lvl1pPr>
             <a:lvl2pPr marL="457200" indent="0">
               <a:buNone/>
-              <a:defRPr sz="1600"/>
+              <a:defRPr sz="2800"/>
             </a:lvl2pPr>
             <a:lvl3pPr marL="914400" indent="0">
               <a:buNone/>
-              <a:defRPr sz="1600"/>
+              <a:defRPr sz="2400"/>
             </a:lvl3pPr>
             <a:lvl4pPr marL="1371600" indent="0">
               <a:buNone/>
-              <a:defRPr sz="1600"/>
+              <a:defRPr sz="2000"/>
             </a:lvl4pPr>
             <a:lvl5pPr marL="1828800" indent="0">
               <a:buNone/>
-              <a:defRPr sz="1600"/>
+              <a:defRPr sz="2000"/>
             </a:lvl5pPr>
             <a:lvl6pPr marL="2286000" indent="0">
               <a:buNone/>
-              <a:defRPr sz="1600"/>
+              <a:defRPr sz="2000"/>
             </a:lvl6pPr>
             <a:lvl7pPr marL="2743200" indent="0">
               <a:buNone/>
-              <a:defRPr sz="1600"/>
+              <a:defRPr sz="2000"/>
             </a:lvl7pPr>
             <a:lvl8pPr marL="3200400" indent="0">
               <a:buNone/>
-              <a:defRPr sz="1600"/>
+              <a:defRPr sz="2000"/>
             </a:lvl8pPr>
             <a:lvl9pPr marL="3657600" indent="0">
               <a:buNone/>
-              <a:defRPr sz="1600"/>
+              <a:defRPr sz="2000"/>
             </a:lvl9pPr>
           </a:lstStyle>
           <a:p>
-            <a:r>
-              <a:rPr lang="ru-RU"/>
-              <a:t>Вставка рисунка</a:t>
-            </a:r>
-            <a:endParaRPr lang="en-US" dirty="0"/>
-          </a:p>
-        </p:txBody>
-      </p:sp>
-      <p:sp>
-        <p:nvSpPr>
-          <p:cNvPr id="4" name="Text Placeholder 3"/>
+            <a:endParaRPr lang="ru-RU"/>
+          </a:p>
+        </p:txBody>
+      </p:sp>
+      <p:sp>
+        <p:nvSpPr>
+          <p:cNvPr id="4" name="Текст 3">
+            <a:extLst>
+              <a:ext uri="{FF2B5EF4-FFF2-40B4-BE49-F238E27FC236}">
+                <a16:creationId xmlns:a16="http://schemas.microsoft.com/office/drawing/2014/main" id="{D2DCF44A-BF18-5A96-F3AF-69B00C9081C5}"/>
+              </a:ext>
+            </a:extLst>
+          </p:cNvPr>
           <p:cNvSpPr>
             <a:spLocks noGrp="1"/>
           </p:cNvSpPr>
@@ -5301,50 +3247,48 @@
         </p:nvSpPr>
         <p:spPr>
           <a:xfrm>
-            <a:off x="1141411" y="2971800"/>
-            <a:ext cx="5334001" cy="1828800"/>
+            <a:off x="839788" y="2057400"/>
+            <a:ext cx="3932237" cy="3811588"/>
           </a:xfrm>
         </p:spPr>
         <p:txBody>
-          <a:bodyPr>
-            <a:normAutofit/>
-          </a:bodyPr>
+          <a:bodyPr/>
           <a:lstStyle>
             <a:lvl1pPr marL="0" indent="0">
               <a:buNone/>
-              <a:defRPr sz="1800"/>
+              <a:defRPr sz="1600"/>
             </a:lvl1pPr>
             <a:lvl2pPr marL="457200" indent="0">
               <a:buNone/>
-              <a:defRPr sz="1200"/>
+              <a:defRPr sz="1400"/>
             </a:lvl2pPr>
             <a:lvl3pPr marL="914400" indent="0">
               <a:buNone/>
-              <a:defRPr sz="1000"/>
+              <a:defRPr sz="1200"/>
             </a:lvl3pPr>
             <a:lvl4pPr marL="1371600" indent="0">
               <a:buNone/>
-              <a:defRPr sz="900"/>
+              <a:defRPr sz="1000"/>
             </a:lvl4pPr>
             <a:lvl5pPr marL="1828800" indent="0">
               <a:buNone/>
-              <a:defRPr sz="900"/>
+              <a:defRPr sz="1000"/>
             </a:lvl5pPr>
             <a:lvl6pPr marL="2286000" indent="0">
               <a:buNone/>
-              <a:defRPr sz="900"/>
+              <a:defRPr sz="1000"/>
             </a:lvl6pPr>
             <a:lvl7pPr marL="2743200" indent="0">
               <a:buNone/>
-              <a:defRPr sz="900"/>
+              <a:defRPr sz="1000"/>
             </a:lvl7pPr>
             <a:lvl8pPr marL="3200400" indent="0">
               <a:buNone/>
-              <a:defRPr sz="900"/>
+              <a:defRPr sz="1000"/>
             </a:lvl8pPr>
             <a:lvl9pPr marL="3657600" indent="0">
               <a:buNone/>
-              <a:defRPr sz="900"/>
+              <a:defRPr sz="1000"/>
             </a:lvl9pPr>
           </a:lstStyle>
           <a:p>
@@ -5358,7 +3302,13 @@
       </p:sp>
       <p:sp>
         <p:nvSpPr>
-          <p:cNvPr id="5" name="Date Placeholder 4"/>
+          <p:cNvPr id="5" name="Дата 4">
+            <a:extLst>
+              <a:ext uri="{FF2B5EF4-FFF2-40B4-BE49-F238E27FC236}">
+                <a16:creationId xmlns:a16="http://schemas.microsoft.com/office/drawing/2014/main" id="{5BBA26F4-E18F-F512-EE48-AB0644582C86}"/>
+              </a:ext>
+            </a:extLst>
+          </p:cNvPr>
           <p:cNvSpPr>
             <a:spLocks noGrp="1"/>
           </p:cNvSpPr>
@@ -5366,19 +3316,14 @@
             <p:ph type="dt" sz="half" idx="10"/>
           </p:nvPr>
         </p:nvSpPr>
-        <p:spPr>
-          <a:xfrm>
-            <a:off x="6399212" y="5883275"/>
-            <a:ext cx="914400" cy="365125"/>
-          </a:xfrm>
-        </p:spPr>
+        <p:spPr/>
         <p:txBody>
           <a:bodyPr/>
           <a:lstStyle/>
           <a:p>
             <a:fld id="{0F3EF48A-07EF-4B56-98CC-C04B85084176}" type="datetimeFigureOut">
               <a:rPr lang="ru-RU" smtClean="0"/>
-              <a:t>17.11.2025</a:t>
+              <a:t>02.03.2026</a:t>
             </a:fld>
             <a:endParaRPr lang="ru-RU"/>
           </a:p>
@@ -5386,7 +3331,13 @@
       </p:sp>
       <p:sp>
         <p:nvSpPr>
-          <p:cNvPr id="6" name="Footer Placeholder 5"/>
+          <p:cNvPr id="6" name="Нижний колонтитул 5">
+            <a:extLst>
+              <a:ext uri="{FF2B5EF4-FFF2-40B4-BE49-F238E27FC236}">
+                <a16:creationId xmlns:a16="http://schemas.microsoft.com/office/drawing/2014/main" id="{DCB7F7B3-4476-C80C-5BB4-D51D3F9E4B41}"/>
+              </a:ext>
+            </a:extLst>
+          </p:cNvPr>
           <p:cNvSpPr>
             <a:spLocks noGrp="1"/>
           </p:cNvSpPr>
@@ -5394,12 +3345,7 @@
             <p:ph type="ftr" sz="quarter" idx="11"/>
           </p:nvPr>
         </p:nvSpPr>
-        <p:spPr>
-          <a:xfrm>
-            <a:off x="1141412" y="5883275"/>
-            <a:ext cx="5105400" cy="365125"/>
-          </a:xfrm>
-        </p:spPr>
+        <p:spPr/>
         <p:txBody>
           <a:bodyPr/>
           <a:lstStyle/>
@@ -5410,7 +3356,13 @@
       </p:sp>
       <p:sp>
         <p:nvSpPr>
-          <p:cNvPr id="7" name="Slide Number Placeholder 6"/>
+          <p:cNvPr id="7" name="Номер слайда 6">
+            <a:extLst>
+              <a:ext uri="{FF2B5EF4-FFF2-40B4-BE49-F238E27FC236}">
+                <a16:creationId xmlns:a16="http://schemas.microsoft.com/office/drawing/2014/main" id="{8F0B1899-E146-1CE9-E3A3-C14FD7115176}"/>
+              </a:ext>
+            </a:extLst>
+          </p:cNvPr>
           <p:cNvSpPr>
             <a:spLocks noGrp="1"/>
           </p:cNvSpPr>
@@ -5418,12 +3370,7 @@
             <p:ph type="sldNum" sz="quarter" idx="12"/>
           </p:nvPr>
         </p:nvSpPr>
-        <p:spPr>
-          <a:xfrm>
-            <a:off x="10742612" y="5883275"/>
-            <a:ext cx="322567" cy="365125"/>
-          </a:xfrm>
-        </p:spPr>
+        <p:spPr/>
         <p:txBody>
           <a:bodyPr/>
           <a:lstStyle/>
@@ -5439,7 +3386,7 @@
     </p:spTree>
     <p:extLst>
       <p:ext uri="{BB962C8B-B14F-4D97-AF65-F5344CB8AC3E}">
-        <p14:creationId xmlns:p14="http://schemas.microsoft.com/office/powerpoint/2010/main" val="1360345445"/>
+        <p14:creationId xmlns:p14="http://schemas.microsoft.com/office/powerpoint/2010/main" val="3129327724"/>
       </p:ext>
     </p:extLst>
   </p:cSld>
@@ -5453,8 +3400,8 @@
 <p:sldMaster xmlns:a="http://schemas.openxmlformats.org/drawingml/2006/main" xmlns:r="http://schemas.openxmlformats.org/officeDocument/2006/relationships" xmlns:p="http://schemas.openxmlformats.org/presentationml/2006/main">
   <p:cSld>
     <p:bg>
-      <p:bgRef idx="1003">
-        <a:schemeClr val="bg2"/>
+      <p:bgRef idx="1001">
+        <a:schemeClr val="bg1"/>
       </p:bgRef>
     </p:bg>
     <p:spTree>
@@ -5473,7 +3420,13 @@
       </p:grpSpPr>
       <p:sp>
         <p:nvSpPr>
-          <p:cNvPr id="2" name="Title Placeholder 1"/>
+          <p:cNvPr id="2" name="Заголовок 1">
+            <a:extLst>
+              <a:ext uri="{FF2B5EF4-FFF2-40B4-BE49-F238E27FC236}">
+                <a16:creationId xmlns:a16="http://schemas.microsoft.com/office/drawing/2014/main" id="{DFDFA238-DBBA-C682-15A3-5E04899C51EC}"/>
+              </a:ext>
+            </a:extLst>
+          </p:cNvPr>
           <p:cNvSpPr>
             <a:spLocks noGrp="1"/>
           </p:cNvSpPr>
@@ -5483,8 +3436,8 @@
         </p:nvSpPr>
         <p:spPr>
           <a:xfrm>
-            <a:off x="1141413" y="609600"/>
-            <a:ext cx="9905998" cy="1905000"/>
+            <a:off x="838200" y="365125"/>
+            <a:ext cx="10515600" cy="1325563"/>
           </a:xfrm>
           <a:prstGeom prst="rect">
             <a:avLst/>
@@ -5500,13 +3453,18 @@
               <a:rPr lang="ru-RU"/>
               <a:t>Образец заголовка</a:t>
             </a:r>
-            <a:endParaRPr lang="en-US" dirty="0"/>
-          </a:p>
-        </p:txBody>
-      </p:sp>
-      <p:sp>
-        <p:nvSpPr>
-          <p:cNvPr id="3" name="Text Placeholder 2"/>
+          </a:p>
+        </p:txBody>
+      </p:sp>
+      <p:sp>
+        <p:nvSpPr>
+          <p:cNvPr id="3" name="Текст 2">
+            <a:extLst>
+              <a:ext uri="{FF2B5EF4-FFF2-40B4-BE49-F238E27FC236}">
+                <a16:creationId xmlns:a16="http://schemas.microsoft.com/office/drawing/2014/main" id="{E6332346-1C95-A15D-A192-F3752FCA5E71}"/>
+              </a:ext>
+            </a:extLst>
+          </p:cNvPr>
           <p:cNvSpPr>
             <a:spLocks noGrp="1"/>
           </p:cNvSpPr>
@@ -5516,15 +3474,15 @@
         </p:nvSpPr>
         <p:spPr>
           <a:xfrm>
-            <a:off x="1141413" y="2666999"/>
-            <a:ext cx="9905998" cy="3124201"/>
+            <a:off x="838200" y="1825625"/>
+            <a:ext cx="10515600" cy="4351338"/>
           </a:xfrm>
           <a:prstGeom prst="rect">
             <a:avLst/>
           </a:prstGeom>
         </p:spPr>
         <p:txBody>
-          <a:bodyPr vert="horz" lIns="91440" tIns="45720" rIns="91440" bIns="45720" rtlCol="0" anchor="ctr">
+          <a:bodyPr vert="horz" lIns="91440" tIns="45720" rIns="91440" bIns="45720" rtlCol="0">
             <a:normAutofit/>
           </a:bodyPr>
           <a:lstStyle/>
@@ -5562,13 +3520,18 @@
               <a:rPr lang="ru-RU"/>
               <a:t>Пятый уровень</a:t>
             </a:r>
-            <a:endParaRPr lang="en-US" dirty="0"/>
-          </a:p>
-        </p:txBody>
-      </p:sp>
-      <p:sp>
-        <p:nvSpPr>
-          <p:cNvPr id="4" name="Date Placeholder 3"/>
+          </a:p>
+        </p:txBody>
+      </p:sp>
+      <p:sp>
+        <p:nvSpPr>
+          <p:cNvPr id="4" name="Дата 3">
+            <a:extLst>
+              <a:ext uri="{FF2B5EF4-FFF2-40B4-BE49-F238E27FC236}">
+                <a16:creationId xmlns:a16="http://schemas.microsoft.com/office/drawing/2014/main" id="{5493843C-2D1B-7F99-20A9-19C4F1D09A7B}"/>
+              </a:ext>
+            </a:extLst>
+          </p:cNvPr>
           <p:cNvSpPr>
             <a:spLocks noGrp="1"/>
           </p:cNvSpPr>
@@ -5578,8 +3541,8 @@
         </p:nvSpPr>
         <p:spPr>
           <a:xfrm>
-            <a:off x="8837612" y="5883275"/>
-            <a:ext cx="1600200" cy="365125"/>
+            <a:off x="838200" y="6356350"/>
+            <a:ext cx="2743200" cy="365125"/>
           </a:xfrm>
           <a:prstGeom prst="rect">
             <a:avLst/>
@@ -5588,28 +3551,20 @@
         <p:txBody>
           <a:bodyPr vert="horz" lIns="91440" tIns="45720" rIns="91440" bIns="45720" rtlCol="0" anchor="ctr"/>
           <a:lstStyle>
-            <a:lvl1pPr algn="r">
-              <a:defRPr sz="900" b="1" i="0">
+            <a:lvl1pPr algn="l">
+              <a:defRPr sz="1200">
                 <a:solidFill>
                   <a:schemeClr val="tx1">
-                    <a:lumMod val="75000"/>
+                    <a:tint val="75000"/>
                   </a:schemeClr>
                 </a:solidFill>
-                <a:effectLst>
-                  <a:outerShdw blurRad="50800" dist="38100" dir="2700000" algn="tl" rotWithShape="0">
-                    <a:srgbClr val="000000">
-                      <a:alpha val="43000"/>
-                    </a:srgbClr>
-                  </a:outerShdw>
-                </a:effectLst>
-                <a:latin typeface="+mn-lt"/>
               </a:defRPr>
             </a:lvl1pPr>
           </a:lstStyle>
           <a:p>
             <a:fld id="{0F3EF48A-07EF-4B56-98CC-C04B85084176}" type="datetimeFigureOut">
               <a:rPr lang="ru-RU" smtClean="0"/>
-              <a:t>17.11.2025</a:t>
+              <a:t>02.03.2026</a:t>
             </a:fld>
             <a:endParaRPr lang="ru-RU"/>
           </a:p>
@@ -5617,7 +3572,13 @@
       </p:sp>
       <p:sp>
         <p:nvSpPr>
-          <p:cNvPr id="5" name="Footer Placeholder 4"/>
+          <p:cNvPr id="5" name="Нижний колонтитул 4">
+            <a:extLst>
+              <a:ext uri="{FF2B5EF4-FFF2-40B4-BE49-F238E27FC236}">
+                <a16:creationId xmlns:a16="http://schemas.microsoft.com/office/drawing/2014/main" id="{78DCFE81-951E-302B-7CE6-B45B686FF0D9}"/>
+              </a:ext>
+            </a:extLst>
+          </p:cNvPr>
           <p:cNvSpPr>
             <a:spLocks noGrp="1"/>
           </p:cNvSpPr>
@@ -5627,8 +3588,8 @@
         </p:nvSpPr>
         <p:spPr>
           <a:xfrm>
-            <a:off x="1141412" y="5883275"/>
-            <a:ext cx="7543800" cy="365125"/>
+            <a:off x="4038600" y="6356350"/>
+            <a:ext cx="4114800" cy="365125"/>
           </a:xfrm>
           <a:prstGeom prst="rect">
             <a:avLst/>
@@ -5637,21 +3598,13 @@
         <p:txBody>
           <a:bodyPr vert="horz" lIns="91440" tIns="45720" rIns="91440" bIns="45720" rtlCol="0" anchor="ctr"/>
           <a:lstStyle>
-            <a:lvl1pPr algn="l">
-              <a:defRPr sz="900" b="1" i="0">
+            <a:lvl1pPr algn="ctr">
+              <a:defRPr sz="1200">
                 <a:solidFill>
                   <a:schemeClr val="tx1">
-                    <a:lumMod val="75000"/>
+                    <a:tint val="75000"/>
                   </a:schemeClr>
                 </a:solidFill>
-                <a:effectLst>
-                  <a:outerShdw blurRad="50800" dist="38100" dir="2700000" algn="tl" rotWithShape="0">
-                    <a:srgbClr val="000000">
-                      <a:alpha val="43000"/>
-                    </a:srgbClr>
-                  </a:outerShdw>
-                </a:effectLst>
-                <a:latin typeface="+mn-lt"/>
               </a:defRPr>
             </a:lvl1pPr>
           </a:lstStyle>
@@ -5662,7 +3615,13 @@
       </p:sp>
       <p:sp>
         <p:nvSpPr>
-          <p:cNvPr id="6" name="Slide Number Placeholder 5"/>
+          <p:cNvPr id="6" name="Номер слайда 5">
+            <a:extLst>
+              <a:ext uri="{FF2B5EF4-FFF2-40B4-BE49-F238E27FC236}">
+                <a16:creationId xmlns:a16="http://schemas.microsoft.com/office/drawing/2014/main" id="{CCA6D981-B97F-5296-5D49-2506931F69AA}"/>
+              </a:ext>
+            </a:extLst>
+          </p:cNvPr>
           <p:cNvSpPr>
             <a:spLocks noGrp="1"/>
           </p:cNvSpPr>
@@ -5672,8 +3631,8 @@
         </p:nvSpPr>
         <p:spPr>
           <a:xfrm>
-            <a:off x="10514012" y="5883275"/>
-            <a:ext cx="551167" cy="365125"/>
+            <a:off x="8610600" y="6356350"/>
+            <a:ext cx="2743200" cy="365125"/>
           </a:xfrm>
           <a:prstGeom prst="rect">
             <a:avLst/>
@@ -5683,20 +3642,12 @@
           <a:bodyPr vert="horz" lIns="91440" tIns="45720" rIns="91440" bIns="45720" rtlCol="0" anchor="ctr"/>
           <a:lstStyle>
             <a:lvl1pPr algn="r">
-              <a:defRPr sz="900" b="1" i="0">
+              <a:defRPr sz="1200">
                 <a:solidFill>
                   <a:schemeClr val="tx1">
-                    <a:lumMod val="75000"/>
+                    <a:tint val="75000"/>
                   </a:schemeClr>
                 </a:solidFill>
-                <a:effectLst>
-                  <a:outerShdw blurRad="50800" dist="38100" dir="2700000" algn="tl" rotWithShape="0">
-                    <a:srgbClr val="000000">
-                      <a:alpha val="43000"/>
-                    </a:srgbClr>
-                  </a:outerShdw>
-                </a:effectLst>
-                <a:latin typeface="+mn-lt"/>
               </a:defRPr>
             </a:lvl1pPr>
           </a:lstStyle>
@@ -5712,550 +3663,202 @@
     </p:spTree>
     <p:extLst>
       <p:ext uri="{BB962C8B-B14F-4D97-AF65-F5344CB8AC3E}">
-        <p14:creationId xmlns:p14="http://schemas.microsoft.com/office/powerpoint/2010/main" val="101082209"/>
+        <p14:creationId xmlns:p14="http://schemas.microsoft.com/office/powerpoint/2010/main" val="2847598432"/>
       </p:ext>
     </p:extLst>
   </p:cSld>
-  <p:clrMap bg1="dk1" tx1="lt1" bg2="dk2" tx2="lt2" accent1="accent1" accent2="accent2" accent3="accent3" accent4="accent4" accent5="accent5" accent6="accent6" hlink="hlink" folHlink="folHlink"/>
+  <p:clrMap bg1="lt1" tx1="dk1" bg2="lt2" tx2="dk2" accent1="accent1" accent2="accent2" accent3="accent3" accent4="accent4" accent5="accent5" accent6="accent6" hlink="hlink" folHlink="folHlink"/>
   <p:sldLayoutIdLst>
-    <p:sldLayoutId id="2147483790" r:id="rId1"/>
-    <p:sldLayoutId id="2147483791" r:id="rId2"/>
-    <p:sldLayoutId id="2147483792" r:id="rId3"/>
-    <p:sldLayoutId id="2147483793" r:id="rId4"/>
-    <p:sldLayoutId id="2147483794" r:id="rId5"/>
-    <p:sldLayoutId id="2147483795" r:id="rId6"/>
-    <p:sldLayoutId id="2147483796" r:id="rId7"/>
-    <p:sldLayoutId id="2147483797" r:id="rId8"/>
-    <p:sldLayoutId id="2147483798" r:id="rId9"/>
-    <p:sldLayoutId id="2147483799" r:id="rId10"/>
-    <p:sldLayoutId id="2147483800" r:id="rId11"/>
-    <p:sldLayoutId id="2147483801" r:id="rId12"/>
-    <p:sldLayoutId id="2147483802" r:id="rId13"/>
-    <p:sldLayoutId id="2147483803" r:id="rId14"/>
-    <p:sldLayoutId id="2147483804" r:id="rId15"/>
-    <p:sldLayoutId id="2147483805" r:id="rId16"/>
-    <p:sldLayoutId id="2147483806" r:id="rId17"/>
+    <p:sldLayoutId id="2147483899" r:id="rId1"/>
+    <p:sldLayoutId id="2147483900" r:id="rId2"/>
+    <p:sldLayoutId id="2147483901" r:id="rId3"/>
+    <p:sldLayoutId id="2147483902" r:id="rId4"/>
+    <p:sldLayoutId id="2147483903" r:id="rId5"/>
+    <p:sldLayoutId id="2147483904" r:id="rId6"/>
+    <p:sldLayoutId id="2147483905" r:id="rId7"/>
+    <p:sldLayoutId id="2147483906" r:id="rId8"/>
+    <p:sldLayoutId id="2147483907" r:id="rId9"/>
+    <p:sldLayoutId id="2147483908" r:id="rId10"/>
+    <p:sldLayoutId id="2147483909" r:id="rId11"/>
   </p:sldLayoutIdLst>
   <p:txStyles>
     <p:titleStyle>
-      <a:lvl1pPr algn="l" defTabSz="457200" rtl="0" eaLnBrk="1" latinLnBrk="0" hangingPunct="1">
+      <a:lvl1pPr algn="l" defTabSz="914400" rtl="0" eaLnBrk="1" latinLnBrk="0" hangingPunct="1">
+        <a:lnSpc>
+          <a:spcPct val="90000"/>
+        </a:lnSpc>
         <a:spcBef>
           <a:spcPct val="0"/>
         </a:spcBef>
         <a:buNone/>
-        <a:defRPr sz="3200" kern="1200" cap="all">
-          <a:ln w="3175" cmpd="sng">
-            <a:noFill/>
-          </a:ln>
-          <a:gradFill flip="none" rotWithShape="1">
-            <a:gsLst>
-              <a:gs pos="0">
-                <a:schemeClr val="tx1"/>
-              </a:gs>
-              <a:gs pos="100000">
-                <a:schemeClr val="tx1">
-                  <a:lumMod val="65000"/>
-                </a:schemeClr>
-              </a:gs>
-            </a:gsLst>
-            <a:lin ang="5580000" scaled="0"/>
-            <a:tileRect/>
-          </a:gradFill>
-          <a:effectLst>
-            <a:glow rad="38100">
-              <a:schemeClr val="bg1">
-                <a:lumMod val="65000"/>
-                <a:lumOff val="35000"/>
-                <a:alpha val="40000"/>
-              </a:schemeClr>
-            </a:glow>
-            <a:outerShdw blurRad="28575" dist="38100" dir="14040000" algn="tl" rotWithShape="0">
-              <a:srgbClr val="000000">
-                <a:alpha val="25000"/>
-              </a:srgbClr>
-            </a:outerShdw>
-          </a:effectLst>
+        <a:defRPr sz="4400" kern="1200">
+          <a:solidFill>
+            <a:schemeClr val="tx1"/>
+          </a:solidFill>
           <a:latin typeface="+mj-lt"/>
           <a:ea typeface="+mj-ea"/>
           <a:cs typeface="+mj-cs"/>
         </a:defRPr>
       </a:lvl1pPr>
-      <a:lvl2pPr eaLnBrk="1" hangingPunct="1">
-        <a:defRPr>
-          <a:solidFill>
-            <a:schemeClr val="tx2"/>
-          </a:solidFill>
-        </a:defRPr>
-      </a:lvl2pPr>
-      <a:lvl3pPr eaLnBrk="1" hangingPunct="1">
-        <a:defRPr>
-          <a:solidFill>
-            <a:schemeClr val="tx2"/>
-          </a:solidFill>
-        </a:defRPr>
-      </a:lvl3pPr>
-      <a:lvl4pPr eaLnBrk="1" hangingPunct="1">
-        <a:defRPr>
-          <a:solidFill>
-            <a:schemeClr val="tx2"/>
-          </a:solidFill>
-        </a:defRPr>
-      </a:lvl4pPr>
-      <a:lvl5pPr eaLnBrk="1" hangingPunct="1">
-        <a:defRPr>
-          <a:solidFill>
-            <a:schemeClr val="tx2"/>
-          </a:solidFill>
-        </a:defRPr>
-      </a:lvl5pPr>
-      <a:lvl6pPr eaLnBrk="1" hangingPunct="1">
-        <a:defRPr>
-          <a:solidFill>
-            <a:schemeClr val="tx2"/>
-          </a:solidFill>
-        </a:defRPr>
-      </a:lvl6pPr>
-      <a:lvl7pPr eaLnBrk="1" hangingPunct="1">
-        <a:defRPr>
-          <a:solidFill>
-            <a:schemeClr val="tx2"/>
-          </a:solidFill>
-        </a:defRPr>
-      </a:lvl7pPr>
-      <a:lvl8pPr eaLnBrk="1" hangingPunct="1">
-        <a:defRPr>
-          <a:solidFill>
-            <a:schemeClr val="tx2"/>
-          </a:solidFill>
-        </a:defRPr>
-      </a:lvl8pPr>
-      <a:lvl9pPr eaLnBrk="1" hangingPunct="1">
-        <a:defRPr>
-          <a:solidFill>
-            <a:schemeClr val="tx2"/>
-          </a:solidFill>
-        </a:defRPr>
-      </a:lvl9pPr>
     </p:titleStyle>
     <p:bodyStyle>
-      <a:lvl1pPr marL="285750" indent="-285750" algn="l" defTabSz="457200" rtl="0" eaLnBrk="1" latinLnBrk="0" hangingPunct="1">
+      <a:lvl1pPr marL="228600" indent="-228600" algn="l" defTabSz="914400" rtl="0" eaLnBrk="1" latinLnBrk="0" hangingPunct="1">
+        <a:lnSpc>
+          <a:spcPct val="90000"/>
+        </a:lnSpc>
         <a:spcBef>
-          <a:spcPct val="20000"/>
+          <a:spcPts val="1000"/>
         </a:spcBef>
-        <a:spcAft>
-          <a:spcPts val="600"/>
-        </a:spcAft>
-        <a:buClr>
-          <a:schemeClr val="tx1"/>
-        </a:buClr>
-        <a:buSzPct val="100000"/>
-        <a:buFont typeface="Arial"/>
+        <a:buFont typeface="Arial" panose="020B0604020202020204" pitchFamily="34" charset="0"/>
         <a:buChar char="•"/>
-        <a:defRPr sz="2000" kern="1200" cap="small">
-          <a:gradFill flip="none" rotWithShape="1">
-            <a:gsLst>
-              <a:gs pos="0">
-                <a:schemeClr val="tx1"/>
-              </a:gs>
-              <a:gs pos="100000">
-                <a:schemeClr val="tx1">
-                  <a:lumMod val="75000"/>
-                </a:schemeClr>
-              </a:gs>
-            </a:gsLst>
-            <a:lin ang="5580000" scaled="0"/>
-            <a:tileRect/>
-          </a:gradFill>
-          <a:effectLst>
-            <a:glow rad="38100">
-              <a:schemeClr val="bg1">
-                <a:lumMod val="50000"/>
-                <a:lumOff val="50000"/>
-                <a:alpha val="20000"/>
-              </a:schemeClr>
-            </a:glow>
-            <a:outerShdw blurRad="44450" dist="12700" dir="13860000" algn="tl" rotWithShape="0">
-              <a:srgbClr val="000000">
-                <a:alpha val="20000"/>
-              </a:srgbClr>
-            </a:outerShdw>
-          </a:effectLst>
+        <a:defRPr sz="2800" kern="1200">
+          <a:solidFill>
+            <a:schemeClr val="tx1"/>
+          </a:solidFill>
           <a:latin typeface="+mn-lt"/>
           <a:ea typeface="+mn-ea"/>
           <a:cs typeface="+mn-cs"/>
         </a:defRPr>
       </a:lvl1pPr>
-      <a:lvl2pPr marL="742950" indent="-285750" algn="l" defTabSz="457200" rtl="0" eaLnBrk="1" latinLnBrk="0" hangingPunct="1">
+      <a:lvl2pPr marL="685800" indent="-228600" algn="l" defTabSz="914400" rtl="0" eaLnBrk="1" latinLnBrk="0" hangingPunct="1">
+        <a:lnSpc>
+          <a:spcPct val="90000"/>
+        </a:lnSpc>
         <a:spcBef>
-          <a:spcPct val="20000"/>
+          <a:spcPts val="500"/>
         </a:spcBef>
-        <a:spcAft>
-          <a:spcPts val="600"/>
-        </a:spcAft>
-        <a:buClr>
-          <a:schemeClr val="tx1"/>
-        </a:buClr>
-        <a:buSzPct val="100000"/>
-        <a:buFont typeface="Arial"/>
+        <a:buFont typeface="Arial" panose="020B0604020202020204" pitchFamily="34" charset="0"/>
         <a:buChar char="•"/>
-        <a:defRPr sz="1800" kern="1200" cap="small">
-          <a:gradFill flip="none" rotWithShape="1">
-            <a:gsLst>
-              <a:gs pos="0">
-                <a:schemeClr val="tx1"/>
-              </a:gs>
-              <a:gs pos="100000">
-                <a:schemeClr val="tx1">
-                  <a:lumMod val="75000"/>
-                </a:schemeClr>
-              </a:gs>
-            </a:gsLst>
-            <a:lin ang="5580000" scaled="0"/>
-            <a:tileRect/>
-          </a:gradFill>
-          <a:effectLst>
-            <a:glow rad="38100">
-              <a:schemeClr val="bg1">
-                <a:lumMod val="50000"/>
-                <a:lumOff val="50000"/>
-                <a:alpha val="20000"/>
-              </a:schemeClr>
-            </a:glow>
-            <a:outerShdw blurRad="44450" dist="12700" dir="13860000" algn="tl" rotWithShape="0">
-              <a:srgbClr val="000000">
-                <a:alpha val="20000"/>
-              </a:srgbClr>
-            </a:outerShdw>
-          </a:effectLst>
+        <a:defRPr sz="2400" kern="1200">
+          <a:solidFill>
+            <a:schemeClr val="tx1"/>
+          </a:solidFill>
           <a:latin typeface="+mn-lt"/>
           <a:ea typeface="+mn-ea"/>
           <a:cs typeface="+mn-cs"/>
         </a:defRPr>
       </a:lvl2pPr>
-      <a:lvl3pPr marL="1200150" indent="-285750" algn="l" defTabSz="457200" rtl="0" eaLnBrk="1" latinLnBrk="0" hangingPunct="1">
+      <a:lvl3pPr marL="1143000" indent="-228600" algn="l" defTabSz="914400" rtl="0" eaLnBrk="1" latinLnBrk="0" hangingPunct="1">
+        <a:lnSpc>
+          <a:spcPct val="90000"/>
+        </a:lnSpc>
         <a:spcBef>
-          <a:spcPct val="20000"/>
+          <a:spcPts val="500"/>
         </a:spcBef>
-        <a:spcAft>
-          <a:spcPts val="600"/>
-        </a:spcAft>
-        <a:buClr>
-          <a:schemeClr val="tx1"/>
-        </a:buClr>
-        <a:buSzPct val="100000"/>
-        <a:buFont typeface="Arial"/>
+        <a:buFont typeface="Arial" panose="020B0604020202020204" pitchFamily="34" charset="0"/>
         <a:buChar char="•"/>
-        <a:defRPr sz="1600" kern="1200" cap="small">
-          <a:gradFill flip="none" rotWithShape="1">
-            <a:gsLst>
-              <a:gs pos="0">
-                <a:schemeClr val="tx1"/>
-              </a:gs>
-              <a:gs pos="100000">
-                <a:schemeClr val="tx1">
-                  <a:lumMod val="75000"/>
-                </a:schemeClr>
-              </a:gs>
-            </a:gsLst>
-            <a:lin ang="5580000" scaled="0"/>
-            <a:tileRect/>
-          </a:gradFill>
-          <a:effectLst>
-            <a:glow rad="38100">
-              <a:schemeClr val="bg1">
-                <a:lumMod val="50000"/>
-                <a:lumOff val="50000"/>
-                <a:alpha val="20000"/>
-              </a:schemeClr>
-            </a:glow>
-            <a:outerShdw blurRad="44450" dist="12700" dir="13860000" algn="tl" rotWithShape="0">
-              <a:srgbClr val="000000">
-                <a:alpha val="20000"/>
-              </a:srgbClr>
-            </a:outerShdw>
-          </a:effectLst>
+        <a:defRPr sz="2000" kern="1200">
+          <a:solidFill>
+            <a:schemeClr val="tx1"/>
+          </a:solidFill>
           <a:latin typeface="+mn-lt"/>
           <a:ea typeface="+mn-ea"/>
           <a:cs typeface="+mn-cs"/>
         </a:defRPr>
       </a:lvl3pPr>
-      <a:lvl4pPr marL="1543050" indent="-171450" algn="l" defTabSz="457200" rtl="0" eaLnBrk="1" latinLnBrk="0" hangingPunct="1">
+      <a:lvl4pPr marL="1600200" indent="-228600" algn="l" defTabSz="914400" rtl="0" eaLnBrk="1" latinLnBrk="0" hangingPunct="1">
+        <a:lnSpc>
+          <a:spcPct val="90000"/>
+        </a:lnSpc>
         <a:spcBef>
-          <a:spcPct val="20000"/>
+          <a:spcPts val="500"/>
         </a:spcBef>
-        <a:spcAft>
-          <a:spcPts val="600"/>
-        </a:spcAft>
-        <a:buClr>
-          <a:schemeClr val="tx1"/>
-        </a:buClr>
-        <a:buSzPct val="100000"/>
-        <a:buFont typeface="Arial"/>
+        <a:buFont typeface="Arial" panose="020B0604020202020204" pitchFamily="34" charset="0"/>
         <a:buChar char="•"/>
-        <a:defRPr sz="1400" kern="1200" cap="small">
-          <a:gradFill flip="none" rotWithShape="1">
-            <a:gsLst>
-              <a:gs pos="0">
-                <a:schemeClr val="tx1"/>
-              </a:gs>
-              <a:gs pos="100000">
-                <a:schemeClr val="tx1">
-                  <a:lumMod val="75000"/>
-                </a:schemeClr>
-              </a:gs>
-            </a:gsLst>
-            <a:lin ang="5580000" scaled="0"/>
-            <a:tileRect/>
-          </a:gradFill>
-          <a:effectLst>
-            <a:glow rad="38100">
-              <a:schemeClr val="bg1">
-                <a:lumMod val="50000"/>
-                <a:lumOff val="50000"/>
-                <a:alpha val="20000"/>
-              </a:schemeClr>
-            </a:glow>
-            <a:outerShdw blurRad="44450" dist="12700" dir="13860000" algn="tl" rotWithShape="0">
-              <a:srgbClr val="000000">
-                <a:alpha val="20000"/>
-              </a:srgbClr>
-            </a:outerShdw>
-          </a:effectLst>
+        <a:defRPr sz="1800" kern="1200">
+          <a:solidFill>
+            <a:schemeClr val="tx1"/>
+          </a:solidFill>
           <a:latin typeface="+mn-lt"/>
           <a:ea typeface="+mn-ea"/>
           <a:cs typeface="+mn-cs"/>
         </a:defRPr>
       </a:lvl4pPr>
-      <a:lvl5pPr marL="2000250" indent="-171450" algn="l" defTabSz="457200" rtl="0" eaLnBrk="1" latinLnBrk="0" hangingPunct="1">
+      <a:lvl5pPr marL="2057400" indent="-228600" algn="l" defTabSz="914400" rtl="0" eaLnBrk="1" latinLnBrk="0" hangingPunct="1">
+        <a:lnSpc>
+          <a:spcPct val="90000"/>
+        </a:lnSpc>
         <a:spcBef>
-          <a:spcPct val="20000"/>
+          <a:spcPts val="500"/>
         </a:spcBef>
-        <a:spcAft>
-          <a:spcPts val="600"/>
-        </a:spcAft>
-        <a:buClr>
-          <a:schemeClr val="tx1"/>
-        </a:buClr>
-        <a:buSzPct val="100000"/>
-        <a:buFont typeface="Arial"/>
+        <a:buFont typeface="Arial" panose="020B0604020202020204" pitchFamily="34" charset="0"/>
         <a:buChar char="•"/>
-        <a:defRPr sz="1400" kern="1200" cap="small">
-          <a:gradFill flip="none" rotWithShape="1">
-            <a:gsLst>
-              <a:gs pos="0">
-                <a:schemeClr val="tx1"/>
-              </a:gs>
-              <a:gs pos="100000">
-                <a:schemeClr val="tx1">
-                  <a:lumMod val="75000"/>
-                </a:schemeClr>
-              </a:gs>
-            </a:gsLst>
-            <a:lin ang="5580000" scaled="0"/>
-            <a:tileRect/>
-          </a:gradFill>
-          <a:effectLst>
-            <a:glow rad="38100">
-              <a:schemeClr val="bg1">
-                <a:lumMod val="50000"/>
-                <a:lumOff val="50000"/>
-                <a:alpha val="20000"/>
-              </a:schemeClr>
-            </a:glow>
-            <a:outerShdw blurRad="44450" dist="12700" dir="13860000" algn="tl" rotWithShape="0">
-              <a:srgbClr val="000000">
-                <a:alpha val="20000"/>
-              </a:srgbClr>
-            </a:outerShdw>
-          </a:effectLst>
+        <a:defRPr sz="1800" kern="1200">
+          <a:solidFill>
+            <a:schemeClr val="tx1"/>
+          </a:solidFill>
           <a:latin typeface="+mn-lt"/>
           <a:ea typeface="+mn-ea"/>
           <a:cs typeface="+mn-cs"/>
         </a:defRPr>
       </a:lvl5pPr>
-      <a:lvl6pPr marL="2514600" indent="-228600" algn="l" defTabSz="457200" rtl="0" eaLnBrk="1" latinLnBrk="0" hangingPunct="1">
+      <a:lvl6pPr marL="2514600" indent="-228600" algn="l" defTabSz="914400" rtl="0" eaLnBrk="1" latinLnBrk="0" hangingPunct="1">
+        <a:lnSpc>
+          <a:spcPct val="90000"/>
+        </a:lnSpc>
         <a:spcBef>
-          <a:spcPct val="20000"/>
+          <a:spcPts val="500"/>
         </a:spcBef>
-        <a:spcAft>
-          <a:spcPts val="600"/>
-        </a:spcAft>
-        <a:buClr>
-          <a:schemeClr val="tx1"/>
-        </a:buClr>
-        <a:buSzPct val="100000"/>
-        <a:buFont typeface="Arial"/>
+        <a:buFont typeface="Arial" panose="020B0604020202020204" pitchFamily="34" charset="0"/>
         <a:buChar char="•"/>
-        <a:defRPr sz="1200" kern="1200" cap="small">
-          <a:gradFill flip="none" rotWithShape="1">
-            <a:gsLst>
-              <a:gs pos="0">
-                <a:schemeClr val="tx1"/>
-              </a:gs>
-              <a:gs pos="100000">
-                <a:schemeClr val="tx1">
-                  <a:lumMod val="75000"/>
-                </a:schemeClr>
-              </a:gs>
-            </a:gsLst>
-            <a:lin ang="5580000" scaled="0"/>
-            <a:tileRect/>
-          </a:gradFill>
-          <a:effectLst>
-            <a:glow rad="38100">
-              <a:schemeClr val="bg1">
-                <a:lumMod val="50000"/>
-                <a:lumOff val="50000"/>
-                <a:alpha val="20000"/>
-              </a:schemeClr>
-            </a:glow>
-            <a:outerShdw blurRad="44450" dist="12700" dir="13860000" algn="tl" rotWithShape="0">
-              <a:srgbClr val="000000">
-                <a:alpha val="20000"/>
-              </a:srgbClr>
-            </a:outerShdw>
-          </a:effectLst>
+        <a:defRPr sz="1800" kern="1200">
+          <a:solidFill>
+            <a:schemeClr val="tx1"/>
+          </a:solidFill>
           <a:latin typeface="+mn-lt"/>
           <a:ea typeface="+mn-ea"/>
           <a:cs typeface="+mn-cs"/>
         </a:defRPr>
       </a:lvl6pPr>
-      <a:lvl7pPr marL="2971800" indent="-228600" algn="l" defTabSz="457200" rtl="0" eaLnBrk="1" latinLnBrk="0" hangingPunct="1">
+      <a:lvl7pPr marL="2971800" indent="-228600" algn="l" defTabSz="914400" rtl="0" eaLnBrk="1" latinLnBrk="0" hangingPunct="1">
+        <a:lnSpc>
+          <a:spcPct val="90000"/>
+        </a:lnSpc>
         <a:spcBef>
-          <a:spcPct val="20000"/>
+          <a:spcPts val="500"/>
         </a:spcBef>
-        <a:spcAft>
-          <a:spcPts val="600"/>
-        </a:spcAft>
-        <a:buClr>
-          <a:schemeClr val="tx1"/>
-        </a:buClr>
-        <a:buSzPct val="100000"/>
-        <a:buFont typeface="Arial"/>
+        <a:buFont typeface="Arial" panose="020B0604020202020204" pitchFamily="34" charset="0"/>
         <a:buChar char="•"/>
-        <a:defRPr sz="1200" kern="1200" cap="small">
-          <a:gradFill flip="none" rotWithShape="1">
-            <a:gsLst>
-              <a:gs pos="0">
-                <a:schemeClr val="tx1"/>
-              </a:gs>
-              <a:gs pos="100000">
-                <a:schemeClr val="tx1">
-                  <a:lumMod val="75000"/>
-                </a:schemeClr>
-              </a:gs>
-            </a:gsLst>
-            <a:lin ang="5580000" scaled="0"/>
-            <a:tileRect/>
-          </a:gradFill>
-          <a:effectLst>
-            <a:glow rad="38100">
-              <a:schemeClr val="bg1">
-                <a:lumMod val="50000"/>
-                <a:lumOff val="50000"/>
-                <a:alpha val="20000"/>
-              </a:schemeClr>
-            </a:glow>
-            <a:outerShdw blurRad="44450" dist="12700" dir="13860000" algn="tl" rotWithShape="0">
-              <a:srgbClr val="000000">
-                <a:alpha val="20000"/>
-              </a:srgbClr>
-            </a:outerShdw>
-          </a:effectLst>
+        <a:defRPr sz="1800" kern="1200">
+          <a:solidFill>
+            <a:schemeClr val="tx1"/>
+          </a:solidFill>
           <a:latin typeface="+mn-lt"/>
           <a:ea typeface="+mn-ea"/>
           <a:cs typeface="+mn-cs"/>
         </a:defRPr>
       </a:lvl7pPr>
-      <a:lvl8pPr marL="3429000" indent="-228600" algn="l" defTabSz="457200" rtl="0" eaLnBrk="1" latinLnBrk="0" hangingPunct="1">
+      <a:lvl8pPr marL="3429000" indent="-228600" algn="l" defTabSz="914400" rtl="0" eaLnBrk="1" latinLnBrk="0" hangingPunct="1">
+        <a:lnSpc>
+          <a:spcPct val="90000"/>
+        </a:lnSpc>
         <a:spcBef>
-          <a:spcPct val="20000"/>
+          <a:spcPts val="500"/>
         </a:spcBef>
-        <a:spcAft>
-          <a:spcPts val="600"/>
-        </a:spcAft>
-        <a:buClr>
-          <a:schemeClr val="tx1"/>
-        </a:buClr>
-        <a:buSzPct val="100000"/>
-        <a:buFont typeface="Arial"/>
+        <a:buFont typeface="Arial" panose="020B0604020202020204" pitchFamily="34" charset="0"/>
         <a:buChar char="•"/>
-        <a:defRPr sz="1200" kern="1200" cap="small">
-          <a:gradFill flip="none" rotWithShape="1">
-            <a:gsLst>
-              <a:gs pos="0">
-                <a:schemeClr val="tx1"/>
-              </a:gs>
-              <a:gs pos="100000">
-                <a:schemeClr val="tx1">
-                  <a:lumMod val="75000"/>
-                </a:schemeClr>
-              </a:gs>
-            </a:gsLst>
-            <a:lin ang="5580000" scaled="0"/>
-            <a:tileRect/>
-          </a:gradFill>
-          <a:effectLst>
-            <a:glow rad="38100">
-              <a:schemeClr val="bg1">
-                <a:lumMod val="50000"/>
-                <a:lumOff val="50000"/>
-                <a:alpha val="20000"/>
-              </a:schemeClr>
-            </a:glow>
-            <a:outerShdw blurRad="44450" dist="12700" dir="13860000" algn="tl" rotWithShape="0">
-              <a:srgbClr val="000000">
-                <a:alpha val="20000"/>
-              </a:srgbClr>
-            </a:outerShdw>
-          </a:effectLst>
+        <a:defRPr sz="1800" kern="1200">
+          <a:solidFill>
+            <a:schemeClr val="tx1"/>
+          </a:solidFill>
           <a:latin typeface="+mn-lt"/>
           <a:ea typeface="+mn-ea"/>
           <a:cs typeface="+mn-cs"/>
         </a:defRPr>
       </a:lvl8pPr>
-      <a:lvl9pPr marL="3886200" indent="-228600" algn="l" defTabSz="457200" rtl="0" eaLnBrk="1" latinLnBrk="0" hangingPunct="1">
+      <a:lvl9pPr marL="3886200" indent="-228600" algn="l" defTabSz="914400" rtl="0" eaLnBrk="1" latinLnBrk="0" hangingPunct="1">
+        <a:lnSpc>
+          <a:spcPct val="90000"/>
+        </a:lnSpc>
         <a:spcBef>
-          <a:spcPct val="20000"/>
+          <a:spcPts val="500"/>
         </a:spcBef>
-        <a:spcAft>
-          <a:spcPts val="600"/>
-        </a:spcAft>
-        <a:buClr>
-          <a:schemeClr val="tx1"/>
-        </a:buClr>
-        <a:buSzPct val="100000"/>
-        <a:buFont typeface="Arial"/>
+        <a:buFont typeface="Arial" panose="020B0604020202020204" pitchFamily="34" charset="0"/>
         <a:buChar char="•"/>
-        <a:defRPr sz="1200" kern="1200" cap="small">
-          <a:gradFill flip="none" rotWithShape="1">
-            <a:gsLst>
-              <a:gs pos="0">
-                <a:schemeClr val="tx1"/>
-              </a:gs>
-              <a:gs pos="100000">
-                <a:schemeClr val="tx1">
-                  <a:lumMod val="75000"/>
-                </a:schemeClr>
-              </a:gs>
-            </a:gsLst>
-            <a:lin ang="5580000" scaled="0"/>
-            <a:tileRect/>
-          </a:gradFill>
-          <a:effectLst>
-            <a:glow rad="38100">
-              <a:schemeClr val="bg1">
-                <a:lumMod val="50000"/>
-                <a:lumOff val="50000"/>
-                <a:alpha val="20000"/>
-              </a:schemeClr>
-            </a:glow>
-            <a:outerShdw blurRad="44450" dist="12700" dir="13860000" algn="tl" rotWithShape="0">
-              <a:srgbClr val="000000">
-                <a:alpha val="20000"/>
-              </a:srgbClr>
-            </a:outerShdw>
-          </a:effectLst>
+        <a:defRPr sz="1800" kern="1200">
+          <a:solidFill>
+            <a:schemeClr val="tx1"/>
+          </a:solidFill>
           <a:latin typeface="+mn-lt"/>
           <a:ea typeface="+mn-ea"/>
           <a:cs typeface="+mn-cs"/>
@@ -6264,9 +3867,9 @@
     </p:bodyStyle>
     <p:otherStyle>
       <a:defPPr>
-        <a:defRPr lang="en-US"/>
+        <a:defRPr lang="ru-RU"/>
       </a:defPPr>
-      <a:lvl1pPr marL="0" algn="l" defTabSz="457200" rtl="0" eaLnBrk="1" latinLnBrk="0" hangingPunct="1">
+      <a:lvl1pPr marL="0" algn="l" defTabSz="914400" rtl="0" eaLnBrk="1" latinLnBrk="0" hangingPunct="1">
         <a:defRPr sz="1800" kern="1200">
           <a:solidFill>
             <a:schemeClr val="tx1"/>
@@ -6276,7 +3879,7 @@
           <a:cs typeface="+mn-cs"/>
         </a:defRPr>
       </a:lvl1pPr>
-      <a:lvl2pPr marL="457200" algn="l" defTabSz="457200" rtl="0" eaLnBrk="1" latinLnBrk="0" hangingPunct="1">
+      <a:lvl2pPr marL="457200" algn="l" defTabSz="914400" rtl="0" eaLnBrk="1" latinLnBrk="0" hangingPunct="1">
         <a:defRPr sz="1800" kern="1200">
           <a:solidFill>
             <a:schemeClr val="tx1"/>
@@ -6286,7 +3889,7 @@
           <a:cs typeface="+mn-cs"/>
         </a:defRPr>
       </a:lvl2pPr>
-      <a:lvl3pPr marL="914400" algn="l" defTabSz="457200" rtl="0" eaLnBrk="1" latinLnBrk="0" hangingPunct="1">
+      <a:lvl3pPr marL="914400" algn="l" defTabSz="914400" rtl="0" eaLnBrk="1" latinLnBrk="0" hangingPunct="1">
         <a:defRPr sz="1800" kern="1200">
           <a:solidFill>
             <a:schemeClr val="tx1"/>
@@ -6296,7 +3899,7 @@
           <a:cs typeface="+mn-cs"/>
         </a:defRPr>
       </a:lvl3pPr>
-      <a:lvl4pPr marL="1371600" algn="l" defTabSz="457200" rtl="0" eaLnBrk="1" latinLnBrk="0" hangingPunct="1">
+      <a:lvl4pPr marL="1371600" algn="l" defTabSz="914400" rtl="0" eaLnBrk="1" latinLnBrk="0" hangingPunct="1">
         <a:defRPr sz="1800" kern="1200">
           <a:solidFill>
             <a:schemeClr val="tx1"/>
@@ -6306,7 +3909,7 @@
           <a:cs typeface="+mn-cs"/>
         </a:defRPr>
       </a:lvl4pPr>
-      <a:lvl5pPr marL="1828800" algn="l" defTabSz="457200" rtl="0" eaLnBrk="1" latinLnBrk="0" hangingPunct="1">
+      <a:lvl5pPr marL="1828800" algn="l" defTabSz="914400" rtl="0" eaLnBrk="1" latinLnBrk="0" hangingPunct="1">
         <a:defRPr sz="1800" kern="1200">
           <a:solidFill>
             <a:schemeClr val="tx1"/>
@@ -6316,7 +3919,7 @@
           <a:cs typeface="+mn-cs"/>
         </a:defRPr>
       </a:lvl5pPr>
-      <a:lvl6pPr marL="2286000" algn="l" defTabSz="457200" rtl="0" eaLnBrk="1" latinLnBrk="0" hangingPunct="1">
+      <a:lvl6pPr marL="2286000" algn="l" defTabSz="914400" rtl="0" eaLnBrk="1" latinLnBrk="0" hangingPunct="1">
         <a:defRPr sz="1800" kern="1200">
           <a:solidFill>
             <a:schemeClr val="tx1"/>
@@ -6326,7 +3929,7 @@
           <a:cs typeface="+mn-cs"/>
         </a:defRPr>
       </a:lvl6pPr>
-      <a:lvl7pPr marL="2743200" algn="l" defTabSz="457200" rtl="0" eaLnBrk="1" latinLnBrk="0" hangingPunct="1">
+      <a:lvl7pPr marL="2743200" algn="l" defTabSz="914400" rtl="0" eaLnBrk="1" latinLnBrk="0" hangingPunct="1">
         <a:defRPr sz="1800" kern="1200">
           <a:solidFill>
             <a:schemeClr val="tx1"/>
@@ -6336,7 +3939,7 @@
           <a:cs typeface="+mn-cs"/>
         </a:defRPr>
       </a:lvl7pPr>
-      <a:lvl8pPr marL="3200400" algn="l" defTabSz="457200" rtl="0" eaLnBrk="1" latinLnBrk="0" hangingPunct="1">
+      <a:lvl8pPr marL="3200400" algn="l" defTabSz="914400" rtl="0" eaLnBrk="1" latinLnBrk="0" hangingPunct="1">
         <a:defRPr sz="1800" kern="1200">
           <a:solidFill>
             <a:schemeClr val="tx1"/>
@@ -6346,7 +3949,7 @@
           <a:cs typeface="+mn-cs"/>
         </a:defRPr>
       </a:lvl8pPr>
-      <a:lvl9pPr marL="3657600" algn="l" defTabSz="457200" rtl="0" eaLnBrk="1" latinLnBrk="0" hangingPunct="1">
+      <a:lvl9pPr marL="3657600" algn="l" defTabSz="914400" rtl="0" eaLnBrk="1" latinLnBrk="0" hangingPunct="1">
         <a:defRPr sz="1800" kern="1200">
           <a:solidFill>
             <a:schemeClr val="tx1"/>
@@ -6446,7 +4049,7 @@
           <a:p>
             <a:r>
               <a:rPr lang="ru-RU" dirty="0"/>
-              <a:t>Вариант №2</a:t>
+              <a:t>Вариант №27</a:t>
             </a:r>
           </a:p>
         </p:txBody>
@@ -6559,7 +4162,7 @@
                 <a:effectLst/>
                 <a:latin typeface="Arial" panose="020B0604020202020204" pitchFamily="34" charset="0"/>
               </a:rPr>
-              <a:t> Кошкаров Д</a:t>
+              <a:t> Кабанов А</a:t>
             </a:r>
             <a:r>
               <a:rPr kumimoji="0" lang="en-GB" altLang="ru-RU" sz="1800" b="0" i="0" u="none" strike="noStrike" cap="none" normalizeH="0" baseline="0" dirty="0">
@@ -6585,33 +4188,7 @@
                 <a:effectLst/>
                 <a:latin typeface="Arial" panose="020B0604020202020204" pitchFamily="34" charset="0"/>
               </a:rPr>
-              <a:t> С</a:t>
-            </a:r>
-            <a:r>
-              <a:rPr kumimoji="0" lang="en-GB" altLang="ru-RU" sz="1800" b="0" i="0" u="none" strike="noStrike" cap="none" normalizeH="0" baseline="0" dirty="0">
-                <a:ln>
-                  <a:noFill/>
-                </a:ln>
-                <a:solidFill>
-                  <a:schemeClr val="tx1"/>
-                </a:solidFill>
-                <a:effectLst/>
-                <a:latin typeface="Arial" panose="020B0604020202020204" pitchFamily="34" charset="0"/>
-              </a:rPr>
-              <a:t>.</a:t>
-            </a:r>
-            <a:r>
-              <a:rPr kumimoji="0" lang="ru-RU" altLang="ru-RU" sz="1800" b="0" i="0" u="none" strike="noStrike" cap="none" normalizeH="0" baseline="0" dirty="0">
-                <a:ln>
-                  <a:noFill/>
-                </a:ln>
-                <a:solidFill>
-                  <a:schemeClr val="tx1"/>
-                </a:solidFill>
-                <a:effectLst/>
-                <a:latin typeface="Arial" panose="020B0604020202020204" pitchFamily="34" charset="0"/>
-              </a:rPr>
-              <a:t> </a:t>
+              <a:t> А. </a:t>
             </a:r>
             <a:endParaRPr kumimoji="0" lang="en-GB" altLang="ru-RU" sz="1800" b="0" i="0" u="none" strike="noStrike" cap="none" normalizeH="0" baseline="0" dirty="0">
               <a:ln>
@@ -6706,24 +4283,24 @@
         </p:nvSpPr>
         <p:spPr>
           <a:xfrm>
-            <a:off x="4944232" y="184298"/>
+            <a:off x="4635795" y="376145"/>
             <a:ext cx="2303535" cy="411125"/>
           </a:xfrm>
         </p:spPr>
         <p:txBody>
           <a:bodyPr>
-            <a:normAutofit fontScale="90000"/>
+            <a:noAutofit/>
           </a:bodyPr>
           <a:lstStyle/>
           <a:p>
             <a:r>
-              <a:rPr lang="ru-RU" sz="3200" b="1" dirty="0">
+              <a:rPr lang="ru-RU" sz="3100" b="1" dirty="0">
                 <a:effectLst/>
                 <a:latin typeface="Times New Roman" panose="02020603050405020304" pitchFamily="18" charset="0"/>
               </a:rPr>
               <a:t>Задание 4</a:t>
             </a:r>
-            <a:endParaRPr lang="ru-RU" dirty="0"/>
+            <a:endParaRPr lang="ru-RU" sz="3100" dirty="0"/>
           </a:p>
         </p:txBody>
       </p:sp>
@@ -6763,7 +4340,7 @@
                 <a:effectLst/>
                 <a:latin typeface="Times New Roman, serif"/>
               </a:rPr>
-              <a:t>3) K3,5 (Полный двудольный граф):</a:t>
+              <a:t>3) K5,5 (Полный двудольный граф):</a:t>
             </a:r>
             <a:endParaRPr lang="ru-RU" sz="3200" dirty="0">
               <a:effectLst/>
@@ -6774,12 +4351,58 @@
           </a:p>
         </p:txBody>
       </p:sp>
+      <p:sp>
+        <p:nvSpPr>
+          <p:cNvPr id="7" name="TextBox 6">
+            <a:extLst>
+              <a:ext uri="{FF2B5EF4-FFF2-40B4-BE49-F238E27FC236}">
+                <a16:creationId xmlns:a16="http://schemas.microsoft.com/office/drawing/2014/main" id="{0123C849-C0C9-4CA7-B461-025BA8FBCC39}"/>
+              </a:ext>
+            </a:extLst>
+          </p:cNvPr>
+          <p:cNvSpPr txBox="1"/>
+          <p:nvPr/>
+        </p:nvSpPr>
+        <p:spPr>
+          <a:xfrm>
+            <a:off x="6831418" y="1302487"/>
+            <a:ext cx="6092456" cy="533864"/>
+          </a:xfrm>
+          <a:prstGeom prst="rect">
+            <a:avLst/>
+          </a:prstGeom>
+          <a:noFill/>
+        </p:spPr>
+        <p:txBody>
+          <a:bodyPr wrap="square">
+            <a:spAutoFit/>
+          </a:bodyPr>
+          <a:lstStyle/>
+          <a:p>
+            <a:pPr algn="l" rtl="0">
+              <a:lnSpc>
+                <a:spcPct val="108000"/>
+              </a:lnSpc>
+            </a:pPr>
+            <a:r>
+              <a:rPr lang="ru-RU" sz="2800" dirty="0">
+                <a:effectLst/>
+                <a:latin typeface="Times New Roman, serif"/>
+              </a:rPr>
+              <a:t>4) P20 (Путь):</a:t>
+            </a:r>
+            <a:endParaRPr lang="ru-RU" sz="2800" dirty="0">
+              <a:effectLst/>
+            </a:endParaRPr>
+          </a:p>
+        </p:txBody>
+      </p:sp>
       <p:pic>
         <p:nvPicPr>
-          <p:cNvPr id="5" name="Рисунок 4">
-            <a:extLst>
-              <a:ext uri="{FF2B5EF4-FFF2-40B4-BE49-F238E27FC236}">
-                <a16:creationId xmlns:a16="http://schemas.microsoft.com/office/drawing/2014/main" id="{B1A3F489-2D01-459F-B52F-8F5FD12C076A}"/>
+          <p:cNvPr id="4" name="Рисунок 3">
+            <a:extLst>
+              <a:ext uri="{FF2B5EF4-FFF2-40B4-BE49-F238E27FC236}">
+                <a16:creationId xmlns:a16="http://schemas.microsoft.com/office/drawing/2014/main" id="{2E5D61AE-BE7E-D88C-16DD-6EFAB23C1107}"/>
               </a:ext>
             </a:extLst>
           </p:cNvPr>
@@ -6796,66 +4419,20 @@
         </p:blipFill>
         <p:spPr>
           <a:xfrm>
-            <a:off x="850188" y="2362161"/>
-            <a:ext cx="3502674" cy="3198668"/>
+            <a:off x="721032" y="2637928"/>
+            <a:ext cx="3174283" cy="2922901"/>
           </a:xfrm>
           <a:prstGeom prst="rect">
             <a:avLst/>
           </a:prstGeom>
         </p:spPr>
       </p:pic>
-      <p:sp>
-        <p:nvSpPr>
-          <p:cNvPr id="7" name="TextBox 6">
-            <a:extLst>
-              <a:ext uri="{FF2B5EF4-FFF2-40B4-BE49-F238E27FC236}">
-                <a16:creationId xmlns:a16="http://schemas.microsoft.com/office/drawing/2014/main" id="{0123C849-C0C9-4CA7-B461-025BA8FBCC39}"/>
-              </a:ext>
-            </a:extLst>
-          </p:cNvPr>
-          <p:cNvSpPr txBox="1"/>
-          <p:nvPr/>
-        </p:nvSpPr>
-        <p:spPr>
-          <a:xfrm>
-            <a:off x="6831418" y="1302487"/>
-            <a:ext cx="6092456" cy="524631"/>
-          </a:xfrm>
-          <a:prstGeom prst="rect">
-            <a:avLst/>
-          </a:prstGeom>
-          <a:noFill/>
-        </p:spPr>
-        <p:txBody>
-          <a:bodyPr wrap="square">
-            <a:spAutoFit/>
-          </a:bodyPr>
-          <a:lstStyle/>
-          <a:p>
-            <a:pPr algn="l" rtl="0">
-              <a:lnSpc>
-                <a:spcPct val="108000"/>
-              </a:lnSpc>
-            </a:pPr>
-            <a:r>
-              <a:rPr lang="ru-RU" sz="2800" dirty="0">
-                <a:effectLst/>
-                <a:latin typeface="Times New Roman, serif"/>
-              </a:rPr>
-              <a:t>4) P7 (Путь):</a:t>
-            </a:r>
-            <a:endParaRPr lang="ru-RU" sz="2800" dirty="0">
-              <a:effectLst/>
-            </a:endParaRPr>
-          </a:p>
-        </p:txBody>
-      </p:sp>
       <p:pic>
         <p:nvPicPr>
-          <p:cNvPr id="9" name="Рисунок 8">
-            <a:extLst>
-              <a:ext uri="{FF2B5EF4-FFF2-40B4-BE49-F238E27FC236}">
-                <a16:creationId xmlns:a16="http://schemas.microsoft.com/office/drawing/2014/main" id="{ED13C701-AAB5-4214-AAEC-DCFA7D58B579}"/>
+          <p:cNvPr id="6" name="Рисунок 5">
+            <a:extLst>
+              <a:ext uri="{FF2B5EF4-FFF2-40B4-BE49-F238E27FC236}">
+                <a16:creationId xmlns:a16="http://schemas.microsoft.com/office/drawing/2014/main" id="{C68FA93D-47DF-62FE-D72A-F55D7CA81911}"/>
               </a:ext>
             </a:extLst>
           </p:cNvPr>
@@ -6872,8 +4449,8 @@
         </p:blipFill>
         <p:spPr>
           <a:xfrm>
-            <a:off x="6524875" y="2307355"/>
-            <a:ext cx="4131941" cy="3198669"/>
+            <a:off x="7247767" y="2551814"/>
+            <a:ext cx="3286125" cy="3067050"/>
           </a:xfrm>
           <a:prstGeom prst="rect">
             <a:avLst/>
@@ -6941,33 +4518,6 @@
                                   </p:childTnLst>
                                 </p:cTn>
                               </p:par>
-                              <p:par>
-                                <p:cTn id="7" presetID="1" presetClass="entr" presetSubtype="0" fill="hold" nodeType="withEffect">
-                                  <p:stCondLst>
-                                    <p:cond delay="0"/>
-                                  </p:stCondLst>
-                                  <p:childTnLst>
-                                    <p:set>
-                                      <p:cBhvr>
-                                        <p:cTn id="8" dur="1" fill="hold">
-                                          <p:stCondLst>
-                                            <p:cond delay="0"/>
-                                          </p:stCondLst>
-                                        </p:cTn>
-                                        <p:tgtEl>
-                                          <p:spTgt spid="5"/>
-                                        </p:tgtEl>
-                                        <p:attrNameLst>
-                                          <p:attrName>style.visibility</p:attrName>
-                                        </p:attrNameLst>
-                                      </p:cBhvr>
-                                      <p:to>
-                                        <p:strVal val="visible"/>
-                                      </p:to>
-                                    </p:set>
-                                  </p:childTnLst>
-                                </p:cTn>
-                              </p:par>
                             </p:childTnLst>
                           </p:cTn>
                         </p:par>
@@ -6975,59 +4525,32 @@
                     </p:cTn>
                   </p:par>
                   <p:par>
-                    <p:cTn id="9" fill="hold">
+                    <p:cTn id="7" fill="hold">
                       <p:stCondLst>
                         <p:cond delay="indefinite"/>
                       </p:stCondLst>
                       <p:childTnLst>
                         <p:par>
-                          <p:cTn id="10" fill="hold">
+                          <p:cTn id="8" fill="hold">
                             <p:stCondLst>
                               <p:cond delay="0"/>
                             </p:stCondLst>
                             <p:childTnLst>
                               <p:par>
-                                <p:cTn id="11" presetID="1" presetClass="entr" presetSubtype="0" fill="hold" grpId="0" nodeType="clickEffect">
+                                <p:cTn id="9" presetID="1" presetClass="entr" presetSubtype="0" fill="hold" grpId="0" nodeType="clickEffect">
                                   <p:stCondLst>
                                     <p:cond delay="0"/>
                                   </p:stCondLst>
                                   <p:childTnLst>
                                     <p:set>
                                       <p:cBhvr>
-                                        <p:cTn id="12" dur="1" fill="hold">
+                                        <p:cTn id="10" dur="1" fill="hold">
                                           <p:stCondLst>
                                             <p:cond delay="0"/>
                                           </p:stCondLst>
                                         </p:cTn>
                                         <p:tgtEl>
                                           <p:spTgt spid="7"/>
-                                        </p:tgtEl>
-                                        <p:attrNameLst>
-                                          <p:attrName>style.visibility</p:attrName>
-                                        </p:attrNameLst>
-                                      </p:cBhvr>
-                                      <p:to>
-                                        <p:strVal val="visible"/>
-                                      </p:to>
-                                    </p:set>
-                                  </p:childTnLst>
-                                </p:cTn>
-                              </p:par>
-                              <p:par>
-                                <p:cTn id="13" presetID="1" presetClass="entr" presetSubtype="0" fill="hold" nodeType="withEffect">
-                                  <p:stCondLst>
-                                    <p:cond delay="0"/>
-                                  </p:stCondLst>
-                                  <p:childTnLst>
-                                    <p:set>
-                                      <p:cBhvr>
-                                        <p:cTn id="14" dur="1" fill="hold">
-                                          <p:stCondLst>
-                                            <p:cond delay="0"/>
-                                          </p:stCondLst>
-                                        </p:cTn>
-                                        <p:tgtEl>
-                                          <p:spTgt spid="9"/>
                                         </p:tgtEl>
                                         <p:attrNameLst>
                                           <p:attrName>style.visibility</p:attrName>
@@ -7110,22 +4633,29 @@
         </p:nvSpPr>
         <p:spPr>
           <a:xfrm>
-            <a:off x="4869804" y="184298"/>
+            <a:off x="4159590" y="197125"/>
             <a:ext cx="2452392" cy="730102"/>
           </a:xfrm>
         </p:spPr>
         <p:txBody>
           <a:bodyPr>
-            <a:normAutofit fontScale="90000"/>
+            <a:normAutofit/>
           </a:bodyPr>
           <a:lstStyle/>
           <a:p>
+            <a:r>
+              <a:rPr lang="ru-RU" sz="3100" b="1" dirty="0">
+                <a:effectLst/>
+                <a:latin typeface="Times New Roman" panose="02020603050405020304" pitchFamily="18" charset="0"/>
+              </a:rPr>
+              <a:t>Задание</a:t>
+            </a:r>
             <a:r>
               <a:rPr lang="ru-RU" sz="3200" b="1" dirty="0">
                 <a:effectLst/>
                 <a:latin typeface="Times New Roman" panose="02020603050405020304" pitchFamily="18" charset="0"/>
               </a:rPr>
-              <a:t>Задание 4</a:t>
+              <a:t> 4</a:t>
             </a:r>
             <a:endParaRPr lang="ru-RU" dirty="0"/>
           </a:p>
@@ -7165,7 +4695,7 @@
                 <a:effectLst/>
                 <a:latin typeface="Times New Roman, serif"/>
               </a:rPr>
-              <a:t>5) C8 (Цикл):</a:t>
+              <a:t>5) C5 (Цикл):</a:t>
             </a:r>
             <a:endParaRPr lang="ru-RU" sz="3200" dirty="0">
               <a:effectLst/>
@@ -7176,12 +4706,58 @@
           </a:p>
         </p:txBody>
       </p:sp>
+      <p:sp>
+        <p:nvSpPr>
+          <p:cNvPr id="7" name="TextBox 6">
+            <a:extLst>
+              <a:ext uri="{FF2B5EF4-FFF2-40B4-BE49-F238E27FC236}">
+                <a16:creationId xmlns:a16="http://schemas.microsoft.com/office/drawing/2014/main" id="{F460E403-E186-4E60-9660-1CEFCDB8DD3A}"/>
+              </a:ext>
+            </a:extLst>
+          </p:cNvPr>
+          <p:cNvSpPr txBox="1"/>
+          <p:nvPr/>
+        </p:nvSpPr>
+        <p:spPr>
+          <a:xfrm>
+            <a:off x="5785421" y="946463"/>
+            <a:ext cx="5121534" cy="524631"/>
+          </a:xfrm>
+          <a:prstGeom prst="rect">
+            <a:avLst/>
+          </a:prstGeom>
+          <a:noFill/>
+        </p:spPr>
+        <p:txBody>
+          <a:bodyPr wrap="square">
+            <a:spAutoFit/>
+          </a:bodyPr>
+          <a:lstStyle/>
+          <a:p>
+            <a:pPr algn="l" rtl="0">
+              <a:lnSpc>
+                <a:spcPct val="108000"/>
+              </a:lnSpc>
+            </a:pPr>
+            <a:r>
+              <a:rPr lang="ru-RU" sz="2800" dirty="0">
+                <a:effectLst/>
+                <a:latin typeface="Times New Roman, serif"/>
+              </a:rPr>
+              <a:t>6) Q3 (3-мерный куб):</a:t>
+            </a:r>
+            <a:endParaRPr lang="ru-RU" sz="2800" dirty="0">
+              <a:effectLst/>
+            </a:endParaRPr>
+          </a:p>
+        </p:txBody>
+      </p:sp>
       <p:pic>
         <p:nvPicPr>
-          <p:cNvPr id="5" name="Рисунок 4">
-            <a:extLst>
-              <a:ext uri="{FF2B5EF4-FFF2-40B4-BE49-F238E27FC236}">
-                <a16:creationId xmlns:a16="http://schemas.microsoft.com/office/drawing/2014/main" id="{5AA7E8F0-70AC-4B3C-8826-E6ABDD695C7A}"/>
+          <p:cNvPr id="9" name="Рисунок 8">
+            <a:extLst>
+              <a:ext uri="{FF2B5EF4-FFF2-40B4-BE49-F238E27FC236}">
+                <a16:creationId xmlns:a16="http://schemas.microsoft.com/office/drawing/2014/main" id="{5416D7BB-0857-4F7F-AE19-B6F50313BC34}"/>
               </a:ext>
             </a:extLst>
           </p:cNvPr>
@@ -7198,66 +4774,20 @@
         </p:blipFill>
         <p:spPr>
           <a:xfrm>
-            <a:off x="418399" y="1855381"/>
-            <a:ext cx="3774795" cy="3571537"/>
+            <a:off x="6052957" y="1855381"/>
+            <a:ext cx="3891701" cy="3726264"/>
           </a:xfrm>
           <a:prstGeom prst="rect">
             <a:avLst/>
           </a:prstGeom>
         </p:spPr>
       </p:pic>
-      <p:sp>
-        <p:nvSpPr>
-          <p:cNvPr id="7" name="TextBox 6">
-            <a:extLst>
-              <a:ext uri="{FF2B5EF4-FFF2-40B4-BE49-F238E27FC236}">
-                <a16:creationId xmlns:a16="http://schemas.microsoft.com/office/drawing/2014/main" id="{F460E403-E186-4E60-9660-1CEFCDB8DD3A}"/>
-              </a:ext>
-            </a:extLst>
-          </p:cNvPr>
-          <p:cNvSpPr txBox="1"/>
-          <p:nvPr/>
-        </p:nvSpPr>
-        <p:spPr>
-          <a:xfrm>
-            <a:off x="5785421" y="946463"/>
-            <a:ext cx="5121534" cy="524631"/>
-          </a:xfrm>
-          <a:prstGeom prst="rect">
-            <a:avLst/>
-          </a:prstGeom>
-          <a:noFill/>
-        </p:spPr>
-        <p:txBody>
-          <a:bodyPr wrap="square">
-            <a:spAutoFit/>
-          </a:bodyPr>
-          <a:lstStyle/>
-          <a:p>
-            <a:pPr algn="l" rtl="0">
-              <a:lnSpc>
-                <a:spcPct val="108000"/>
-              </a:lnSpc>
-            </a:pPr>
-            <a:r>
-              <a:rPr lang="ru-RU" sz="2800" dirty="0">
-                <a:effectLst/>
-                <a:latin typeface="Times New Roman, serif"/>
-              </a:rPr>
-              <a:t>6) Q3 (3-мерный куб):</a:t>
-            </a:r>
-            <a:endParaRPr lang="ru-RU" sz="2800" dirty="0">
-              <a:effectLst/>
-            </a:endParaRPr>
-          </a:p>
-        </p:txBody>
-      </p:sp>
       <p:pic>
         <p:nvPicPr>
-          <p:cNvPr id="9" name="Рисунок 8">
-            <a:extLst>
-              <a:ext uri="{FF2B5EF4-FFF2-40B4-BE49-F238E27FC236}">
-                <a16:creationId xmlns:a16="http://schemas.microsoft.com/office/drawing/2014/main" id="{5416D7BB-0857-4F7F-AE19-B6F50313BC34}"/>
+          <p:cNvPr id="4" name="Рисунок 3">
+            <a:extLst>
+              <a:ext uri="{FF2B5EF4-FFF2-40B4-BE49-F238E27FC236}">
+                <a16:creationId xmlns:a16="http://schemas.microsoft.com/office/drawing/2014/main" id="{40D1C124-2B9A-F820-088B-A8C437800295}"/>
               </a:ext>
             </a:extLst>
           </p:cNvPr>
@@ -7274,8 +4804,8 @@
         </p:blipFill>
         <p:spPr>
           <a:xfrm>
-            <a:off x="6052957" y="1855381"/>
-            <a:ext cx="3891701" cy="3726264"/>
+            <a:off x="764299" y="2246900"/>
+            <a:ext cx="2966085" cy="2943225"/>
           </a:xfrm>
           <a:prstGeom prst="rect">
             <a:avLst/>
@@ -7343,33 +4873,6 @@
                                   </p:childTnLst>
                                 </p:cTn>
                               </p:par>
-                              <p:par>
-                                <p:cTn id="7" presetID="1" presetClass="entr" presetSubtype="0" fill="hold" nodeType="withEffect">
-                                  <p:stCondLst>
-                                    <p:cond delay="0"/>
-                                  </p:stCondLst>
-                                  <p:childTnLst>
-                                    <p:set>
-                                      <p:cBhvr>
-                                        <p:cTn id="8" dur="1" fill="hold">
-                                          <p:stCondLst>
-                                            <p:cond delay="0"/>
-                                          </p:stCondLst>
-                                        </p:cTn>
-                                        <p:tgtEl>
-                                          <p:spTgt spid="5"/>
-                                        </p:tgtEl>
-                                        <p:attrNameLst>
-                                          <p:attrName>style.visibility</p:attrName>
-                                        </p:attrNameLst>
-                                      </p:cBhvr>
-                                      <p:to>
-                                        <p:strVal val="visible"/>
-                                      </p:to>
-                                    </p:set>
-                                  </p:childTnLst>
-                                </p:cTn>
-                              </p:par>
                             </p:childTnLst>
                           </p:cTn>
                         </p:par>
@@ -7377,26 +4880,26 @@
                     </p:cTn>
                   </p:par>
                   <p:par>
-                    <p:cTn id="9" fill="hold">
+                    <p:cTn id="7" fill="hold">
                       <p:stCondLst>
                         <p:cond delay="indefinite"/>
                       </p:stCondLst>
                       <p:childTnLst>
                         <p:par>
-                          <p:cTn id="10" fill="hold">
+                          <p:cTn id="8" fill="hold">
                             <p:stCondLst>
                               <p:cond delay="0"/>
                             </p:stCondLst>
                             <p:childTnLst>
                               <p:par>
-                                <p:cTn id="11" presetID="1" presetClass="entr" presetSubtype="0" fill="hold" grpId="0" nodeType="clickEffect">
+                                <p:cTn id="9" presetID="1" presetClass="entr" presetSubtype="0" fill="hold" grpId="0" nodeType="clickEffect">
                                   <p:stCondLst>
                                     <p:cond delay="0"/>
                                   </p:stCondLst>
                                   <p:childTnLst>
                                     <p:set>
                                       <p:cBhvr>
-                                        <p:cTn id="12" dur="1" fill="hold">
+                                        <p:cTn id="10" dur="1" fill="hold">
                                           <p:stCondLst>
                                             <p:cond delay="0"/>
                                           </p:stCondLst>
@@ -7416,14 +4919,14 @@
                                 </p:cTn>
                               </p:par>
                               <p:par>
-                                <p:cTn id="13" presetID="1" presetClass="entr" presetSubtype="0" fill="hold" nodeType="withEffect">
+                                <p:cTn id="11" presetID="1" presetClass="entr" presetSubtype="0" fill="hold" nodeType="withEffect">
                                   <p:stCondLst>
                                     <p:cond delay="0"/>
                                   </p:stCondLst>
                                   <p:childTnLst>
                                     <p:set>
                                       <p:cBhvr>
-                                        <p:cTn id="14" dur="1" fill="hold">
+                                        <p:cTn id="12" dur="1" fill="hold">
                                           <p:stCondLst>
                                             <p:cond delay="0"/>
                                           </p:stCondLst>
@@ -7500,6 +5003,478 @@
             <a:extLst>
               <a:ext uri="{FF2B5EF4-FFF2-40B4-BE49-F238E27FC236}">
                 <a16:creationId xmlns:a16="http://schemas.microsoft.com/office/drawing/2014/main" id="{D075A763-3BDF-49FB-A8EC-55F275E1607A}"/>
+              </a:ext>
+            </a:extLst>
+          </p:cNvPr>
+          <p:cNvSpPr txBox="1">
+            <a:spLocks/>
+          </p:cNvSpPr>
+          <p:nvPr/>
+        </p:nvSpPr>
+        <p:spPr>
+          <a:xfrm>
+            <a:off x="3963108" y="193531"/>
+            <a:ext cx="2863819" cy="655710"/>
+          </a:xfrm>
+          <a:prstGeom prst="rect">
+            <a:avLst/>
+          </a:prstGeom>
+        </p:spPr>
+        <p:txBody>
+          <a:bodyPr vert="horz" lIns="91440" tIns="45720" rIns="91440" bIns="45720" rtlCol="0" anchor="ctr">
+            <a:noAutofit/>
+          </a:bodyPr>
+          <a:lstStyle>
+            <a:lvl1pPr algn="l" defTabSz="457200" rtl="0" eaLnBrk="1" latinLnBrk="0" hangingPunct="1">
+              <a:spcBef>
+                <a:spcPct val="0"/>
+              </a:spcBef>
+              <a:buNone/>
+              <a:defRPr sz="3200" kern="1200" cap="all">
+                <a:ln w="3175" cmpd="sng">
+                  <a:noFill/>
+                </a:ln>
+                <a:gradFill flip="none" rotWithShape="1">
+                  <a:gsLst>
+                    <a:gs pos="0">
+                      <a:schemeClr val="tx1"/>
+                    </a:gs>
+                    <a:gs pos="100000">
+                      <a:schemeClr val="tx1">
+                        <a:lumMod val="65000"/>
+                      </a:schemeClr>
+                    </a:gs>
+                  </a:gsLst>
+                  <a:lin ang="5580000" scaled="0"/>
+                  <a:tileRect/>
+                </a:gradFill>
+                <a:effectLst>
+                  <a:glow rad="38100">
+                    <a:schemeClr val="bg1">
+                      <a:lumMod val="65000"/>
+                      <a:lumOff val="35000"/>
+                      <a:alpha val="40000"/>
+                    </a:schemeClr>
+                  </a:glow>
+                  <a:outerShdw blurRad="28575" dist="38100" dir="14040000" algn="tl" rotWithShape="0">
+                    <a:srgbClr val="000000">
+                      <a:alpha val="25000"/>
+                    </a:srgbClr>
+                  </a:outerShdw>
+                </a:effectLst>
+                <a:latin typeface="+mj-lt"/>
+                <a:ea typeface="+mj-ea"/>
+                <a:cs typeface="+mj-cs"/>
+              </a:defRPr>
+            </a:lvl1pPr>
+            <a:lvl2pPr eaLnBrk="1" hangingPunct="1">
+              <a:defRPr>
+                <a:solidFill>
+                  <a:schemeClr val="tx2"/>
+                </a:solidFill>
+              </a:defRPr>
+            </a:lvl2pPr>
+            <a:lvl3pPr eaLnBrk="1" hangingPunct="1">
+              <a:defRPr>
+                <a:solidFill>
+                  <a:schemeClr val="tx2"/>
+                </a:solidFill>
+              </a:defRPr>
+            </a:lvl3pPr>
+            <a:lvl4pPr eaLnBrk="1" hangingPunct="1">
+              <a:defRPr>
+                <a:solidFill>
+                  <a:schemeClr val="tx2"/>
+                </a:solidFill>
+              </a:defRPr>
+            </a:lvl4pPr>
+            <a:lvl5pPr eaLnBrk="1" hangingPunct="1">
+              <a:defRPr>
+                <a:solidFill>
+                  <a:schemeClr val="tx2"/>
+                </a:solidFill>
+              </a:defRPr>
+            </a:lvl5pPr>
+            <a:lvl6pPr eaLnBrk="1" hangingPunct="1">
+              <a:defRPr>
+                <a:solidFill>
+                  <a:schemeClr val="tx2"/>
+                </a:solidFill>
+              </a:defRPr>
+            </a:lvl6pPr>
+            <a:lvl7pPr eaLnBrk="1" hangingPunct="1">
+              <a:defRPr>
+                <a:solidFill>
+                  <a:schemeClr val="tx2"/>
+                </a:solidFill>
+              </a:defRPr>
+            </a:lvl7pPr>
+            <a:lvl8pPr eaLnBrk="1" hangingPunct="1">
+              <a:defRPr>
+                <a:solidFill>
+                  <a:schemeClr val="tx2"/>
+                </a:solidFill>
+              </a:defRPr>
+            </a:lvl8pPr>
+            <a:lvl9pPr eaLnBrk="1" hangingPunct="1">
+              <a:defRPr>
+                <a:solidFill>
+                  <a:schemeClr val="tx2"/>
+                </a:solidFill>
+              </a:defRPr>
+            </a:lvl9pPr>
+          </a:lstStyle>
+          <a:p>
+            <a:r>
+              <a:rPr lang="ru-RU" sz="3100" b="1" dirty="0">
+                <a:effectLst/>
+                <a:latin typeface="Times New Roman" panose="02020603050405020304" pitchFamily="18" charset="0"/>
+              </a:rPr>
+              <a:t>Задание 4</a:t>
+            </a:r>
+            <a:endParaRPr lang="ru-RU" sz="3100" dirty="0"/>
+          </a:p>
+        </p:txBody>
+      </p:sp>
+      <p:sp>
+        <p:nvSpPr>
+          <p:cNvPr id="6" name="TextBox 5">
+            <a:extLst>
+              <a:ext uri="{FF2B5EF4-FFF2-40B4-BE49-F238E27FC236}">
+                <a16:creationId xmlns:a16="http://schemas.microsoft.com/office/drawing/2014/main" id="{99952821-3B73-402D-8434-C06D3A6F4063}"/>
+              </a:ext>
+            </a:extLst>
+          </p:cNvPr>
+          <p:cNvSpPr txBox="1"/>
+          <p:nvPr/>
+        </p:nvSpPr>
+        <p:spPr>
+          <a:xfrm>
+            <a:off x="345559" y="1186453"/>
+            <a:ext cx="6092456" cy="533864"/>
+          </a:xfrm>
+          <a:prstGeom prst="rect">
+            <a:avLst/>
+          </a:prstGeom>
+          <a:noFill/>
+        </p:spPr>
+        <p:txBody>
+          <a:bodyPr wrap="square">
+            <a:spAutoFit/>
+          </a:bodyPr>
+          <a:lstStyle/>
+          <a:p>
+            <a:pPr algn="l" rtl="0">
+              <a:lnSpc>
+                <a:spcPct val="108000"/>
+              </a:lnSpc>
+            </a:pPr>
+            <a:r>
+              <a:rPr lang="ru-RU" sz="2800" dirty="0">
+                <a:effectLst/>
+                <a:latin typeface="Times New Roman, serif"/>
+              </a:rPr>
+              <a:t>7) W5 (Колесо, 5 вершин):</a:t>
+            </a:r>
+            <a:endParaRPr lang="ru-RU" sz="2800" dirty="0">
+              <a:effectLst/>
+            </a:endParaRPr>
+          </a:p>
+        </p:txBody>
+      </p:sp>
+      <p:sp>
+        <p:nvSpPr>
+          <p:cNvPr id="10" name="TextBox 9">
+            <a:extLst>
+              <a:ext uri="{FF2B5EF4-FFF2-40B4-BE49-F238E27FC236}">
+                <a16:creationId xmlns:a16="http://schemas.microsoft.com/office/drawing/2014/main" id="{FA93DCA4-20F3-4ACC-94B8-3F900361BC59}"/>
+              </a:ext>
+            </a:extLst>
+          </p:cNvPr>
+          <p:cNvSpPr txBox="1"/>
+          <p:nvPr/>
+        </p:nvSpPr>
+        <p:spPr>
+          <a:xfrm>
+            <a:off x="5753985" y="1096619"/>
+            <a:ext cx="6092456" cy="524631"/>
+          </a:xfrm>
+          <a:prstGeom prst="rect">
+            <a:avLst/>
+          </a:prstGeom>
+          <a:noFill/>
+        </p:spPr>
+        <p:txBody>
+          <a:bodyPr wrap="square">
+            <a:spAutoFit/>
+          </a:bodyPr>
+          <a:lstStyle/>
+          <a:p>
+            <a:pPr algn="l" rtl="0">
+              <a:lnSpc>
+                <a:spcPct val="108000"/>
+              </a:lnSpc>
+            </a:pPr>
+            <a:r>
+              <a:rPr lang="ru-RU" sz="2800" dirty="0">
+                <a:effectLst/>
+                <a:latin typeface="Times New Roman, serif"/>
+              </a:rPr>
+              <a:t>8) Граф Петерсена:</a:t>
+            </a:r>
+            <a:endParaRPr lang="ru-RU" sz="2800" dirty="0">
+              <a:effectLst/>
+            </a:endParaRPr>
+          </a:p>
+        </p:txBody>
+      </p:sp>
+      <p:pic>
+        <p:nvPicPr>
+          <p:cNvPr id="12" name="Рисунок 11">
+            <a:extLst>
+              <a:ext uri="{FF2B5EF4-FFF2-40B4-BE49-F238E27FC236}">
+                <a16:creationId xmlns:a16="http://schemas.microsoft.com/office/drawing/2014/main" id="{54B1E5CF-1C43-4BE1-83C0-F5FAE4ACE2FA}"/>
+              </a:ext>
+            </a:extLst>
+          </p:cNvPr>
+          <p:cNvPicPr>
+            <a:picLocks noChangeAspect="1"/>
+          </p:cNvPicPr>
+          <p:nvPr/>
+        </p:nvPicPr>
+        <p:blipFill>
+          <a:blip r:embed="rId2"/>
+          <a:stretch>
+            <a:fillRect/>
+          </a:stretch>
+        </p:blipFill>
+        <p:spPr>
+          <a:xfrm>
+            <a:off x="5753985" y="1967695"/>
+            <a:ext cx="4176926" cy="3960463"/>
+          </a:xfrm>
+          <a:prstGeom prst="rect">
+            <a:avLst/>
+          </a:prstGeom>
+        </p:spPr>
+      </p:pic>
+      <p:pic>
+        <p:nvPicPr>
+          <p:cNvPr id="2" name="Рисунок 1">
+            <a:extLst>
+              <a:ext uri="{FF2B5EF4-FFF2-40B4-BE49-F238E27FC236}">
+                <a16:creationId xmlns:a16="http://schemas.microsoft.com/office/drawing/2014/main" id="{82044034-ED57-250E-A905-44C033B0D216}"/>
+              </a:ext>
+            </a:extLst>
+          </p:cNvPr>
+          <p:cNvPicPr>
+            <a:picLocks noChangeAspect="1"/>
+          </p:cNvPicPr>
+          <p:nvPr/>
+        </p:nvPicPr>
+        <p:blipFill>
+          <a:blip r:embed="rId3"/>
+          <a:stretch>
+            <a:fillRect/>
+          </a:stretch>
+        </p:blipFill>
+        <p:spPr>
+          <a:xfrm>
+            <a:off x="681843" y="2442975"/>
+            <a:ext cx="3510411" cy="3345265"/>
+          </a:xfrm>
+          <a:prstGeom prst="rect">
+            <a:avLst/>
+          </a:prstGeom>
+        </p:spPr>
+      </p:pic>
+    </p:spTree>
+    <p:extLst>
+      <p:ext uri="{BB962C8B-B14F-4D97-AF65-F5344CB8AC3E}">
+        <p14:creationId xmlns:p14="http://schemas.microsoft.com/office/powerpoint/2010/main" val="1959165581"/>
+      </p:ext>
+    </p:extLst>
+  </p:cSld>
+  <p:clrMapOvr>
+    <a:masterClrMapping/>
+  </p:clrMapOvr>
+  <p:timing>
+    <p:tnLst>
+      <p:par>
+        <p:cTn id="1" dur="indefinite" restart="never" nodeType="tmRoot">
+          <p:childTnLst>
+            <p:seq concurrent="1" nextAc="seek">
+              <p:cTn id="2" dur="indefinite" nodeType="mainSeq">
+                <p:childTnLst>
+                  <p:par>
+                    <p:cTn id="3" fill="hold">
+                      <p:stCondLst>
+                        <p:cond delay="indefinite"/>
+                      </p:stCondLst>
+                      <p:childTnLst>
+                        <p:par>
+                          <p:cTn id="4" fill="hold">
+                            <p:stCondLst>
+                              <p:cond delay="0"/>
+                            </p:stCondLst>
+                            <p:childTnLst>
+                              <p:par>
+                                <p:cTn id="5" presetID="1" presetClass="entr" presetSubtype="0" fill="hold" grpId="0" nodeType="clickEffect">
+                                  <p:stCondLst>
+                                    <p:cond delay="0"/>
+                                  </p:stCondLst>
+                                  <p:childTnLst>
+                                    <p:set>
+                                      <p:cBhvr>
+                                        <p:cTn id="6" dur="1" fill="hold">
+                                          <p:stCondLst>
+                                            <p:cond delay="0"/>
+                                          </p:stCondLst>
+                                        </p:cTn>
+                                        <p:tgtEl>
+                                          <p:spTgt spid="6"/>
+                                        </p:tgtEl>
+                                        <p:attrNameLst>
+                                          <p:attrName>style.visibility</p:attrName>
+                                        </p:attrNameLst>
+                                      </p:cBhvr>
+                                      <p:to>
+                                        <p:strVal val="visible"/>
+                                      </p:to>
+                                    </p:set>
+                                  </p:childTnLst>
+                                </p:cTn>
+                              </p:par>
+                            </p:childTnLst>
+                          </p:cTn>
+                        </p:par>
+                      </p:childTnLst>
+                    </p:cTn>
+                  </p:par>
+                  <p:par>
+                    <p:cTn id="7" fill="hold">
+                      <p:stCondLst>
+                        <p:cond delay="indefinite"/>
+                      </p:stCondLst>
+                      <p:childTnLst>
+                        <p:par>
+                          <p:cTn id="8" fill="hold">
+                            <p:stCondLst>
+                              <p:cond delay="0"/>
+                            </p:stCondLst>
+                            <p:childTnLst>
+                              <p:par>
+                                <p:cTn id="9" presetID="1" presetClass="entr" presetSubtype="0" fill="hold" grpId="0" nodeType="clickEffect">
+                                  <p:stCondLst>
+                                    <p:cond delay="0"/>
+                                  </p:stCondLst>
+                                  <p:childTnLst>
+                                    <p:set>
+                                      <p:cBhvr>
+                                        <p:cTn id="10" dur="1" fill="hold">
+                                          <p:stCondLst>
+                                            <p:cond delay="0"/>
+                                          </p:stCondLst>
+                                        </p:cTn>
+                                        <p:tgtEl>
+                                          <p:spTgt spid="10"/>
+                                        </p:tgtEl>
+                                        <p:attrNameLst>
+                                          <p:attrName>style.visibility</p:attrName>
+                                        </p:attrNameLst>
+                                      </p:cBhvr>
+                                      <p:to>
+                                        <p:strVal val="visible"/>
+                                      </p:to>
+                                    </p:set>
+                                  </p:childTnLst>
+                                </p:cTn>
+                              </p:par>
+                              <p:par>
+                                <p:cTn id="11" presetID="1" presetClass="entr" presetSubtype="0" fill="hold" nodeType="withEffect">
+                                  <p:stCondLst>
+                                    <p:cond delay="0"/>
+                                  </p:stCondLst>
+                                  <p:childTnLst>
+                                    <p:set>
+                                      <p:cBhvr>
+                                        <p:cTn id="12" dur="1" fill="hold">
+                                          <p:stCondLst>
+                                            <p:cond delay="0"/>
+                                          </p:stCondLst>
+                                        </p:cTn>
+                                        <p:tgtEl>
+                                          <p:spTgt spid="12"/>
+                                        </p:tgtEl>
+                                        <p:attrNameLst>
+                                          <p:attrName>style.visibility</p:attrName>
+                                        </p:attrNameLst>
+                                      </p:cBhvr>
+                                      <p:to>
+                                        <p:strVal val="visible"/>
+                                      </p:to>
+                                    </p:set>
+                                  </p:childTnLst>
+                                </p:cTn>
+                              </p:par>
+                            </p:childTnLst>
+                          </p:cTn>
+                        </p:par>
+                      </p:childTnLst>
+                    </p:cTn>
+                  </p:par>
+                </p:childTnLst>
+              </p:cTn>
+              <p:prevCondLst>
+                <p:cond evt="onPrev" delay="0">
+                  <p:tgtEl>
+                    <p:sldTgt/>
+                  </p:tgtEl>
+                </p:cond>
+              </p:prevCondLst>
+              <p:nextCondLst>
+                <p:cond evt="onNext" delay="0">
+                  <p:tgtEl>
+                    <p:sldTgt/>
+                  </p:tgtEl>
+                </p:cond>
+              </p:nextCondLst>
+            </p:seq>
+          </p:childTnLst>
+        </p:cTn>
+      </p:par>
+    </p:tnLst>
+    <p:bldLst>
+      <p:bldP spid="6" grpId="0"/>
+      <p:bldP spid="10" grpId="0"/>
+    </p:bldLst>
+  </p:timing>
+</p:sld>
+</file>
+
+<file path=ppt/slides/slide13.xml><?xml version="1.0" encoding="utf-8"?>
+<p:sld xmlns:a="http://schemas.openxmlformats.org/drawingml/2006/main" xmlns:r="http://schemas.openxmlformats.org/officeDocument/2006/relationships" xmlns:p="http://schemas.openxmlformats.org/presentationml/2006/main">
+  <p:cSld>
+    <p:spTree>
+      <p:nvGrpSpPr>
+        <p:cNvPr id="1" name=""/>
+        <p:cNvGrpSpPr/>
+        <p:nvPr/>
+      </p:nvGrpSpPr>
+      <p:grpSpPr>
+        <a:xfrm>
+          <a:off x="0" y="0"/>
+          <a:ext cx="0" cy="0"/>
+          <a:chOff x="0" y="0"/>
+          <a:chExt cx="0" cy="0"/>
+        </a:xfrm>
+      </p:grpSpPr>
+      <p:sp>
+        <p:nvSpPr>
+          <p:cNvPr id="4" name="Заголовок 1">
+            <a:extLst>
+              <a:ext uri="{FF2B5EF4-FFF2-40B4-BE49-F238E27FC236}">
+                <a16:creationId xmlns:a16="http://schemas.microsoft.com/office/drawing/2014/main" id="{25AA0498-FE74-4BF9-83E1-DFA093910A4E}"/>
               </a:ext>
             </a:extLst>
           </p:cNvPr>
@@ -7623,11 +5598,11 @@
           </a:lstStyle>
           <a:p>
             <a:r>
-              <a:rPr lang="ru-RU" b="1">
+              <a:rPr lang="ru-RU" b="1" dirty="0">
                 <a:effectLst/>
                 <a:latin typeface="Times New Roman" panose="02020603050405020304" pitchFamily="18" charset="0"/>
               </a:rPr>
-              <a:t>Задание 4</a:t>
+              <a:t>Задание 5</a:t>
             </a:r>
             <a:endParaRPr lang="ru-RU" dirty="0"/>
           </a:p>
@@ -7635,10 +5610,10 @@
       </p:sp>
       <p:sp>
         <p:nvSpPr>
-          <p:cNvPr id="6" name="TextBox 5">
-            <a:extLst>
-              <a:ext uri="{FF2B5EF4-FFF2-40B4-BE49-F238E27FC236}">
-                <a16:creationId xmlns:a16="http://schemas.microsoft.com/office/drawing/2014/main" id="{99952821-3B73-402D-8434-C06D3A6F4063}"/>
+          <p:cNvPr id="7" name="TextBox 6">
+            <a:extLst>
+              <a:ext uri="{FF2B5EF4-FFF2-40B4-BE49-F238E27FC236}">
+                <a16:creationId xmlns:a16="http://schemas.microsoft.com/office/drawing/2014/main" id="{CC4A8F03-6165-447B-BC67-347EE50B9107}"/>
               </a:ext>
             </a:extLst>
           </p:cNvPr>
@@ -7647,8 +5622,8 @@
         </p:nvSpPr>
         <p:spPr>
           <a:xfrm>
-            <a:off x="345559" y="1186453"/>
-            <a:ext cx="6092456" cy="524631"/>
+            <a:off x="3544" y="977402"/>
+            <a:ext cx="6092456" cy="1042721"/>
           </a:xfrm>
           <a:prstGeom prst="rect">
             <a:avLst/>
@@ -7663,7 +5638,7 @@
           <a:p>
             <a:pPr algn="l" rtl="0">
               <a:lnSpc>
-                <a:spcPct val="108000"/>
+                <a:spcPct val="115000"/>
               </a:lnSpc>
             </a:pPr>
             <a:r>
@@ -7671,7 +5646,20 @@
                 <a:effectLst/>
                 <a:latin typeface="Times New Roman, serif"/>
               </a:rPr>
-              <a:t>7) W7 (Колесо, 7 вершин):</a:t>
+              <a:t>А) Случайный неориентированный граф (</a:t>
+            </a:r>
+            <a:r>
+              <a:rPr lang="ru-RU" sz="2800" dirty="0">
+                <a:latin typeface="Times New Roman, serif"/>
+              </a:rPr>
+              <a:t>5</a:t>
+            </a:r>
+            <a:r>
+              <a:rPr lang="ru-RU" sz="2800" dirty="0">
+                <a:effectLst/>
+                <a:latin typeface="Times New Roman, serif"/>
+              </a:rPr>
+              <a:t> вершин, p=0.5):</a:t>
             </a:r>
             <a:endParaRPr lang="ru-RU" sz="2800" dirty="0">
               <a:effectLst/>
@@ -7679,12 +5667,58 @@
           </a:p>
         </p:txBody>
       </p:sp>
+      <p:sp>
+        <p:nvSpPr>
+          <p:cNvPr id="11" name="TextBox 10">
+            <a:extLst>
+              <a:ext uri="{FF2B5EF4-FFF2-40B4-BE49-F238E27FC236}">
+                <a16:creationId xmlns:a16="http://schemas.microsoft.com/office/drawing/2014/main" id="{C0833C6B-1B2D-4B4D-9BAC-1ACB53BB808E}"/>
+              </a:ext>
+            </a:extLst>
+          </p:cNvPr>
+          <p:cNvSpPr txBox="1"/>
+          <p:nvPr/>
+        </p:nvSpPr>
+        <p:spPr>
+          <a:xfrm>
+            <a:off x="6035750" y="1030108"/>
+            <a:ext cx="6156250" cy="990015"/>
+          </a:xfrm>
+          <a:prstGeom prst="rect">
+            <a:avLst/>
+          </a:prstGeom>
+          <a:noFill/>
+        </p:spPr>
+        <p:txBody>
+          <a:bodyPr wrap="square">
+            <a:spAutoFit/>
+          </a:bodyPr>
+          <a:lstStyle/>
+          <a:p>
+            <a:pPr algn="l" rtl="0">
+              <a:lnSpc>
+                <a:spcPct val="108000"/>
+              </a:lnSpc>
+            </a:pPr>
+            <a:r>
+              <a:rPr lang="ru-RU" sz="2800" dirty="0">
+                <a:effectLst/>
+                <a:latin typeface="Times New Roman, serif"/>
+              </a:rPr>
+              <a:t>Б) Случайный орграф (7 вершин, p=0.6):</a:t>
+            </a:r>
+            <a:endParaRPr lang="ru-RU" sz="2800" dirty="0">
+              <a:effectLst/>
+            </a:endParaRPr>
+          </a:p>
+        </p:txBody>
+      </p:sp>
       <p:pic>
         <p:nvPicPr>
-          <p:cNvPr id="8" name="Рисунок 7">
-            <a:extLst>
-              <a:ext uri="{FF2B5EF4-FFF2-40B4-BE49-F238E27FC236}">
-                <a16:creationId xmlns:a16="http://schemas.microsoft.com/office/drawing/2014/main" id="{559E2B78-3249-4945-BA0A-A684CAB50690}"/>
+          <p:cNvPr id="2" name="Рисунок 1">
+            <a:extLst>
+              <a:ext uri="{FF2B5EF4-FFF2-40B4-BE49-F238E27FC236}">
+                <a16:creationId xmlns:a16="http://schemas.microsoft.com/office/drawing/2014/main" id="{C05EA9EE-84D9-B977-83CC-C59A515E599B}"/>
               </a:ext>
             </a:extLst>
           </p:cNvPr>
@@ -7701,66 +5735,20 @@
         </p:blipFill>
         <p:spPr>
           <a:xfrm>
-            <a:off x="595371" y="1983137"/>
-            <a:ext cx="3536414" cy="3960463"/>
+            <a:off x="683735" y="2549592"/>
+            <a:ext cx="3448050" cy="3227070"/>
           </a:xfrm>
           <a:prstGeom prst="rect">
             <a:avLst/>
           </a:prstGeom>
         </p:spPr>
       </p:pic>
-      <p:sp>
-        <p:nvSpPr>
-          <p:cNvPr id="10" name="TextBox 9">
-            <a:extLst>
-              <a:ext uri="{FF2B5EF4-FFF2-40B4-BE49-F238E27FC236}">
-                <a16:creationId xmlns:a16="http://schemas.microsoft.com/office/drawing/2014/main" id="{FA93DCA4-20F3-4ACC-94B8-3F900361BC59}"/>
-              </a:ext>
-            </a:extLst>
-          </p:cNvPr>
-          <p:cNvSpPr txBox="1"/>
-          <p:nvPr/>
-        </p:nvSpPr>
-        <p:spPr>
-          <a:xfrm>
-            <a:off x="5753985" y="1096619"/>
-            <a:ext cx="6092456" cy="524631"/>
-          </a:xfrm>
-          <a:prstGeom prst="rect">
-            <a:avLst/>
-          </a:prstGeom>
-          <a:noFill/>
-        </p:spPr>
-        <p:txBody>
-          <a:bodyPr wrap="square">
-            <a:spAutoFit/>
-          </a:bodyPr>
-          <a:lstStyle/>
-          <a:p>
-            <a:pPr algn="l" rtl="0">
-              <a:lnSpc>
-                <a:spcPct val="108000"/>
-              </a:lnSpc>
-            </a:pPr>
-            <a:r>
-              <a:rPr lang="ru-RU" sz="2800" dirty="0">
-                <a:effectLst/>
-                <a:latin typeface="Times New Roman, serif"/>
-              </a:rPr>
-              <a:t>8) Граф Петерсена:</a:t>
-            </a:r>
-            <a:endParaRPr lang="ru-RU" sz="2800" dirty="0">
-              <a:effectLst/>
-            </a:endParaRPr>
-          </a:p>
-        </p:txBody>
-      </p:sp>
       <p:pic>
         <p:nvPicPr>
-          <p:cNvPr id="12" name="Рисунок 11">
-            <a:extLst>
-              <a:ext uri="{FF2B5EF4-FFF2-40B4-BE49-F238E27FC236}">
-                <a16:creationId xmlns:a16="http://schemas.microsoft.com/office/drawing/2014/main" id="{54B1E5CF-1C43-4BE1-83C0-F5FAE4ACE2FA}"/>
+          <p:cNvPr id="3" name="Рисунок 2">
+            <a:extLst>
+              <a:ext uri="{FF2B5EF4-FFF2-40B4-BE49-F238E27FC236}">
+                <a16:creationId xmlns:a16="http://schemas.microsoft.com/office/drawing/2014/main" id="{DB2950DA-02F0-4147-D6BC-6B6A7A15F800}"/>
               </a:ext>
             </a:extLst>
           </p:cNvPr>
@@ -7777,8 +5765,8 @@
         </p:blipFill>
         <p:spPr>
           <a:xfrm>
-            <a:off x="5753985" y="1967695"/>
-            <a:ext cx="4176926" cy="3960463"/>
+            <a:off x="7167917" y="2672464"/>
+            <a:ext cx="3289300" cy="2981325"/>
           </a:xfrm>
           <a:prstGeom prst="rect">
             <a:avLst/>
@@ -7788,7 +5776,7 @@
     </p:spTree>
     <p:extLst>
       <p:ext uri="{BB962C8B-B14F-4D97-AF65-F5344CB8AC3E}">
-        <p14:creationId xmlns:p14="http://schemas.microsoft.com/office/powerpoint/2010/main" val="1959165581"/>
+        <p14:creationId xmlns:p14="http://schemas.microsoft.com/office/powerpoint/2010/main" val="1727694559"/>
       </p:ext>
     </p:extLst>
   </p:cSld>
@@ -7829,34 +5817,7 @@
                                           </p:stCondLst>
                                         </p:cTn>
                                         <p:tgtEl>
-                                          <p:spTgt spid="6"/>
-                                        </p:tgtEl>
-                                        <p:attrNameLst>
-                                          <p:attrName>style.visibility</p:attrName>
-                                        </p:attrNameLst>
-                                      </p:cBhvr>
-                                      <p:to>
-                                        <p:strVal val="visible"/>
-                                      </p:to>
-                                    </p:set>
-                                  </p:childTnLst>
-                                </p:cTn>
-                              </p:par>
-                              <p:par>
-                                <p:cTn id="7" presetID="1" presetClass="entr" presetSubtype="0" fill="hold" nodeType="withEffect">
-                                  <p:stCondLst>
-                                    <p:cond delay="0"/>
-                                  </p:stCondLst>
-                                  <p:childTnLst>
-                                    <p:set>
-                                      <p:cBhvr>
-                                        <p:cTn id="8" dur="1" fill="hold">
-                                          <p:stCondLst>
-                                            <p:cond delay="0"/>
-                                          </p:stCondLst>
-                                        </p:cTn>
-                                        <p:tgtEl>
-                                          <p:spTgt spid="8"/>
+                                          <p:spTgt spid="7"/>
                                         </p:tgtEl>
                                         <p:attrNameLst>
                                           <p:attrName>style.visibility</p:attrName>
@@ -7876,59 +5837,32 @@
                     </p:cTn>
                   </p:par>
                   <p:par>
-                    <p:cTn id="9" fill="hold">
+                    <p:cTn id="7" fill="hold">
                       <p:stCondLst>
                         <p:cond delay="indefinite"/>
                       </p:stCondLst>
                       <p:childTnLst>
                         <p:par>
-                          <p:cTn id="10" fill="hold">
+                          <p:cTn id="8" fill="hold">
                             <p:stCondLst>
                               <p:cond delay="0"/>
                             </p:stCondLst>
                             <p:childTnLst>
                               <p:par>
-                                <p:cTn id="11" presetID="1" presetClass="entr" presetSubtype="0" fill="hold" grpId="0" nodeType="clickEffect">
+                                <p:cTn id="9" presetID="1" presetClass="entr" presetSubtype="0" fill="hold" grpId="0" nodeType="clickEffect">
                                   <p:stCondLst>
                                     <p:cond delay="0"/>
                                   </p:stCondLst>
                                   <p:childTnLst>
                                     <p:set>
                                       <p:cBhvr>
-                                        <p:cTn id="12" dur="1" fill="hold">
+                                        <p:cTn id="10" dur="1" fill="hold">
                                           <p:stCondLst>
                                             <p:cond delay="0"/>
                                           </p:stCondLst>
                                         </p:cTn>
                                         <p:tgtEl>
-                                          <p:spTgt spid="10"/>
-                                        </p:tgtEl>
-                                        <p:attrNameLst>
-                                          <p:attrName>style.visibility</p:attrName>
-                                        </p:attrNameLst>
-                                      </p:cBhvr>
-                                      <p:to>
-                                        <p:strVal val="visible"/>
-                                      </p:to>
-                                    </p:set>
-                                  </p:childTnLst>
-                                </p:cTn>
-                              </p:par>
-                              <p:par>
-                                <p:cTn id="13" presetID="1" presetClass="entr" presetSubtype="0" fill="hold" nodeType="withEffect">
-                                  <p:stCondLst>
-                                    <p:cond delay="0"/>
-                                  </p:stCondLst>
-                                  <p:childTnLst>
-                                    <p:set>
-                                      <p:cBhvr>
-                                        <p:cTn id="14" dur="1" fill="hold">
-                                          <p:stCondLst>
-                                            <p:cond delay="0"/>
-                                          </p:stCondLst>
-                                        </p:cTn>
-                                        <p:tgtEl>
-                                          <p:spTgt spid="12"/>
+                                          <p:spTgt spid="11"/>
                                         </p:tgtEl>
                                         <p:attrNameLst>
                                           <p:attrName>style.visibility</p:attrName>
@@ -7969,14 +5903,14 @@
       </p:par>
     </p:tnLst>
     <p:bldLst>
-      <p:bldP spid="6" grpId="0"/>
-      <p:bldP spid="10" grpId="0"/>
+      <p:bldP spid="7" grpId="0"/>
+      <p:bldP spid="11" grpId="0"/>
     </p:bldLst>
   </p:timing>
 </p:sld>
 </file>
 
-<file path=ppt/slides/slide13.xml><?xml version="1.0" encoding="utf-8"?>
+<file path=ppt/slides/slide14.xml><?xml version="1.0" encoding="utf-8"?>
 <p:sld xmlns:a="http://schemas.openxmlformats.org/drawingml/2006/main" xmlns:r="http://schemas.openxmlformats.org/officeDocument/2006/relationships" xmlns:p="http://schemas.openxmlformats.org/presentationml/2006/main">
   <p:cSld>
     <p:spTree>
@@ -7995,10 +5929,10 @@
       </p:grpSpPr>
       <p:sp>
         <p:nvSpPr>
-          <p:cNvPr id="4" name="Заголовок 1">
-            <a:extLst>
-              <a:ext uri="{FF2B5EF4-FFF2-40B4-BE49-F238E27FC236}">
-                <a16:creationId xmlns:a16="http://schemas.microsoft.com/office/drawing/2014/main" id="{25AA0498-FE74-4BF9-83E1-DFA093910A4E}"/>
+          <p:cNvPr id="6" name="Заголовок 1">
+            <a:extLst>
+              <a:ext uri="{FF2B5EF4-FFF2-40B4-BE49-F238E27FC236}">
+                <a16:creationId xmlns:a16="http://schemas.microsoft.com/office/drawing/2014/main" id="{D75B38FA-A137-4B13-9022-5CD0474114DA}"/>
               </a:ext>
             </a:extLst>
           </p:cNvPr>
@@ -8126,7 +6060,7 @@
                 <a:effectLst/>
                 <a:latin typeface="Times New Roman" panose="02020603050405020304" pitchFamily="18" charset="0"/>
               </a:rPr>
-              <a:t>Задание 5</a:t>
+              <a:t>Задание 6</a:t>
             </a:r>
             <a:endParaRPr lang="ru-RU" dirty="0"/>
           </a:p>
@@ -8134,10 +6068,10 @@
       </p:sp>
       <p:sp>
         <p:nvSpPr>
-          <p:cNvPr id="7" name="TextBox 6">
-            <a:extLst>
-              <a:ext uri="{FF2B5EF4-FFF2-40B4-BE49-F238E27FC236}">
-                <a16:creationId xmlns:a16="http://schemas.microsoft.com/office/drawing/2014/main" id="{CC4A8F03-6165-447B-BC67-347EE50B9107}"/>
+          <p:cNvPr id="8" name="TextBox 7">
+            <a:extLst>
+              <a:ext uri="{FF2B5EF4-FFF2-40B4-BE49-F238E27FC236}">
+                <a16:creationId xmlns:a16="http://schemas.microsoft.com/office/drawing/2014/main" id="{3EAB05F1-006B-447C-9BAE-C98FE00CD114}"/>
               </a:ext>
             </a:extLst>
           </p:cNvPr>
@@ -8146,8 +6080,8 @@
         </p:nvSpPr>
         <p:spPr>
           <a:xfrm>
-            <a:off x="3544" y="977402"/>
-            <a:ext cx="6092456" cy="1042721"/>
+            <a:off x="1686146" y="994012"/>
+            <a:ext cx="8819707" cy="1466940"/>
           </a:xfrm>
           <a:prstGeom prst="rect">
             <a:avLst/>
@@ -8162,28 +6096,24 @@
           <a:p>
             <a:pPr algn="l" rtl="0">
               <a:lnSpc>
-                <a:spcPct val="115000"/>
+                <a:spcPct val="108000"/>
               </a:lnSpc>
             </a:pPr>
             <a:r>
               <a:rPr lang="ru-RU" sz="2800" dirty="0">
                 <a:effectLst/>
-                <a:latin typeface="Times New Roman, serif"/>
               </a:rPr>
-              <a:t>А) Случайный неориентированный граф (10 вершин, p=0.35):</a:t>
-            </a:r>
-            <a:endParaRPr lang="ru-RU" sz="2800" dirty="0">
-              <a:effectLst/>
-            </a:endParaRPr>
+              <a:t>Создаем случайный двудольный граф (доли 5+7, p=0.7). Множество вершин разбито на доли, которые окрашены в разные цвета (зеленый и красный):</a:t>
+            </a:r>
           </a:p>
         </p:txBody>
       </p:sp>
       <p:pic>
         <p:nvPicPr>
-          <p:cNvPr id="9" name="Рисунок 8">
-            <a:extLst>
-              <a:ext uri="{FF2B5EF4-FFF2-40B4-BE49-F238E27FC236}">
-                <a16:creationId xmlns:a16="http://schemas.microsoft.com/office/drawing/2014/main" id="{DAE9CD13-E8E0-4448-9EBF-7D96F97F28BD}"/>
+          <p:cNvPr id="2" name="Рисунок 1">
+            <a:extLst>
+              <a:ext uri="{FF2B5EF4-FFF2-40B4-BE49-F238E27FC236}">
+                <a16:creationId xmlns:a16="http://schemas.microsoft.com/office/drawing/2014/main" id="{5AAAF1F1-2E6E-65BC-54F7-F29F14B49EE5}"/>
               </a:ext>
             </a:extLst>
           </p:cNvPr>
@@ -8200,503 +6130,8 @@
         </p:blipFill>
         <p:spPr>
           <a:xfrm>
-            <a:off x="424226" y="2172959"/>
-            <a:ext cx="3913858" cy="4078015"/>
-          </a:xfrm>
-          <a:prstGeom prst="rect">
-            <a:avLst/>
-          </a:prstGeom>
-        </p:spPr>
-      </p:pic>
-      <p:sp>
-        <p:nvSpPr>
-          <p:cNvPr id="11" name="TextBox 10">
-            <a:extLst>
-              <a:ext uri="{FF2B5EF4-FFF2-40B4-BE49-F238E27FC236}">
-                <a16:creationId xmlns:a16="http://schemas.microsoft.com/office/drawing/2014/main" id="{C0833C6B-1B2D-4B4D-9BAC-1ACB53BB808E}"/>
-              </a:ext>
-            </a:extLst>
-          </p:cNvPr>
-          <p:cNvSpPr txBox="1"/>
-          <p:nvPr/>
-        </p:nvSpPr>
-        <p:spPr>
-          <a:xfrm>
-            <a:off x="6035750" y="1030108"/>
-            <a:ext cx="6156250" cy="990015"/>
-          </a:xfrm>
-          <a:prstGeom prst="rect">
-            <a:avLst/>
-          </a:prstGeom>
-          <a:noFill/>
-        </p:spPr>
-        <p:txBody>
-          <a:bodyPr wrap="square">
-            <a:spAutoFit/>
-          </a:bodyPr>
-          <a:lstStyle/>
-          <a:p>
-            <a:pPr algn="l" rtl="0">
-              <a:lnSpc>
-                <a:spcPct val="108000"/>
-              </a:lnSpc>
-            </a:pPr>
-            <a:r>
-              <a:rPr lang="ru-RU" sz="2800" dirty="0">
-                <a:effectLst/>
-                <a:latin typeface="Times New Roman, serif"/>
-              </a:rPr>
-              <a:t>Б) Случайный орграф (8 вершин, p=0.4):</a:t>
-            </a:r>
-            <a:endParaRPr lang="ru-RU" sz="2800" dirty="0">
-              <a:effectLst/>
-            </a:endParaRPr>
-          </a:p>
-        </p:txBody>
-      </p:sp>
-      <p:pic>
-        <p:nvPicPr>
-          <p:cNvPr id="13" name="Рисунок 12">
-            <a:extLst>
-              <a:ext uri="{FF2B5EF4-FFF2-40B4-BE49-F238E27FC236}">
-                <a16:creationId xmlns:a16="http://schemas.microsoft.com/office/drawing/2014/main" id="{D7ED8AC0-2BE1-4BC9-8214-94CC2D269050}"/>
-              </a:ext>
-            </a:extLst>
-          </p:cNvPr>
-          <p:cNvPicPr>
-            <a:picLocks noChangeAspect="1"/>
-          </p:cNvPicPr>
-          <p:nvPr/>
-        </p:nvPicPr>
-        <p:blipFill>
-          <a:blip r:embed="rId3"/>
-          <a:stretch>
-            <a:fillRect/>
-          </a:stretch>
-        </p:blipFill>
-        <p:spPr>
-          <a:xfrm>
-            <a:off x="6404363" y="2172959"/>
-            <a:ext cx="3913859" cy="3980337"/>
-          </a:xfrm>
-          <a:prstGeom prst="rect">
-            <a:avLst/>
-          </a:prstGeom>
-        </p:spPr>
-      </p:pic>
-    </p:spTree>
-    <p:extLst>
-      <p:ext uri="{BB962C8B-B14F-4D97-AF65-F5344CB8AC3E}">
-        <p14:creationId xmlns:p14="http://schemas.microsoft.com/office/powerpoint/2010/main" val="1727694559"/>
-      </p:ext>
-    </p:extLst>
-  </p:cSld>
-  <p:clrMapOvr>
-    <a:masterClrMapping/>
-  </p:clrMapOvr>
-  <p:timing>
-    <p:tnLst>
-      <p:par>
-        <p:cTn id="1" dur="indefinite" restart="never" nodeType="tmRoot">
-          <p:childTnLst>
-            <p:seq concurrent="1" nextAc="seek">
-              <p:cTn id="2" dur="indefinite" nodeType="mainSeq">
-                <p:childTnLst>
-                  <p:par>
-                    <p:cTn id="3" fill="hold">
-                      <p:stCondLst>
-                        <p:cond delay="indefinite"/>
-                      </p:stCondLst>
-                      <p:childTnLst>
-                        <p:par>
-                          <p:cTn id="4" fill="hold">
-                            <p:stCondLst>
-                              <p:cond delay="0"/>
-                            </p:stCondLst>
-                            <p:childTnLst>
-                              <p:par>
-                                <p:cTn id="5" presetID="1" presetClass="entr" presetSubtype="0" fill="hold" grpId="0" nodeType="clickEffect">
-                                  <p:stCondLst>
-                                    <p:cond delay="0"/>
-                                  </p:stCondLst>
-                                  <p:childTnLst>
-                                    <p:set>
-                                      <p:cBhvr>
-                                        <p:cTn id="6" dur="1" fill="hold">
-                                          <p:stCondLst>
-                                            <p:cond delay="0"/>
-                                          </p:stCondLst>
-                                        </p:cTn>
-                                        <p:tgtEl>
-                                          <p:spTgt spid="7"/>
-                                        </p:tgtEl>
-                                        <p:attrNameLst>
-                                          <p:attrName>style.visibility</p:attrName>
-                                        </p:attrNameLst>
-                                      </p:cBhvr>
-                                      <p:to>
-                                        <p:strVal val="visible"/>
-                                      </p:to>
-                                    </p:set>
-                                  </p:childTnLst>
-                                </p:cTn>
-                              </p:par>
-                              <p:par>
-                                <p:cTn id="7" presetID="1" presetClass="entr" presetSubtype="0" fill="hold" nodeType="withEffect">
-                                  <p:stCondLst>
-                                    <p:cond delay="0"/>
-                                  </p:stCondLst>
-                                  <p:childTnLst>
-                                    <p:set>
-                                      <p:cBhvr>
-                                        <p:cTn id="8" dur="1" fill="hold">
-                                          <p:stCondLst>
-                                            <p:cond delay="0"/>
-                                          </p:stCondLst>
-                                        </p:cTn>
-                                        <p:tgtEl>
-                                          <p:spTgt spid="9"/>
-                                        </p:tgtEl>
-                                        <p:attrNameLst>
-                                          <p:attrName>style.visibility</p:attrName>
-                                        </p:attrNameLst>
-                                      </p:cBhvr>
-                                      <p:to>
-                                        <p:strVal val="visible"/>
-                                      </p:to>
-                                    </p:set>
-                                  </p:childTnLst>
-                                </p:cTn>
-                              </p:par>
-                            </p:childTnLst>
-                          </p:cTn>
-                        </p:par>
-                      </p:childTnLst>
-                    </p:cTn>
-                  </p:par>
-                  <p:par>
-                    <p:cTn id="9" fill="hold">
-                      <p:stCondLst>
-                        <p:cond delay="indefinite"/>
-                      </p:stCondLst>
-                      <p:childTnLst>
-                        <p:par>
-                          <p:cTn id="10" fill="hold">
-                            <p:stCondLst>
-                              <p:cond delay="0"/>
-                            </p:stCondLst>
-                            <p:childTnLst>
-                              <p:par>
-                                <p:cTn id="11" presetID="1" presetClass="entr" presetSubtype="0" fill="hold" grpId="0" nodeType="clickEffect">
-                                  <p:stCondLst>
-                                    <p:cond delay="0"/>
-                                  </p:stCondLst>
-                                  <p:childTnLst>
-                                    <p:set>
-                                      <p:cBhvr>
-                                        <p:cTn id="12" dur="1" fill="hold">
-                                          <p:stCondLst>
-                                            <p:cond delay="0"/>
-                                          </p:stCondLst>
-                                        </p:cTn>
-                                        <p:tgtEl>
-                                          <p:spTgt spid="11"/>
-                                        </p:tgtEl>
-                                        <p:attrNameLst>
-                                          <p:attrName>style.visibility</p:attrName>
-                                        </p:attrNameLst>
-                                      </p:cBhvr>
-                                      <p:to>
-                                        <p:strVal val="visible"/>
-                                      </p:to>
-                                    </p:set>
-                                  </p:childTnLst>
-                                </p:cTn>
-                              </p:par>
-                              <p:par>
-                                <p:cTn id="13" presetID="1" presetClass="entr" presetSubtype="0" fill="hold" nodeType="withEffect">
-                                  <p:stCondLst>
-                                    <p:cond delay="0"/>
-                                  </p:stCondLst>
-                                  <p:childTnLst>
-                                    <p:set>
-                                      <p:cBhvr>
-                                        <p:cTn id="14" dur="1" fill="hold">
-                                          <p:stCondLst>
-                                            <p:cond delay="0"/>
-                                          </p:stCondLst>
-                                        </p:cTn>
-                                        <p:tgtEl>
-                                          <p:spTgt spid="13"/>
-                                        </p:tgtEl>
-                                        <p:attrNameLst>
-                                          <p:attrName>style.visibility</p:attrName>
-                                        </p:attrNameLst>
-                                      </p:cBhvr>
-                                      <p:to>
-                                        <p:strVal val="visible"/>
-                                      </p:to>
-                                    </p:set>
-                                  </p:childTnLst>
-                                </p:cTn>
-                              </p:par>
-                            </p:childTnLst>
-                          </p:cTn>
-                        </p:par>
-                      </p:childTnLst>
-                    </p:cTn>
-                  </p:par>
-                </p:childTnLst>
-              </p:cTn>
-              <p:prevCondLst>
-                <p:cond evt="onPrev" delay="0">
-                  <p:tgtEl>
-                    <p:sldTgt/>
-                  </p:tgtEl>
-                </p:cond>
-              </p:prevCondLst>
-              <p:nextCondLst>
-                <p:cond evt="onNext" delay="0">
-                  <p:tgtEl>
-                    <p:sldTgt/>
-                  </p:tgtEl>
-                </p:cond>
-              </p:nextCondLst>
-            </p:seq>
-          </p:childTnLst>
-        </p:cTn>
-      </p:par>
-    </p:tnLst>
-    <p:bldLst>
-      <p:bldP spid="7" grpId="0"/>
-      <p:bldP spid="11" grpId="0"/>
-    </p:bldLst>
-  </p:timing>
-</p:sld>
-</file>
-
-<file path=ppt/slides/slide14.xml><?xml version="1.0" encoding="utf-8"?>
-<p:sld xmlns:a="http://schemas.openxmlformats.org/drawingml/2006/main" xmlns:r="http://schemas.openxmlformats.org/officeDocument/2006/relationships" xmlns:p="http://schemas.openxmlformats.org/presentationml/2006/main">
-  <p:cSld>
-    <p:spTree>
-      <p:nvGrpSpPr>
-        <p:cNvPr id="1" name=""/>
-        <p:cNvGrpSpPr/>
-        <p:nvPr/>
-      </p:nvGrpSpPr>
-      <p:grpSpPr>
-        <a:xfrm>
-          <a:off x="0" y="0"/>
-          <a:ext cx="0" cy="0"/>
-          <a:chOff x="0" y="0"/>
-          <a:chExt cx="0" cy="0"/>
-        </a:xfrm>
-      </p:grpSpPr>
-      <p:sp>
-        <p:nvSpPr>
-          <p:cNvPr id="6" name="Заголовок 1">
-            <a:extLst>
-              <a:ext uri="{FF2B5EF4-FFF2-40B4-BE49-F238E27FC236}">
-                <a16:creationId xmlns:a16="http://schemas.microsoft.com/office/drawing/2014/main" id="{D75B38FA-A137-4B13-9022-5CD0474114DA}"/>
-              </a:ext>
-            </a:extLst>
-          </p:cNvPr>
-          <p:cNvSpPr txBox="1">
-            <a:spLocks/>
-          </p:cNvSpPr>
-          <p:nvPr/>
-        </p:nvSpPr>
-        <p:spPr>
-          <a:xfrm>
-            <a:off x="4131785" y="94464"/>
-            <a:ext cx="2452392" cy="730102"/>
-          </a:xfrm>
-          <a:prstGeom prst="rect">
-            <a:avLst/>
-          </a:prstGeom>
-        </p:spPr>
-        <p:txBody>
-          <a:bodyPr vert="horz" lIns="91440" tIns="45720" rIns="91440" bIns="45720" rtlCol="0" anchor="ctr">
-            <a:normAutofit fontScale="97500"/>
-          </a:bodyPr>
-          <a:lstStyle>
-            <a:lvl1pPr algn="l" defTabSz="457200" rtl="0" eaLnBrk="1" latinLnBrk="0" hangingPunct="1">
-              <a:spcBef>
-                <a:spcPct val="0"/>
-              </a:spcBef>
-              <a:buNone/>
-              <a:defRPr sz="3200" kern="1200" cap="all">
-                <a:ln w="3175" cmpd="sng">
-                  <a:noFill/>
-                </a:ln>
-                <a:gradFill flip="none" rotWithShape="1">
-                  <a:gsLst>
-                    <a:gs pos="0">
-                      <a:schemeClr val="tx1"/>
-                    </a:gs>
-                    <a:gs pos="100000">
-                      <a:schemeClr val="tx1">
-                        <a:lumMod val="65000"/>
-                      </a:schemeClr>
-                    </a:gs>
-                  </a:gsLst>
-                  <a:lin ang="5580000" scaled="0"/>
-                  <a:tileRect/>
-                </a:gradFill>
-                <a:effectLst>
-                  <a:glow rad="38100">
-                    <a:schemeClr val="bg1">
-                      <a:lumMod val="65000"/>
-                      <a:lumOff val="35000"/>
-                      <a:alpha val="40000"/>
-                    </a:schemeClr>
-                  </a:glow>
-                  <a:outerShdw blurRad="28575" dist="38100" dir="14040000" algn="tl" rotWithShape="0">
-                    <a:srgbClr val="000000">
-                      <a:alpha val="25000"/>
-                    </a:srgbClr>
-                  </a:outerShdw>
-                </a:effectLst>
-                <a:latin typeface="+mj-lt"/>
-                <a:ea typeface="+mj-ea"/>
-                <a:cs typeface="+mj-cs"/>
-              </a:defRPr>
-            </a:lvl1pPr>
-            <a:lvl2pPr eaLnBrk="1" hangingPunct="1">
-              <a:defRPr>
-                <a:solidFill>
-                  <a:schemeClr val="tx2"/>
-                </a:solidFill>
-              </a:defRPr>
-            </a:lvl2pPr>
-            <a:lvl3pPr eaLnBrk="1" hangingPunct="1">
-              <a:defRPr>
-                <a:solidFill>
-                  <a:schemeClr val="tx2"/>
-                </a:solidFill>
-              </a:defRPr>
-            </a:lvl3pPr>
-            <a:lvl4pPr eaLnBrk="1" hangingPunct="1">
-              <a:defRPr>
-                <a:solidFill>
-                  <a:schemeClr val="tx2"/>
-                </a:solidFill>
-              </a:defRPr>
-            </a:lvl4pPr>
-            <a:lvl5pPr eaLnBrk="1" hangingPunct="1">
-              <a:defRPr>
-                <a:solidFill>
-                  <a:schemeClr val="tx2"/>
-                </a:solidFill>
-              </a:defRPr>
-            </a:lvl5pPr>
-            <a:lvl6pPr eaLnBrk="1" hangingPunct="1">
-              <a:defRPr>
-                <a:solidFill>
-                  <a:schemeClr val="tx2"/>
-                </a:solidFill>
-              </a:defRPr>
-            </a:lvl6pPr>
-            <a:lvl7pPr eaLnBrk="1" hangingPunct="1">
-              <a:defRPr>
-                <a:solidFill>
-                  <a:schemeClr val="tx2"/>
-                </a:solidFill>
-              </a:defRPr>
-            </a:lvl7pPr>
-            <a:lvl8pPr eaLnBrk="1" hangingPunct="1">
-              <a:defRPr>
-                <a:solidFill>
-                  <a:schemeClr val="tx2"/>
-                </a:solidFill>
-              </a:defRPr>
-            </a:lvl8pPr>
-            <a:lvl9pPr eaLnBrk="1" hangingPunct="1">
-              <a:defRPr>
-                <a:solidFill>
-                  <a:schemeClr val="tx2"/>
-                </a:solidFill>
-              </a:defRPr>
-            </a:lvl9pPr>
-          </a:lstStyle>
-          <a:p>
-            <a:r>
-              <a:rPr lang="ru-RU" b="1" dirty="0">
-                <a:effectLst/>
-                <a:latin typeface="Times New Roman" panose="02020603050405020304" pitchFamily="18" charset="0"/>
-              </a:rPr>
-              <a:t>Задание 6</a:t>
-            </a:r>
-            <a:endParaRPr lang="ru-RU" dirty="0"/>
-          </a:p>
-        </p:txBody>
-      </p:sp>
-      <p:sp>
-        <p:nvSpPr>
-          <p:cNvPr id="8" name="TextBox 7">
-            <a:extLst>
-              <a:ext uri="{FF2B5EF4-FFF2-40B4-BE49-F238E27FC236}">
-                <a16:creationId xmlns:a16="http://schemas.microsoft.com/office/drawing/2014/main" id="{3EAB05F1-006B-447C-9BAE-C98FE00CD114}"/>
-              </a:ext>
-            </a:extLst>
-          </p:cNvPr>
-          <p:cNvSpPr txBox="1"/>
-          <p:nvPr/>
-        </p:nvSpPr>
-        <p:spPr>
-          <a:xfrm>
-            <a:off x="1686146" y="994012"/>
-            <a:ext cx="8819707" cy="1917192"/>
-          </a:xfrm>
-          <a:prstGeom prst="rect">
-            <a:avLst/>
-          </a:prstGeom>
-          <a:noFill/>
-        </p:spPr>
-        <p:txBody>
-          <a:bodyPr wrap="square">
-            <a:spAutoFit/>
-          </a:bodyPr>
-          <a:lstStyle/>
-          <a:p>
-            <a:pPr algn="l" rtl="0">
-              <a:lnSpc>
-                <a:spcPct val="108000"/>
-              </a:lnSpc>
-            </a:pPr>
-            <a:r>
-              <a:rPr lang="ru-RU" sz="2800" dirty="0">
-                <a:effectLst/>
-              </a:rPr>
-              <a:t>Создаем случайный двудольный граф (доли 6+4, p=0.6). Множество вершин разбито на доли, которые окрашены в разные цвета (зеленый и красный):</a:t>
-            </a:r>
-          </a:p>
-        </p:txBody>
-      </p:sp>
-      <p:pic>
-        <p:nvPicPr>
-          <p:cNvPr id="10" name="Рисунок 9">
-            <a:extLst>
-              <a:ext uri="{FF2B5EF4-FFF2-40B4-BE49-F238E27FC236}">
-                <a16:creationId xmlns:a16="http://schemas.microsoft.com/office/drawing/2014/main" id="{CF68FF22-94EE-48B2-B423-05A75308DA87}"/>
-              </a:ext>
-            </a:extLst>
-          </p:cNvPr>
-          <p:cNvPicPr>
-            <a:picLocks noChangeAspect="1"/>
-          </p:cNvPicPr>
-          <p:nvPr/>
-        </p:nvPicPr>
-        <p:blipFill>
-          <a:blip r:embed="rId2"/>
-          <a:stretch>
-            <a:fillRect/>
-          </a:stretch>
-        </p:blipFill>
-        <p:spPr>
-          <a:xfrm>
-            <a:off x="2221700" y="3080650"/>
-            <a:ext cx="7198747" cy="3341415"/>
+            <a:off x="2504012" y="2630398"/>
+            <a:ext cx="6362178" cy="3564578"/>
           </a:xfrm>
           <a:prstGeom prst="rect">
             <a:avLst/>
@@ -8748,51 +6183,6 @@
                                         </p:cTn>
                                         <p:tgtEl>
                                           <p:spTgt spid="8"/>
-                                        </p:tgtEl>
-                                        <p:attrNameLst>
-                                          <p:attrName>style.visibility</p:attrName>
-                                        </p:attrNameLst>
-                                      </p:cBhvr>
-                                      <p:to>
-                                        <p:strVal val="visible"/>
-                                      </p:to>
-                                    </p:set>
-                                  </p:childTnLst>
-                                </p:cTn>
-                              </p:par>
-                            </p:childTnLst>
-                          </p:cTn>
-                        </p:par>
-                      </p:childTnLst>
-                    </p:cTn>
-                  </p:par>
-                  <p:par>
-                    <p:cTn id="7" fill="hold">
-                      <p:stCondLst>
-                        <p:cond delay="indefinite"/>
-                      </p:stCondLst>
-                      <p:childTnLst>
-                        <p:par>
-                          <p:cTn id="8" fill="hold">
-                            <p:stCondLst>
-                              <p:cond delay="0"/>
-                            </p:stCondLst>
-                            <p:childTnLst>
-                              <p:par>
-                                <p:cTn id="9" presetID="1" presetClass="entr" presetSubtype="0" fill="hold" nodeType="clickEffect">
-                                  <p:stCondLst>
-                                    <p:cond delay="0"/>
-                                  </p:stCondLst>
-                                  <p:childTnLst>
-                                    <p:set>
-                                      <p:cBhvr>
-                                        <p:cTn id="10" dur="1" fill="hold">
-                                          <p:stCondLst>
-                                            <p:cond delay="0"/>
-                                          </p:stCondLst>
-                                        </p:cTn>
-                                        <p:tgtEl>
-                                          <p:spTgt spid="10"/>
                                         </p:tgtEl>
                                         <p:attrNameLst>
                                           <p:attrName>style.visibility</p:attrName>
@@ -10135,7 +7525,7 @@
           </a:lstStyle>
           <a:p>
             <a:r>
-              <a:rPr lang="ru-RU" b="1">
+              <a:rPr lang="ru-RU" b="1" dirty="0">
                 <a:effectLst/>
                 <a:latin typeface="Times New Roman" panose="02020603050405020304" pitchFamily="18" charset="0"/>
               </a:rPr>
@@ -13218,7 +10608,7 @@
                 <a:effectLst/>
                 <a:latin typeface="Times New Roman, serif"/>
               </a:rPr>
-              <a:t>В ходе выполнения лабораторной работы были успешно решены все задания по варианту №2. Были выполнены операции по созданию, визуализации и анализу как ориентированных (орграфов), так и неориентированных графов (включая графы специального вида). Были построены матрицы смежности для графов, найдено дополнение графа, а также выполнено исследование ключевых свойств случайных графов. В частности, были определены связность (обычная и сильная), гамильтонов цикл, планарность, степени вершин (исхода/захода) и метрические характеристики (диаметр, радиус, центр графа). Все поставленные задачи были полностью выполнены, и цель работы достигнута.</a:t>
+              <a:t>В ходе выполнения лабораторной работы были успешно решены все задания по варианту №27. Были выполнены операции по созданию, визуализации и анализу как ориентированных (орграфов), так и неориентированных графов (включая графы специального вида). Были построены матрицы смежности для графов, найдено дополнение графа, а также выполнено исследование ключевых свойств случайных графов. В частности, были определены связность (обычная и сильная), гамильтонов цикл, планарность, степени вершин (исхода/захода) и метрические характеристики (диаметр, радиус, центр графа). Все поставленные задачи были полностью выполнены, и цель работы достигнута.</a:t>
             </a:r>
             <a:endParaRPr lang="ru-RU" sz="2400" dirty="0">
               <a:effectLst/>
@@ -13403,7 +10793,7 @@
           <a:p>
             <a:r>
               <a:rPr lang="ru-RU" dirty="0"/>
-              <a:t>Вариант №2</a:t>
+              <a:t>Вариант №27</a:t>
             </a:r>
           </a:p>
         </p:txBody>
@@ -13516,10 +10906,10 @@
                 <a:effectLst/>
                 <a:latin typeface="Arial" panose="020B0604020202020204" pitchFamily="34" charset="0"/>
               </a:rPr>
-              <a:t> Кошкаров Д</a:t>
-            </a:r>
-            <a:r>
-              <a:rPr kumimoji="0" lang="en-GB" altLang="ru-RU" sz="1800" b="0" i="0" u="none" strike="noStrike" cap="none" normalizeH="0" baseline="0" dirty="0">
+              <a:t> Кабанов А. </a:t>
+            </a:r>
+            <a:r>
+              <a:rPr kumimoji="0" lang="ru-RU" altLang="ru-RU" sz="1800" b="0" i="0" u="none" strike="noStrike" cap="none" normalizeH="0" baseline="0">
                 <a:ln>
                   <a:noFill/>
                 </a:ln>
@@ -13529,46 +10919,7 @@
                 <a:effectLst/>
                 <a:latin typeface="Arial" panose="020B0604020202020204" pitchFamily="34" charset="0"/>
               </a:rPr>
-              <a:t>.</a:t>
-            </a:r>
-            <a:r>
-              <a:rPr kumimoji="0" lang="ru-RU" altLang="ru-RU" sz="1800" b="0" i="0" u="none" strike="noStrike" cap="none" normalizeH="0" baseline="0" dirty="0">
-                <a:ln>
-                  <a:noFill/>
-                </a:ln>
-                <a:solidFill>
-                  <a:schemeClr val="tx1"/>
-                </a:solidFill>
-                <a:effectLst/>
-                <a:latin typeface="Arial" panose="020B0604020202020204" pitchFamily="34" charset="0"/>
-              </a:rPr>
-              <a:t> С</a:t>
-            </a:r>
-            <a:r>
-              <a:rPr kumimoji="0" lang="en-GB" altLang="ru-RU" sz="1800" b="0" i="0" u="none" strike="noStrike" cap="none" normalizeH="0" baseline="0" dirty="0">
-                <a:ln>
-                  <a:noFill/>
-                </a:ln>
-                <a:solidFill>
-                  <a:schemeClr val="tx1"/>
-                </a:solidFill>
-                <a:effectLst/>
-                <a:latin typeface="Arial" panose="020B0604020202020204" pitchFamily="34" charset="0"/>
-              </a:rPr>
-              <a:t>.</a:t>
-            </a:r>
-            <a:r>
-              <a:rPr kumimoji="0" lang="ru-RU" altLang="ru-RU" sz="1800" b="0" i="0" u="none" strike="noStrike" cap="none" normalizeH="0" baseline="0" dirty="0">
-                <a:ln>
-                  <a:noFill/>
-                </a:ln>
-                <a:solidFill>
-                  <a:schemeClr val="tx1"/>
-                </a:solidFill>
-                <a:effectLst/>
-                <a:latin typeface="Arial" panose="020B0604020202020204" pitchFamily="34" charset="0"/>
-              </a:rPr>
-              <a:t> </a:t>
+              <a:t>А.</a:t>
             </a:r>
             <a:endParaRPr kumimoji="0" lang="en-GB" altLang="ru-RU" sz="1800" b="0" i="0" u="none" strike="noStrike" cap="none" normalizeH="0" baseline="0" dirty="0">
               <a:ln>
@@ -13661,20 +11012,25 @@
             <p:ph type="title"/>
           </p:nvPr>
         </p:nvSpPr>
-        <p:spPr/>
+        <p:spPr>
+          <a:xfrm>
+            <a:off x="388388" y="358748"/>
+            <a:ext cx="10515600" cy="1325563"/>
+          </a:xfrm>
+        </p:spPr>
         <p:txBody>
           <a:bodyPr>
             <a:normAutofit fontScale="90000"/>
           </a:bodyPr>
           <a:lstStyle/>
           <a:p>
-            <a:pPr rtl="0">
+            <a:pPr algn="ctr" rtl="0">
               <a:lnSpc>
                 <a:spcPct val="100000"/>
               </a:lnSpc>
             </a:pPr>
             <a:r>
-              <a:rPr lang="ru-RU" sz="3100" b="1" dirty="0">
+              <a:rPr lang="ru-RU" sz="3400" b="1" dirty="0">
                 <a:effectLst/>
                 <a:latin typeface="Times New Roman" panose="02020603050405020304" pitchFamily="18" charset="0"/>
               </a:rPr>
@@ -13720,8 +11076,8 @@
         </p:nvSpPr>
         <p:spPr>
           <a:xfrm>
-            <a:off x="-239716" y="1816428"/>
-            <a:ext cx="6799429" cy="1104901"/>
+            <a:off x="194929" y="1816429"/>
+            <a:ext cx="6364784" cy="1023416"/>
           </a:xfrm>
         </p:spPr>
         <p:txBody>
@@ -13730,6 +11086,9 @@
           </a:bodyPr>
           <a:lstStyle/>
           <a:p>
+            <a:pPr marL="0" indent="0">
+              <a:buNone/>
+            </a:pPr>
             <a:r>
               <a:rPr lang="ru-RU" sz="2800" dirty="0">
                 <a:effectLst/>
@@ -13746,12 +11105,58 @@
           </a:p>
         </p:txBody>
       </p:sp>
+      <p:sp>
+        <p:nvSpPr>
+          <p:cNvPr id="7" name="TextBox 6">
+            <a:extLst>
+              <a:ext uri="{FF2B5EF4-FFF2-40B4-BE49-F238E27FC236}">
+                <a16:creationId xmlns:a16="http://schemas.microsoft.com/office/drawing/2014/main" id="{4B391F36-6FDA-4E3C-BBE5-087D8EAD61AC}"/>
+              </a:ext>
+            </a:extLst>
+          </p:cNvPr>
+          <p:cNvSpPr txBox="1"/>
+          <p:nvPr/>
+        </p:nvSpPr>
+        <p:spPr>
+          <a:xfrm>
+            <a:off x="7086601" y="1682310"/>
+            <a:ext cx="4426527" cy="954107"/>
+          </a:xfrm>
+          <a:prstGeom prst="rect">
+            <a:avLst/>
+          </a:prstGeom>
+          <a:noFill/>
+        </p:spPr>
+        <p:txBody>
+          <a:bodyPr wrap="square">
+            <a:spAutoFit/>
+          </a:bodyPr>
+          <a:lstStyle/>
+          <a:p>
+            <a:pPr algn="just" rtl="0">
+              <a:lnSpc>
+                <a:spcPct val="100000"/>
+              </a:lnSpc>
+            </a:pPr>
+            <a:r>
+              <a:rPr lang="ru-RU" sz="2800" dirty="0">
+                <a:effectLst/>
+                <a:latin typeface="Times New Roman, serif"/>
+              </a:rPr>
+              <a:t>Б) Строим изображение графа G:</a:t>
+            </a:r>
+            <a:endParaRPr lang="ru-RU" sz="2800" dirty="0">
+              <a:effectLst/>
+            </a:endParaRPr>
+          </a:p>
+        </p:txBody>
+      </p:sp>
       <p:pic>
         <p:nvPicPr>
-          <p:cNvPr id="5" name="Рисунок 4">
-            <a:extLst>
-              <a:ext uri="{FF2B5EF4-FFF2-40B4-BE49-F238E27FC236}">
-                <a16:creationId xmlns:a16="http://schemas.microsoft.com/office/drawing/2014/main" id="{6B2C07A4-0ED1-4090-9C74-94A8B699BA8D}"/>
+          <p:cNvPr id="6" name="Рисунок 5">
+            <a:extLst>
+              <a:ext uri="{FF2B5EF4-FFF2-40B4-BE49-F238E27FC236}">
+                <a16:creationId xmlns:a16="http://schemas.microsoft.com/office/drawing/2014/main" id="{26DEFAC8-93C0-0E02-18B6-4D02F9759026}"/>
               </a:ext>
             </a:extLst>
           </p:cNvPr>
@@ -13768,66 +11173,20 @@
         </p:blipFill>
         <p:spPr>
           <a:xfrm>
-            <a:off x="194929" y="3004456"/>
-            <a:ext cx="5901072" cy="3460513"/>
+            <a:off x="388388" y="3292279"/>
+            <a:ext cx="6106377" cy="2581635"/>
           </a:xfrm>
           <a:prstGeom prst="rect">
             <a:avLst/>
           </a:prstGeom>
         </p:spPr>
       </p:pic>
-      <p:sp>
-        <p:nvSpPr>
-          <p:cNvPr id="7" name="TextBox 6">
-            <a:extLst>
-              <a:ext uri="{FF2B5EF4-FFF2-40B4-BE49-F238E27FC236}">
-                <a16:creationId xmlns:a16="http://schemas.microsoft.com/office/drawing/2014/main" id="{4B391F36-6FDA-4E3C-BBE5-087D8EAD61AC}"/>
-              </a:ext>
-            </a:extLst>
-          </p:cNvPr>
-          <p:cNvSpPr txBox="1"/>
-          <p:nvPr/>
-        </p:nvSpPr>
-        <p:spPr>
-          <a:xfrm>
-            <a:off x="7086601" y="1682310"/>
-            <a:ext cx="4426527" cy="954107"/>
-          </a:xfrm>
-          <a:prstGeom prst="rect">
-            <a:avLst/>
-          </a:prstGeom>
-          <a:noFill/>
-        </p:spPr>
-        <p:txBody>
-          <a:bodyPr wrap="square">
-            <a:spAutoFit/>
-          </a:bodyPr>
-          <a:lstStyle/>
-          <a:p>
-            <a:pPr algn="just" rtl="0">
-              <a:lnSpc>
-                <a:spcPct val="100000"/>
-              </a:lnSpc>
-            </a:pPr>
-            <a:r>
-              <a:rPr lang="ru-RU" sz="2800" dirty="0">
-                <a:effectLst/>
-                <a:latin typeface="Times New Roman, serif"/>
-              </a:rPr>
-              <a:t>Б) Строим изображение графа G:</a:t>
-            </a:r>
-            <a:endParaRPr lang="ru-RU" sz="2800" dirty="0">
-              <a:effectLst/>
-            </a:endParaRPr>
-          </a:p>
-        </p:txBody>
-      </p:sp>
       <p:pic>
         <p:nvPicPr>
-          <p:cNvPr id="9" name="Рисунок 8">
-            <a:extLst>
-              <a:ext uri="{FF2B5EF4-FFF2-40B4-BE49-F238E27FC236}">
-                <a16:creationId xmlns:a16="http://schemas.microsoft.com/office/drawing/2014/main" id="{37F4D327-7559-44FE-BA5E-12DD824029C0}"/>
+          <p:cNvPr id="8" name="Рисунок 7">
+            <a:extLst>
+              <a:ext uri="{FF2B5EF4-FFF2-40B4-BE49-F238E27FC236}">
+                <a16:creationId xmlns:a16="http://schemas.microsoft.com/office/drawing/2014/main" id="{D72E059A-05CF-AF0E-FEC3-9A528C89BF70}"/>
               </a:ext>
             </a:extLst>
           </p:cNvPr>
@@ -13844,8 +11203,8 @@
         </p:blipFill>
         <p:spPr>
           <a:xfrm>
-            <a:off x="6947848" y="2839844"/>
-            <a:ext cx="4704032" cy="3625125"/>
+            <a:off x="7736482" y="2900652"/>
+            <a:ext cx="2720340" cy="2453640"/>
           </a:xfrm>
           <a:prstGeom prst="rect">
             <a:avLst/>
@@ -13913,33 +11272,6 @@
                                   </p:childTnLst>
                                 </p:cTn>
                               </p:par>
-                              <p:par>
-                                <p:cTn id="7" presetID="1" presetClass="entr" presetSubtype="0" fill="hold" nodeType="withEffect">
-                                  <p:stCondLst>
-                                    <p:cond delay="0"/>
-                                  </p:stCondLst>
-                                  <p:childTnLst>
-                                    <p:set>
-                                      <p:cBhvr>
-                                        <p:cTn id="8" dur="1" fill="hold">
-                                          <p:stCondLst>
-                                            <p:cond delay="0"/>
-                                          </p:stCondLst>
-                                        </p:cTn>
-                                        <p:tgtEl>
-                                          <p:spTgt spid="5"/>
-                                        </p:tgtEl>
-                                        <p:attrNameLst>
-                                          <p:attrName>style.visibility</p:attrName>
-                                        </p:attrNameLst>
-                                      </p:cBhvr>
-                                      <p:to>
-                                        <p:strVal val="visible"/>
-                                      </p:to>
-                                    </p:set>
-                                  </p:childTnLst>
-                                </p:cTn>
-                              </p:par>
                             </p:childTnLst>
                           </p:cTn>
                         </p:par>
@@ -13947,59 +11279,32 @@
                     </p:cTn>
                   </p:par>
                   <p:par>
-                    <p:cTn id="9" fill="hold">
+                    <p:cTn id="7" fill="hold">
                       <p:stCondLst>
                         <p:cond delay="indefinite"/>
                       </p:stCondLst>
                       <p:childTnLst>
                         <p:par>
-                          <p:cTn id="10" fill="hold">
+                          <p:cTn id="8" fill="hold">
                             <p:stCondLst>
                               <p:cond delay="0"/>
                             </p:stCondLst>
                             <p:childTnLst>
                               <p:par>
-                                <p:cTn id="11" presetID="1" presetClass="entr" presetSubtype="0" fill="hold" grpId="0" nodeType="clickEffect">
+                                <p:cTn id="9" presetID="1" presetClass="entr" presetSubtype="0" fill="hold" grpId="0" nodeType="clickEffect">
                                   <p:stCondLst>
                                     <p:cond delay="0"/>
                                   </p:stCondLst>
                                   <p:childTnLst>
                                     <p:set>
                                       <p:cBhvr>
-                                        <p:cTn id="12" dur="1" fill="hold">
+                                        <p:cTn id="10" dur="1" fill="hold">
                                           <p:stCondLst>
                                             <p:cond delay="0"/>
                                           </p:stCondLst>
                                         </p:cTn>
                                         <p:tgtEl>
                                           <p:spTgt spid="7"/>
-                                        </p:tgtEl>
-                                        <p:attrNameLst>
-                                          <p:attrName>style.visibility</p:attrName>
-                                        </p:attrNameLst>
-                                      </p:cBhvr>
-                                      <p:to>
-                                        <p:strVal val="visible"/>
-                                      </p:to>
-                                    </p:set>
-                                  </p:childTnLst>
-                                </p:cTn>
-                              </p:par>
-                              <p:par>
-                                <p:cTn id="13" presetID="1" presetClass="entr" presetSubtype="0" fill="hold" nodeType="withEffect">
-                                  <p:stCondLst>
-                                    <p:cond delay="0"/>
-                                  </p:stCondLst>
-                                  <p:childTnLst>
-                                    <p:set>
-                                      <p:cBhvr>
-                                        <p:cTn id="14" dur="1" fill="hold">
-                                          <p:stCondLst>
-                                            <p:cond delay="0"/>
-                                          </p:stCondLst>
-                                        </p:cTn>
-                                        <p:tgtEl>
-                                          <p:spTgt spid="9"/>
                                         </p:tgtEl>
                                         <p:attrNameLst>
                                           <p:attrName>style.visibility</p:attrName>
@@ -14082,8 +11387,8 @@
         </p:nvSpPr>
         <p:spPr>
           <a:xfrm>
-            <a:off x="164667" y="0"/>
-            <a:ext cx="9905998" cy="1905000"/>
+            <a:off x="4638555" y="232118"/>
+            <a:ext cx="2135107" cy="1322773"/>
           </a:xfrm>
         </p:spPr>
         <p:txBody>
@@ -14125,7 +11430,7 @@
         </p:spPr>
         <p:txBody>
           <a:bodyPr>
-            <a:normAutofit fontScale="92500" lnSpcReduction="20000"/>
+            <a:normAutofit lnSpcReduction="10000"/>
           </a:bodyPr>
           <a:lstStyle/>
           <a:p>
@@ -14151,12 +11456,72 @@
           </a:p>
         </p:txBody>
       </p:sp>
+      <p:sp>
+        <p:nvSpPr>
+          <p:cNvPr id="6" name="TextBox 5">
+            <a:extLst>
+              <a:ext uri="{FF2B5EF4-FFF2-40B4-BE49-F238E27FC236}">
+                <a16:creationId xmlns:a16="http://schemas.microsoft.com/office/drawing/2014/main" id="{B093AB2C-4D2B-4ACA-975D-F724E22982F4}"/>
+              </a:ext>
+            </a:extLst>
+          </p:cNvPr>
+          <p:cNvSpPr txBox="1"/>
+          <p:nvPr/>
+        </p:nvSpPr>
+        <p:spPr>
+          <a:xfrm>
+            <a:off x="6464968" y="1676984"/>
+            <a:ext cx="6096000" cy="990015"/>
+          </a:xfrm>
+          <a:prstGeom prst="rect">
+            <a:avLst/>
+          </a:prstGeom>
+          <a:noFill/>
+        </p:spPr>
+        <p:txBody>
+          <a:bodyPr wrap="square">
+            <a:spAutoFit/>
+          </a:bodyPr>
+          <a:lstStyle/>
+          <a:p>
+            <a:pPr algn="l" rtl="0">
+              <a:lnSpc>
+                <a:spcPct val="108000"/>
+              </a:lnSpc>
+            </a:pPr>
+            <a:r>
+              <a:rPr lang="ru-RU" sz="2800" dirty="0">
+                <a:effectLst/>
+                <a:latin typeface="Times New Roman, serif"/>
+              </a:rPr>
+              <a:t>Г) Строим дополнение </a:t>
+            </a:r>
+            <a:r>
+              <a:rPr lang="ru-RU" sz="2800" dirty="0" err="1">
+                <a:effectLst/>
+                <a:latin typeface="Times New Roman, serif"/>
+              </a:rPr>
+              <a:t>G_compl</a:t>
+            </a:r>
+            <a:r>
+              <a:rPr lang="ru-RU" sz="2800" dirty="0">
+                <a:effectLst/>
+                <a:latin typeface="Times New Roman, serif"/>
+              </a:rPr>
+              <a:t> для графа G:</a:t>
+            </a:r>
+            <a:endParaRPr lang="ru-RU" sz="2800" dirty="0">
+              <a:effectLst/>
+            </a:endParaRPr>
+          </a:p>
+        </p:txBody>
+      </p:sp>
       <p:pic>
         <p:nvPicPr>
-          <p:cNvPr id="5" name="Рисунок 4">
-            <a:extLst>
-              <a:ext uri="{FF2B5EF4-FFF2-40B4-BE49-F238E27FC236}">
-                <a16:creationId xmlns:a16="http://schemas.microsoft.com/office/drawing/2014/main" id="{CA53A111-E736-4EEB-9D5D-4D0C2B71731C}"/>
+          <p:cNvPr id="4" name="Рисунок 3">
+            <a:extLst>
+              <a:ext uri="{FF2B5EF4-FFF2-40B4-BE49-F238E27FC236}">
+                <a16:creationId xmlns:a16="http://schemas.microsoft.com/office/drawing/2014/main" id="{EF6A9974-EEFD-A96D-75B4-FA1C9A217028}"/>
               </a:ext>
             </a:extLst>
           </p:cNvPr>
@@ -14173,80 +11538,20 @@
         </p:blipFill>
         <p:spPr>
           <a:xfrm>
-            <a:off x="370939" y="3164538"/>
-            <a:ext cx="4620270" cy="3576925"/>
+            <a:off x="1252602" y="3116101"/>
+            <a:ext cx="3649980" cy="3298190"/>
           </a:xfrm>
           <a:prstGeom prst="rect">
             <a:avLst/>
           </a:prstGeom>
         </p:spPr>
       </p:pic>
-      <p:sp>
-        <p:nvSpPr>
-          <p:cNvPr id="6" name="TextBox 5">
-            <a:extLst>
-              <a:ext uri="{FF2B5EF4-FFF2-40B4-BE49-F238E27FC236}">
-                <a16:creationId xmlns:a16="http://schemas.microsoft.com/office/drawing/2014/main" id="{B093AB2C-4D2B-4ACA-975D-F724E22982F4}"/>
-              </a:ext>
-            </a:extLst>
-          </p:cNvPr>
-          <p:cNvSpPr txBox="1"/>
-          <p:nvPr/>
-        </p:nvSpPr>
-        <p:spPr>
-          <a:xfrm>
-            <a:off x="6464968" y="1676984"/>
-            <a:ext cx="6096000" cy="990015"/>
-          </a:xfrm>
-          <a:prstGeom prst="rect">
-            <a:avLst/>
-          </a:prstGeom>
-          <a:noFill/>
-        </p:spPr>
-        <p:txBody>
-          <a:bodyPr wrap="square">
-            <a:spAutoFit/>
-          </a:bodyPr>
-          <a:lstStyle/>
-          <a:p>
-            <a:pPr algn="l" rtl="0">
-              <a:lnSpc>
-                <a:spcPct val="108000"/>
-              </a:lnSpc>
-            </a:pPr>
-            <a:r>
-              <a:rPr lang="ru-RU" sz="2800" dirty="0">
-                <a:effectLst/>
-                <a:latin typeface="Times New Roman, serif"/>
-              </a:rPr>
-              <a:t>Г) Строим дополнение </a:t>
-            </a:r>
-            <a:r>
-              <a:rPr lang="ru-RU" sz="2800" dirty="0" err="1">
-                <a:effectLst/>
-                <a:latin typeface="Times New Roman, serif"/>
-              </a:rPr>
-              <a:t>G_compl</a:t>
-            </a:r>
-            <a:r>
-              <a:rPr lang="ru-RU" sz="2800" dirty="0">
-                <a:effectLst/>
-                <a:latin typeface="Times New Roman, serif"/>
-              </a:rPr>
-              <a:t> для графа G:</a:t>
-            </a:r>
-            <a:endParaRPr lang="ru-RU" sz="2800" dirty="0">
-              <a:effectLst/>
-            </a:endParaRPr>
-          </a:p>
-        </p:txBody>
-      </p:sp>
       <p:pic>
         <p:nvPicPr>
-          <p:cNvPr id="8" name="Рисунок 7">
-            <a:extLst>
-              <a:ext uri="{FF2B5EF4-FFF2-40B4-BE49-F238E27FC236}">
-                <a16:creationId xmlns:a16="http://schemas.microsoft.com/office/drawing/2014/main" id="{ED5C577E-28F2-4FE9-9AC0-B7CC27A9548B}"/>
+          <p:cNvPr id="9" name="Рисунок 8">
+            <a:extLst>
+              <a:ext uri="{FF2B5EF4-FFF2-40B4-BE49-F238E27FC236}">
+                <a16:creationId xmlns:a16="http://schemas.microsoft.com/office/drawing/2014/main" id="{BFE145F8-EAFB-2CF2-0F4B-43693DEE3712}"/>
               </a:ext>
             </a:extLst>
           </p:cNvPr>
@@ -14263,8 +11568,8 @@
         </p:blipFill>
         <p:spPr>
           <a:xfrm>
-            <a:off x="6764672" y="3000691"/>
-            <a:ext cx="4620270" cy="3849348"/>
+            <a:off x="7659979" y="2789092"/>
+            <a:ext cx="2667963" cy="3298190"/>
           </a:xfrm>
           <a:prstGeom prst="rect">
             <a:avLst/>
@@ -14332,33 +11637,6 @@
                                   </p:childTnLst>
                                 </p:cTn>
                               </p:par>
-                              <p:par>
-                                <p:cTn id="7" presetID="1" presetClass="entr" presetSubtype="0" fill="hold" nodeType="withEffect">
-                                  <p:stCondLst>
-                                    <p:cond delay="0"/>
-                                  </p:stCondLst>
-                                  <p:childTnLst>
-                                    <p:set>
-                                      <p:cBhvr>
-                                        <p:cTn id="8" dur="1" fill="hold">
-                                          <p:stCondLst>
-                                            <p:cond delay="0"/>
-                                          </p:stCondLst>
-                                        </p:cTn>
-                                        <p:tgtEl>
-                                          <p:spTgt spid="5"/>
-                                        </p:tgtEl>
-                                        <p:attrNameLst>
-                                          <p:attrName>style.visibility</p:attrName>
-                                        </p:attrNameLst>
-                                      </p:cBhvr>
-                                      <p:to>
-                                        <p:strVal val="visible"/>
-                                      </p:to>
-                                    </p:set>
-                                  </p:childTnLst>
-                                </p:cTn>
-                              </p:par>
                             </p:childTnLst>
                           </p:cTn>
                         </p:par>
@@ -14366,59 +11644,32 @@
                     </p:cTn>
                   </p:par>
                   <p:par>
-                    <p:cTn id="9" fill="hold">
+                    <p:cTn id="7" fill="hold">
                       <p:stCondLst>
                         <p:cond delay="indefinite"/>
                       </p:stCondLst>
                       <p:childTnLst>
                         <p:par>
-                          <p:cTn id="10" fill="hold">
+                          <p:cTn id="8" fill="hold">
                             <p:stCondLst>
                               <p:cond delay="0"/>
                             </p:stCondLst>
                             <p:childTnLst>
                               <p:par>
-                                <p:cTn id="11" presetID="1" presetClass="entr" presetSubtype="0" fill="hold" grpId="0" nodeType="clickEffect">
+                                <p:cTn id="9" presetID="1" presetClass="entr" presetSubtype="0" fill="hold" grpId="0" nodeType="clickEffect">
                                   <p:stCondLst>
                                     <p:cond delay="0"/>
                                   </p:stCondLst>
                                   <p:childTnLst>
                                     <p:set>
                                       <p:cBhvr>
-                                        <p:cTn id="12" dur="1" fill="hold">
+                                        <p:cTn id="10" dur="1" fill="hold">
                                           <p:stCondLst>
                                             <p:cond delay="0"/>
                                           </p:stCondLst>
                                         </p:cTn>
                                         <p:tgtEl>
                                           <p:spTgt spid="6"/>
-                                        </p:tgtEl>
-                                        <p:attrNameLst>
-                                          <p:attrName>style.visibility</p:attrName>
-                                        </p:attrNameLst>
-                                      </p:cBhvr>
-                                      <p:to>
-                                        <p:strVal val="visible"/>
-                                      </p:to>
-                                    </p:set>
-                                  </p:childTnLst>
-                                </p:cTn>
-                              </p:par>
-                              <p:par>
-                                <p:cTn id="13" presetID="1" presetClass="entr" presetSubtype="0" fill="hold" nodeType="withEffect">
-                                  <p:stCondLst>
-                                    <p:cond delay="0"/>
-                                  </p:stCondLst>
-                                  <p:childTnLst>
-                                    <p:set>
-                                      <p:cBhvr>
-                                        <p:cTn id="14" dur="1" fill="hold">
-                                          <p:stCondLst>
-                                            <p:cond delay="0"/>
-                                          </p:stCondLst>
-                                        </p:cTn>
-                                        <p:tgtEl>
-                                          <p:spTgt spid="8"/>
                                         </p:tgtEl>
                                         <p:attrNameLst>
                                           <p:attrName>style.visibility</p:attrName>
@@ -14501,7 +11752,7 @@
         </p:nvSpPr>
         <p:spPr>
           <a:xfrm>
-            <a:off x="187036" y="76200"/>
+            <a:off x="1611222" y="119606"/>
             <a:ext cx="8189623" cy="990600"/>
           </a:xfrm>
         </p:spPr>
@@ -14509,6 +11760,7 @@
           <a:bodyPr/>
           <a:lstStyle/>
           <a:p>
+            <a:pPr algn="ctr"/>
             <a:r>
               <a:rPr lang="ru-RU" sz="3200" b="1" dirty="0">
                 <a:effectLst/>
@@ -14544,7 +11796,7 @@
         </p:spPr>
         <p:txBody>
           <a:bodyPr>
-            <a:normAutofit fontScale="55000" lnSpcReduction="20000"/>
+            <a:normAutofit fontScale="62500" lnSpcReduction="20000"/>
           </a:bodyPr>
           <a:lstStyle/>
           <a:p>
@@ -14581,12 +11833,58 @@
           </a:p>
         </p:txBody>
       </p:sp>
+      <p:sp>
+        <p:nvSpPr>
+          <p:cNvPr id="7" name="TextBox 6">
+            <a:extLst>
+              <a:ext uri="{FF2B5EF4-FFF2-40B4-BE49-F238E27FC236}">
+                <a16:creationId xmlns:a16="http://schemas.microsoft.com/office/drawing/2014/main" id="{9DCCA541-796C-4263-869B-8789ECC17785}"/>
+              </a:ext>
+            </a:extLst>
+          </p:cNvPr>
+          <p:cNvSpPr txBox="1"/>
+          <p:nvPr/>
+        </p:nvSpPr>
+        <p:spPr>
+          <a:xfrm>
+            <a:off x="6096000" y="1110206"/>
+            <a:ext cx="6161808" cy="524631"/>
+          </a:xfrm>
+          <a:prstGeom prst="rect">
+            <a:avLst/>
+          </a:prstGeom>
+          <a:noFill/>
+        </p:spPr>
+        <p:txBody>
+          <a:bodyPr wrap="square">
+            <a:spAutoFit/>
+          </a:bodyPr>
+          <a:lstStyle/>
+          <a:p>
+            <a:pPr algn="just" rtl="0">
+              <a:lnSpc>
+                <a:spcPct val="108000"/>
+              </a:lnSpc>
+            </a:pPr>
+            <a:r>
+              <a:rPr lang="ru-RU" sz="2800" dirty="0">
+                <a:effectLst/>
+                <a:latin typeface="Times New Roman, serif"/>
+              </a:rPr>
+              <a:t>Е) Создаем копию графа G:</a:t>
+            </a:r>
+            <a:endParaRPr lang="ru-RU" sz="2800" dirty="0">
+              <a:effectLst/>
+            </a:endParaRPr>
+          </a:p>
+        </p:txBody>
+      </p:sp>
       <p:pic>
         <p:nvPicPr>
-          <p:cNvPr id="5" name="Рисунок 4">
-            <a:extLst>
-              <a:ext uri="{FF2B5EF4-FFF2-40B4-BE49-F238E27FC236}">
-                <a16:creationId xmlns:a16="http://schemas.microsoft.com/office/drawing/2014/main" id="{0DA233B6-E5BD-4697-B51A-91D3F55D29B3}"/>
+          <p:cNvPr id="6" name="Рисунок 5">
+            <a:extLst>
+              <a:ext uri="{FF2B5EF4-FFF2-40B4-BE49-F238E27FC236}">
+                <a16:creationId xmlns:a16="http://schemas.microsoft.com/office/drawing/2014/main" id="{6BDDC250-6EC0-0EC7-BD97-184F9C1D9859}"/>
               </a:ext>
             </a:extLst>
           </p:cNvPr>
@@ -14603,66 +11901,20 @@
         </p:blipFill>
         <p:spPr>
           <a:xfrm>
-            <a:off x="781703" y="1911120"/>
-            <a:ext cx="3540915" cy="4907736"/>
+            <a:off x="187036" y="2057400"/>
+            <a:ext cx="2848373" cy="3334215"/>
           </a:xfrm>
           <a:prstGeom prst="rect">
             <a:avLst/>
           </a:prstGeom>
         </p:spPr>
       </p:pic>
-      <p:sp>
-        <p:nvSpPr>
-          <p:cNvPr id="7" name="TextBox 6">
-            <a:extLst>
-              <a:ext uri="{FF2B5EF4-FFF2-40B4-BE49-F238E27FC236}">
-                <a16:creationId xmlns:a16="http://schemas.microsoft.com/office/drawing/2014/main" id="{9DCCA541-796C-4263-869B-8789ECC17785}"/>
-              </a:ext>
-            </a:extLst>
-          </p:cNvPr>
-          <p:cNvSpPr txBox="1"/>
-          <p:nvPr/>
-        </p:nvSpPr>
-        <p:spPr>
-          <a:xfrm>
-            <a:off x="6096000" y="1110206"/>
-            <a:ext cx="6161808" cy="524631"/>
-          </a:xfrm>
-          <a:prstGeom prst="rect">
-            <a:avLst/>
-          </a:prstGeom>
-          <a:noFill/>
-        </p:spPr>
-        <p:txBody>
-          <a:bodyPr wrap="square">
-            <a:spAutoFit/>
-          </a:bodyPr>
-          <a:lstStyle/>
-          <a:p>
-            <a:pPr algn="just" rtl="0">
-              <a:lnSpc>
-                <a:spcPct val="108000"/>
-              </a:lnSpc>
-            </a:pPr>
-            <a:r>
-              <a:rPr lang="ru-RU" sz="2800" dirty="0">
-                <a:effectLst/>
-                <a:latin typeface="Times New Roman, serif"/>
-              </a:rPr>
-              <a:t>Е) Создаем копию графа G:</a:t>
-            </a:r>
-            <a:endParaRPr lang="ru-RU" sz="2800" dirty="0">
-              <a:effectLst/>
-            </a:endParaRPr>
-          </a:p>
-        </p:txBody>
-      </p:sp>
       <p:pic>
         <p:nvPicPr>
-          <p:cNvPr id="9" name="Рисунок 8">
-            <a:extLst>
-              <a:ext uri="{FF2B5EF4-FFF2-40B4-BE49-F238E27FC236}">
-                <a16:creationId xmlns:a16="http://schemas.microsoft.com/office/drawing/2014/main" id="{4A71084D-92F4-4FFC-8493-F4D929DFC83D}"/>
+          <p:cNvPr id="10" name="Рисунок 9">
+            <a:extLst>
+              <a:ext uri="{FF2B5EF4-FFF2-40B4-BE49-F238E27FC236}">
+                <a16:creationId xmlns:a16="http://schemas.microsoft.com/office/drawing/2014/main" id="{FC294386-57C7-B2DE-E4EA-B6E82A6BC271}"/>
               </a:ext>
             </a:extLst>
           </p:cNvPr>
@@ -14679,8 +11931,38 @@
         </p:blipFill>
         <p:spPr>
           <a:xfrm>
-            <a:off x="6313711" y="2202874"/>
-            <a:ext cx="5096586" cy="4105848"/>
+            <a:off x="2880433" y="2839848"/>
+            <a:ext cx="2600688" cy="1914792"/>
+          </a:xfrm>
+          <a:prstGeom prst="rect">
+            <a:avLst/>
+          </a:prstGeom>
+        </p:spPr>
+      </p:pic>
+      <p:pic>
+        <p:nvPicPr>
+          <p:cNvPr id="11" name="Рисунок 10">
+            <a:extLst>
+              <a:ext uri="{FF2B5EF4-FFF2-40B4-BE49-F238E27FC236}">
+                <a16:creationId xmlns:a16="http://schemas.microsoft.com/office/drawing/2014/main" id="{BEAD1D8C-2458-8A6C-9CA4-F235797F32FF}"/>
+              </a:ext>
+            </a:extLst>
+          </p:cNvPr>
+          <p:cNvPicPr>
+            <a:picLocks noChangeAspect="1"/>
+          </p:cNvPicPr>
+          <p:nvPr/>
+        </p:nvPicPr>
+        <p:blipFill>
+          <a:blip r:embed="rId4"/>
+          <a:stretch>
+            <a:fillRect/>
+          </a:stretch>
+        </p:blipFill>
+        <p:spPr>
+          <a:xfrm>
+            <a:off x="7187214" y="2417706"/>
+            <a:ext cx="2895600" cy="2759075"/>
           </a:xfrm>
           <a:prstGeom prst="rect">
             <a:avLst/>
@@ -14748,33 +12030,6 @@
                                   </p:childTnLst>
                                 </p:cTn>
                               </p:par>
-                              <p:par>
-                                <p:cTn id="7" presetID="1" presetClass="entr" presetSubtype="0" fill="hold" nodeType="withEffect">
-                                  <p:stCondLst>
-                                    <p:cond delay="0"/>
-                                  </p:stCondLst>
-                                  <p:childTnLst>
-                                    <p:set>
-                                      <p:cBhvr>
-                                        <p:cTn id="8" dur="1" fill="hold">
-                                          <p:stCondLst>
-                                            <p:cond delay="0"/>
-                                          </p:stCondLst>
-                                        </p:cTn>
-                                        <p:tgtEl>
-                                          <p:spTgt spid="5"/>
-                                        </p:tgtEl>
-                                        <p:attrNameLst>
-                                          <p:attrName>style.visibility</p:attrName>
-                                        </p:attrNameLst>
-                                      </p:cBhvr>
-                                      <p:to>
-                                        <p:strVal val="visible"/>
-                                      </p:to>
-                                    </p:set>
-                                  </p:childTnLst>
-                                </p:cTn>
-                              </p:par>
                             </p:childTnLst>
                           </p:cTn>
                         </p:par>
@@ -14782,59 +12037,32 @@
                     </p:cTn>
                   </p:par>
                   <p:par>
-                    <p:cTn id="9" fill="hold">
+                    <p:cTn id="7" fill="hold">
                       <p:stCondLst>
                         <p:cond delay="indefinite"/>
                       </p:stCondLst>
                       <p:childTnLst>
                         <p:par>
-                          <p:cTn id="10" fill="hold">
+                          <p:cTn id="8" fill="hold">
                             <p:stCondLst>
                               <p:cond delay="0"/>
                             </p:stCondLst>
                             <p:childTnLst>
                               <p:par>
-                                <p:cTn id="11" presetID="1" presetClass="entr" presetSubtype="0" fill="hold" grpId="0" nodeType="clickEffect">
+                                <p:cTn id="9" presetID="1" presetClass="entr" presetSubtype="0" fill="hold" grpId="0" nodeType="clickEffect">
                                   <p:stCondLst>
                                     <p:cond delay="0"/>
                                   </p:stCondLst>
                                   <p:childTnLst>
                                     <p:set>
                                       <p:cBhvr>
-                                        <p:cTn id="12" dur="1" fill="hold">
+                                        <p:cTn id="10" dur="1" fill="hold">
                                           <p:stCondLst>
                                             <p:cond delay="0"/>
                                           </p:stCondLst>
                                         </p:cTn>
                                         <p:tgtEl>
                                           <p:spTgt spid="7"/>
-                                        </p:tgtEl>
-                                        <p:attrNameLst>
-                                          <p:attrName>style.visibility</p:attrName>
-                                        </p:attrNameLst>
-                                      </p:cBhvr>
-                                      <p:to>
-                                        <p:strVal val="visible"/>
-                                      </p:to>
-                                    </p:set>
-                                  </p:childTnLst>
-                                </p:cTn>
-                              </p:par>
-                              <p:par>
-                                <p:cTn id="13" presetID="1" presetClass="entr" presetSubtype="0" fill="hold" nodeType="withEffect">
-                                  <p:stCondLst>
-                                    <p:cond delay="0"/>
-                                  </p:stCondLst>
-                                  <p:childTnLst>
-                                    <p:set>
-                                      <p:cBhvr>
-                                        <p:cTn id="14" dur="1" fill="hold">
-                                          <p:stCondLst>
-                                            <p:cond delay="0"/>
-                                          </p:stCondLst>
-                                        </p:cTn>
-                                        <p:tgtEl>
-                                          <p:spTgt spid="9"/>
                                         </p:tgtEl>
                                         <p:attrNameLst>
                                           <p:attrName>style.visibility</p:attrName>
@@ -14922,11 +12150,13 @@
           </a:xfrm>
         </p:spPr>
         <p:txBody>
-          <a:bodyPr/>
+          <a:bodyPr>
+            <a:normAutofit/>
+          </a:bodyPr>
           <a:lstStyle/>
           <a:p>
             <a:r>
-              <a:rPr lang="ru-RU" b="1" dirty="0">
+              <a:rPr lang="ru-RU" sz="3100" b="1" dirty="0">
                 <a:effectLst/>
                 <a:latin typeface="Times New Roman" panose="02020603050405020304" pitchFamily="18" charset="0"/>
               </a:rPr>
@@ -14992,10 +12222,10 @@
       </p:sp>
       <p:pic>
         <p:nvPicPr>
-          <p:cNvPr id="5" name="Рисунок 4">
-            <a:extLst>
-              <a:ext uri="{FF2B5EF4-FFF2-40B4-BE49-F238E27FC236}">
-                <a16:creationId xmlns:a16="http://schemas.microsoft.com/office/drawing/2014/main" id="{60968B59-688B-4B97-864E-39CC882759AA}"/>
+          <p:cNvPr id="4" name="Рисунок 3">
+            <a:extLst>
+              <a:ext uri="{FF2B5EF4-FFF2-40B4-BE49-F238E27FC236}">
+                <a16:creationId xmlns:a16="http://schemas.microsoft.com/office/drawing/2014/main" id="{5AA39F77-4C2D-47A2-0F6F-53EA30D8B08B}"/>
               </a:ext>
             </a:extLst>
           </p:cNvPr>
@@ -15012,8 +12242,8 @@
         </p:blipFill>
         <p:spPr>
           <a:xfrm>
-            <a:off x="2990416" y="2348345"/>
-            <a:ext cx="6211167" cy="4405344"/>
+            <a:off x="4344035" y="1826839"/>
+            <a:ext cx="3503930" cy="4198620"/>
           </a:xfrm>
           <a:prstGeom prst="rect">
             <a:avLst/>
@@ -15081,33 +12311,6 @@
                                   </p:childTnLst>
                                 </p:cTn>
                               </p:par>
-                              <p:par>
-                                <p:cTn id="7" presetID="1" presetClass="entr" presetSubtype="0" fill="hold" nodeType="withEffect">
-                                  <p:stCondLst>
-                                    <p:cond delay="0"/>
-                                  </p:stCondLst>
-                                  <p:childTnLst>
-                                    <p:set>
-                                      <p:cBhvr>
-                                        <p:cTn id="8" dur="1" fill="hold">
-                                          <p:stCondLst>
-                                            <p:cond delay="0"/>
-                                          </p:stCondLst>
-                                        </p:cTn>
-                                        <p:tgtEl>
-                                          <p:spTgt spid="5"/>
-                                        </p:tgtEl>
-                                        <p:attrNameLst>
-                                          <p:attrName>style.visibility</p:attrName>
-                                        </p:attrNameLst>
-                                      </p:cBhvr>
-                                      <p:to>
-                                        <p:strVal val="visible"/>
-                                      </p:to>
-                                    </p:set>
-                                  </p:childTnLst>
-                                </p:cTn>
-                              </p:par>
                             </p:childTnLst>
                           </p:cTn>
                         </p:par>
@@ -15182,11 +12385,13 @@
           </a:xfrm>
         </p:spPr>
         <p:txBody>
-          <a:bodyPr/>
+          <a:bodyPr>
+            <a:normAutofit/>
+          </a:bodyPr>
           <a:lstStyle/>
           <a:p>
             <a:r>
-              <a:rPr lang="ru-RU" sz="3600" b="1" dirty="0">
+              <a:rPr lang="ru-RU" sz="3100" b="1" dirty="0">
                 <a:effectLst/>
                 <a:latin typeface="Times New Roman, serif"/>
               </a:rPr>
@@ -15247,12 +12452,58 @@
           </a:p>
         </p:txBody>
       </p:sp>
+      <p:sp>
+        <p:nvSpPr>
+          <p:cNvPr id="7" name="TextBox 6">
+            <a:extLst>
+              <a:ext uri="{FF2B5EF4-FFF2-40B4-BE49-F238E27FC236}">
+                <a16:creationId xmlns:a16="http://schemas.microsoft.com/office/drawing/2014/main" id="{50138543-BE79-48AB-8086-E875E7A6CE32}"/>
+              </a:ext>
+            </a:extLst>
+          </p:cNvPr>
+          <p:cNvSpPr txBox="1"/>
+          <p:nvPr/>
+        </p:nvSpPr>
+        <p:spPr>
+          <a:xfrm>
+            <a:off x="6745579" y="1108364"/>
+            <a:ext cx="6212177" cy="990015"/>
+          </a:xfrm>
+          <a:prstGeom prst="rect">
+            <a:avLst/>
+          </a:prstGeom>
+          <a:noFill/>
+        </p:spPr>
+        <p:txBody>
+          <a:bodyPr wrap="square">
+            <a:spAutoFit/>
+          </a:bodyPr>
+          <a:lstStyle/>
+          <a:p>
+            <a:pPr algn="l" rtl="0">
+              <a:lnSpc>
+                <a:spcPct val="108000"/>
+              </a:lnSpc>
+            </a:pPr>
+            <a:r>
+              <a:rPr lang="ru-RU" sz="2800" dirty="0">
+                <a:effectLst/>
+                <a:latin typeface="Times New Roman, serif"/>
+              </a:rPr>
+              <a:t>Б) Строим его изображение (дуги синего цвета):</a:t>
+            </a:r>
+            <a:endParaRPr lang="ru-RU" sz="2800" dirty="0">
+              <a:effectLst/>
+            </a:endParaRPr>
+          </a:p>
+        </p:txBody>
+      </p:sp>
       <p:pic>
         <p:nvPicPr>
-          <p:cNvPr id="5" name="Рисунок 4">
-            <a:extLst>
-              <a:ext uri="{FF2B5EF4-FFF2-40B4-BE49-F238E27FC236}">
-                <a16:creationId xmlns:a16="http://schemas.microsoft.com/office/drawing/2014/main" id="{095B8DED-ADDD-4BC5-9B97-742DAE2BF912}"/>
+          <p:cNvPr id="4" name="Рисунок 3">
+            <a:extLst>
+              <a:ext uri="{FF2B5EF4-FFF2-40B4-BE49-F238E27FC236}">
+                <a16:creationId xmlns:a16="http://schemas.microsoft.com/office/drawing/2014/main" id="{B4AF9BA4-0A52-2D60-F116-65CF983C098D}"/>
               </a:ext>
             </a:extLst>
           </p:cNvPr>
@@ -15269,66 +12520,20 @@
         </p:blipFill>
         <p:spPr>
           <a:xfrm>
-            <a:off x="0" y="2051597"/>
-            <a:ext cx="6096000" cy="3247767"/>
+            <a:off x="89624" y="2532380"/>
+            <a:ext cx="5940425" cy="1793240"/>
           </a:xfrm>
           <a:prstGeom prst="rect">
             <a:avLst/>
           </a:prstGeom>
         </p:spPr>
       </p:pic>
-      <p:sp>
-        <p:nvSpPr>
-          <p:cNvPr id="7" name="TextBox 6">
-            <a:extLst>
-              <a:ext uri="{FF2B5EF4-FFF2-40B4-BE49-F238E27FC236}">
-                <a16:creationId xmlns:a16="http://schemas.microsoft.com/office/drawing/2014/main" id="{50138543-BE79-48AB-8086-E875E7A6CE32}"/>
-              </a:ext>
-            </a:extLst>
-          </p:cNvPr>
-          <p:cNvSpPr txBox="1"/>
-          <p:nvPr/>
-        </p:nvSpPr>
-        <p:spPr>
-          <a:xfrm>
-            <a:off x="6745579" y="1108364"/>
-            <a:ext cx="6212177" cy="990015"/>
-          </a:xfrm>
-          <a:prstGeom prst="rect">
-            <a:avLst/>
-          </a:prstGeom>
-          <a:noFill/>
-        </p:spPr>
-        <p:txBody>
-          <a:bodyPr wrap="square">
-            <a:spAutoFit/>
-          </a:bodyPr>
-          <a:lstStyle/>
-          <a:p>
-            <a:pPr algn="l" rtl="0">
-              <a:lnSpc>
-                <a:spcPct val="108000"/>
-              </a:lnSpc>
-            </a:pPr>
-            <a:r>
-              <a:rPr lang="ru-RU" sz="2800" dirty="0">
-                <a:effectLst/>
-                <a:latin typeface="Times New Roman, serif"/>
-              </a:rPr>
-              <a:t>Б) Строим его изображение (дуги синего цвета):</a:t>
-            </a:r>
-            <a:endParaRPr lang="ru-RU" sz="2800" dirty="0">
-              <a:effectLst/>
-            </a:endParaRPr>
-          </a:p>
-        </p:txBody>
-      </p:sp>
       <p:pic>
         <p:nvPicPr>
-          <p:cNvPr id="9" name="Рисунок 8">
-            <a:extLst>
-              <a:ext uri="{FF2B5EF4-FFF2-40B4-BE49-F238E27FC236}">
-                <a16:creationId xmlns:a16="http://schemas.microsoft.com/office/drawing/2014/main" id="{12A0F783-DCA4-4734-8D46-0A44DEA91028}"/>
+          <p:cNvPr id="6" name="Рисунок 5">
+            <a:extLst>
+              <a:ext uri="{FF2B5EF4-FFF2-40B4-BE49-F238E27FC236}">
+                <a16:creationId xmlns:a16="http://schemas.microsoft.com/office/drawing/2014/main" id="{31A8C70F-361D-1DBF-8646-94D687B225EE}"/>
               </a:ext>
             </a:extLst>
           </p:cNvPr>
@@ -15345,8 +12550,8 @@
         </p:blipFill>
         <p:spPr>
           <a:xfrm>
-            <a:off x="6745578" y="2116463"/>
-            <a:ext cx="5446421" cy="3118033"/>
+            <a:off x="6429545" y="2220201"/>
+            <a:ext cx="5324475" cy="2985770"/>
           </a:xfrm>
           <a:prstGeom prst="rect">
             <a:avLst/>
@@ -15414,33 +12619,6 @@
                                   </p:childTnLst>
                                 </p:cTn>
                               </p:par>
-                              <p:par>
-                                <p:cTn id="7" presetID="1" presetClass="entr" presetSubtype="0" fill="hold" nodeType="withEffect">
-                                  <p:stCondLst>
-                                    <p:cond delay="0"/>
-                                  </p:stCondLst>
-                                  <p:childTnLst>
-                                    <p:set>
-                                      <p:cBhvr>
-                                        <p:cTn id="8" dur="1" fill="hold">
-                                          <p:stCondLst>
-                                            <p:cond delay="0"/>
-                                          </p:stCondLst>
-                                        </p:cTn>
-                                        <p:tgtEl>
-                                          <p:spTgt spid="5"/>
-                                        </p:tgtEl>
-                                        <p:attrNameLst>
-                                          <p:attrName>style.visibility</p:attrName>
-                                        </p:attrNameLst>
-                                      </p:cBhvr>
-                                      <p:to>
-                                        <p:strVal val="visible"/>
-                                      </p:to>
-                                    </p:set>
-                                  </p:childTnLst>
-                                </p:cTn>
-                              </p:par>
                             </p:childTnLst>
                           </p:cTn>
                         </p:par>
@@ -15448,59 +12626,32 @@
                     </p:cTn>
                   </p:par>
                   <p:par>
-                    <p:cTn id="9" fill="hold">
+                    <p:cTn id="7" fill="hold">
                       <p:stCondLst>
                         <p:cond delay="indefinite"/>
                       </p:stCondLst>
                       <p:childTnLst>
                         <p:par>
-                          <p:cTn id="10" fill="hold">
+                          <p:cTn id="8" fill="hold">
                             <p:stCondLst>
                               <p:cond delay="0"/>
                             </p:stCondLst>
                             <p:childTnLst>
                               <p:par>
-                                <p:cTn id="11" presetID="1" presetClass="entr" presetSubtype="0" fill="hold" grpId="0" nodeType="clickEffect">
+                                <p:cTn id="9" presetID="1" presetClass="entr" presetSubtype="0" fill="hold" grpId="0" nodeType="clickEffect">
                                   <p:stCondLst>
                                     <p:cond delay="0"/>
                                   </p:stCondLst>
                                   <p:childTnLst>
                                     <p:set>
                                       <p:cBhvr>
-                                        <p:cTn id="12" dur="1" fill="hold">
+                                        <p:cTn id="10" dur="1" fill="hold">
                                           <p:stCondLst>
                                             <p:cond delay="0"/>
                                           </p:stCondLst>
                                         </p:cTn>
                                         <p:tgtEl>
                                           <p:spTgt spid="7"/>
-                                        </p:tgtEl>
-                                        <p:attrNameLst>
-                                          <p:attrName>style.visibility</p:attrName>
-                                        </p:attrNameLst>
-                                      </p:cBhvr>
-                                      <p:to>
-                                        <p:strVal val="visible"/>
-                                      </p:to>
-                                    </p:set>
-                                  </p:childTnLst>
-                                </p:cTn>
-                              </p:par>
-                              <p:par>
-                                <p:cTn id="13" presetID="1" presetClass="entr" presetSubtype="0" fill="hold" nodeType="withEffect">
-                                  <p:stCondLst>
-                                    <p:cond delay="0"/>
-                                  </p:stCondLst>
-                                  <p:childTnLst>
-                                    <p:set>
-                                      <p:cBhvr>
-                                        <p:cTn id="14" dur="1" fill="hold">
-                                          <p:stCondLst>
-                                            <p:cond delay="0"/>
-                                          </p:stCondLst>
-                                        </p:cTn>
-                                        <p:tgtEl>
-                                          <p:spTgt spid="9"/>
                                         </p:tgtEl>
                                         <p:attrNameLst>
                                           <p:attrName>style.visibility</p:attrName>
@@ -15589,18 +12740,18 @@
         </p:spPr>
         <p:txBody>
           <a:bodyPr>
-            <a:normAutofit fontScale="90000"/>
+            <a:normAutofit/>
           </a:bodyPr>
           <a:lstStyle/>
           <a:p>
             <a:r>
-              <a:rPr lang="ru-RU" sz="3200" b="1" dirty="0">
+              <a:rPr lang="ru-RU" sz="3100" b="1" dirty="0">
                 <a:effectLst/>
                 <a:latin typeface="Times New Roman, serif"/>
               </a:rPr>
               <a:t>Задание 3</a:t>
             </a:r>
-            <a:endParaRPr lang="ru-RU" dirty="0"/>
+            <a:endParaRPr lang="ru-RU" sz="3100" dirty="0"/>
           </a:p>
         </p:txBody>
       </p:sp>
@@ -15622,7 +12773,7 @@
         </p:nvSpPr>
         <p:spPr>
           <a:xfrm>
-            <a:off x="1972685" y="450273"/>
+            <a:off x="0" y="1577737"/>
             <a:ext cx="9905998" cy="3124201"/>
           </a:xfrm>
         </p:spPr>
@@ -15650,10 +12801,10 @@
       </p:sp>
       <p:pic>
         <p:nvPicPr>
-          <p:cNvPr id="5" name="Рисунок 4">
-            <a:extLst>
-              <a:ext uri="{FF2B5EF4-FFF2-40B4-BE49-F238E27FC236}">
-                <a16:creationId xmlns:a16="http://schemas.microsoft.com/office/drawing/2014/main" id="{C2361DD8-EC95-401C-97B6-274245459382}"/>
+          <p:cNvPr id="4" name="Рисунок 3">
+            <a:extLst>
+              <a:ext uri="{FF2B5EF4-FFF2-40B4-BE49-F238E27FC236}">
+                <a16:creationId xmlns:a16="http://schemas.microsoft.com/office/drawing/2014/main" id="{27BC1B55-A58E-35D0-7E27-8F9B082605EA}"/>
               </a:ext>
             </a:extLst>
           </p:cNvPr>
@@ -15670,8 +12821,8 @@
         </p:blipFill>
         <p:spPr>
           <a:xfrm>
-            <a:off x="3047737" y="2445325"/>
-            <a:ext cx="6096526" cy="3293213"/>
+            <a:off x="1293735" y="2375682"/>
+            <a:ext cx="4714589" cy="3124201"/>
           </a:xfrm>
           <a:prstGeom prst="rect">
             <a:avLst/>
@@ -15739,33 +12890,6 @@
                                   </p:childTnLst>
                                 </p:cTn>
                               </p:par>
-                              <p:par>
-                                <p:cTn id="7" presetID="1" presetClass="entr" presetSubtype="0" fill="hold" nodeType="withEffect">
-                                  <p:stCondLst>
-                                    <p:cond delay="0"/>
-                                  </p:stCondLst>
-                                  <p:childTnLst>
-                                    <p:set>
-                                      <p:cBhvr>
-                                        <p:cTn id="8" dur="1" fill="hold">
-                                          <p:stCondLst>
-                                            <p:cond delay="0"/>
-                                          </p:stCondLst>
-                                        </p:cTn>
-                                        <p:tgtEl>
-                                          <p:spTgt spid="5"/>
-                                        </p:tgtEl>
-                                        <p:attrNameLst>
-                                          <p:attrName>style.visibility</p:attrName>
-                                        </p:attrNameLst>
-                                      </p:cBhvr>
-                                      <p:to>
-                                        <p:strVal val="visible"/>
-                                      </p:to>
-                                    </p:set>
-                                  </p:childTnLst>
-                                </p:cTn>
-                              </p:par>
                             </p:childTnLst>
                           </p:cTn>
                         </p:par>
@@ -15841,7 +12965,7 @@
         </p:spPr>
         <p:txBody>
           <a:bodyPr>
-            <a:normAutofit fontScale="90000"/>
+            <a:normAutofit/>
           </a:bodyPr>
           <a:lstStyle/>
           <a:p>
@@ -15851,20 +12975,20 @@
               </a:lnSpc>
             </a:pPr>
             <a:r>
-              <a:rPr lang="ru-RU" sz="3600" b="1" dirty="0">
+              <a:rPr lang="ru-RU" sz="3100" b="1" dirty="0">
                 <a:effectLst/>
                 <a:latin typeface="Times New Roman" panose="02020603050405020304" pitchFamily="18" charset="0"/>
               </a:rPr>
               <a:t>Задание 4</a:t>
             </a:r>
             <a:br>
-              <a:rPr lang="ru-RU" sz="3600" b="1" dirty="0">
+              <a:rPr lang="ru-RU" sz="3100" b="1" dirty="0">
                 <a:effectLst/>
                 <a:latin typeface="Times New Roman" panose="02020603050405020304" pitchFamily="18" charset="0"/>
               </a:rPr>
             </a:br>
             <a:r>
-              <a:rPr lang="ru-RU" sz="3600" dirty="0">
+              <a:rPr lang="ru-RU" sz="3100" dirty="0">
                 <a:effectLst/>
                 <a:latin typeface="Times New Roman, serif"/>
               </a:rPr>
@@ -15903,7 +13027,7 @@
         </p:spPr>
         <p:txBody>
           <a:bodyPr>
-            <a:normAutofit fontScale="92500" lnSpcReduction="20000"/>
+            <a:normAutofit/>
           </a:bodyPr>
           <a:lstStyle/>
           <a:p>
@@ -15915,7 +13039,7 @@
                 <a:effectLst/>
                 <a:latin typeface="Times New Roman, serif"/>
               </a:rPr>
-              <a:t>1) O8 (Пустой граф):</a:t>
+              <a:t>1) O5 (Пустой граф):</a:t>
             </a:r>
             <a:endParaRPr lang="ru-RU" sz="3200" dirty="0">
               <a:effectLst/>
@@ -15926,12 +13050,58 @@
           </a:p>
         </p:txBody>
       </p:sp>
+      <p:sp>
+        <p:nvSpPr>
+          <p:cNvPr id="7" name="TextBox 6">
+            <a:extLst>
+              <a:ext uri="{FF2B5EF4-FFF2-40B4-BE49-F238E27FC236}">
+                <a16:creationId xmlns:a16="http://schemas.microsoft.com/office/drawing/2014/main" id="{AD3D6549-9C44-41B8-94F3-723B04ED031D}"/>
+              </a:ext>
+            </a:extLst>
+          </p:cNvPr>
+          <p:cNvSpPr txBox="1"/>
+          <p:nvPr/>
+        </p:nvSpPr>
+        <p:spPr>
+          <a:xfrm>
+            <a:off x="6094412" y="1995080"/>
+            <a:ext cx="6099462" cy="556434"/>
+          </a:xfrm>
+          <a:prstGeom prst="rect">
+            <a:avLst/>
+          </a:prstGeom>
+          <a:noFill/>
+        </p:spPr>
+        <p:txBody>
+          <a:bodyPr wrap="square">
+            <a:spAutoFit/>
+          </a:bodyPr>
+          <a:lstStyle/>
+          <a:p>
+            <a:pPr algn="l" rtl="0">
+              <a:lnSpc>
+                <a:spcPct val="115000"/>
+              </a:lnSpc>
+            </a:pPr>
+            <a:r>
+              <a:rPr lang="ru-RU" sz="2800" dirty="0">
+                <a:effectLst/>
+                <a:latin typeface="Times New Roman, serif"/>
+              </a:rPr>
+              <a:t>2) K10 (Полный граф):</a:t>
+            </a:r>
+            <a:endParaRPr lang="ru-RU" sz="2800" dirty="0">
+              <a:effectLst/>
+            </a:endParaRPr>
+          </a:p>
+        </p:txBody>
+      </p:sp>
       <p:pic>
         <p:nvPicPr>
-          <p:cNvPr id="5" name="Рисунок 4">
-            <a:extLst>
-              <a:ext uri="{FF2B5EF4-FFF2-40B4-BE49-F238E27FC236}">
-                <a16:creationId xmlns:a16="http://schemas.microsoft.com/office/drawing/2014/main" id="{A206D078-5A9F-463B-9A03-FAC0960428A9}"/>
+          <p:cNvPr id="4" name="Рисунок 3">
+            <a:extLst>
+              <a:ext uri="{FF2B5EF4-FFF2-40B4-BE49-F238E27FC236}">
+                <a16:creationId xmlns:a16="http://schemas.microsoft.com/office/drawing/2014/main" id="{41BA8975-771A-A49B-8C78-6BE527705B55}"/>
               </a:ext>
             </a:extLst>
           </p:cNvPr>
@@ -15948,66 +13118,20 @@
         </p:blipFill>
         <p:spPr>
           <a:xfrm>
-            <a:off x="351704" y="2852953"/>
-            <a:ext cx="3929351" cy="3133291"/>
+            <a:off x="856304" y="3049732"/>
+            <a:ext cx="3422218" cy="3200147"/>
           </a:xfrm>
           <a:prstGeom prst="rect">
             <a:avLst/>
           </a:prstGeom>
         </p:spPr>
       </p:pic>
-      <p:sp>
-        <p:nvSpPr>
-          <p:cNvPr id="7" name="TextBox 6">
-            <a:extLst>
-              <a:ext uri="{FF2B5EF4-FFF2-40B4-BE49-F238E27FC236}">
-                <a16:creationId xmlns:a16="http://schemas.microsoft.com/office/drawing/2014/main" id="{AD3D6549-9C44-41B8-94F3-723B04ED031D}"/>
-              </a:ext>
-            </a:extLst>
-          </p:cNvPr>
-          <p:cNvSpPr txBox="1"/>
-          <p:nvPr/>
-        </p:nvSpPr>
-        <p:spPr>
-          <a:xfrm>
-            <a:off x="6094412" y="1995080"/>
-            <a:ext cx="6099462" cy="547201"/>
-          </a:xfrm>
-          <a:prstGeom prst="rect">
-            <a:avLst/>
-          </a:prstGeom>
-          <a:noFill/>
-        </p:spPr>
-        <p:txBody>
-          <a:bodyPr wrap="square">
-            <a:spAutoFit/>
-          </a:bodyPr>
-          <a:lstStyle/>
-          <a:p>
-            <a:pPr algn="l" rtl="0">
-              <a:lnSpc>
-                <a:spcPct val="115000"/>
-              </a:lnSpc>
-            </a:pPr>
-            <a:r>
-              <a:rPr lang="ru-RU" sz="2800" dirty="0">
-                <a:effectLst/>
-                <a:latin typeface="Times New Roman, serif"/>
-              </a:rPr>
-              <a:t>2) K7 (Полный граф):</a:t>
-            </a:r>
-            <a:endParaRPr lang="ru-RU" sz="2800" dirty="0">
-              <a:effectLst/>
-            </a:endParaRPr>
-          </a:p>
-        </p:txBody>
-      </p:sp>
       <p:pic>
         <p:nvPicPr>
-          <p:cNvPr id="9" name="Рисунок 8">
-            <a:extLst>
-              <a:ext uri="{FF2B5EF4-FFF2-40B4-BE49-F238E27FC236}">
-                <a16:creationId xmlns:a16="http://schemas.microsoft.com/office/drawing/2014/main" id="{CC0E15DE-3A50-4A3A-85A7-27D8335B7FF8}"/>
+          <p:cNvPr id="6" name="Рисунок 5">
+            <a:extLst>
+              <a:ext uri="{FF2B5EF4-FFF2-40B4-BE49-F238E27FC236}">
+                <a16:creationId xmlns:a16="http://schemas.microsoft.com/office/drawing/2014/main" id="{1491C395-3395-2ED0-DBFC-065878BEEB51}"/>
               </a:ext>
             </a:extLst>
           </p:cNvPr>
@@ -16024,8 +13148,8 @@
         </p:blipFill>
         <p:spPr>
           <a:xfrm>
-            <a:off x="6506585" y="2936080"/>
-            <a:ext cx="3780415" cy="3431563"/>
+            <a:off x="6891575" y="3049732"/>
+            <a:ext cx="3096260" cy="3028950"/>
           </a:xfrm>
           <a:prstGeom prst="rect">
             <a:avLst/>
@@ -16093,33 +13217,6 @@
                                   </p:childTnLst>
                                 </p:cTn>
                               </p:par>
-                              <p:par>
-                                <p:cTn id="7" presetID="1" presetClass="entr" presetSubtype="0" fill="hold" nodeType="withEffect">
-                                  <p:stCondLst>
-                                    <p:cond delay="0"/>
-                                  </p:stCondLst>
-                                  <p:childTnLst>
-                                    <p:set>
-                                      <p:cBhvr>
-                                        <p:cTn id="8" dur="1" fill="hold">
-                                          <p:stCondLst>
-                                            <p:cond delay="0"/>
-                                          </p:stCondLst>
-                                        </p:cTn>
-                                        <p:tgtEl>
-                                          <p:spTgt spid="5"/>
-                                        </p:tgtEl>
-                                        <p:attrNameLst>
-                                          <p:attrName>style.visibility</p:attrName>
-                                        </p:attrNameLst>
-                                      </p:cBhvr>
-                                      <p:to>
-                                        <p:strVal val="visible"/>
-                                      </p:to>
-                                    </p:set>
-                                  </p:childTnLst>
-                                </p:cTn>
-                              </p:par>
                             </p:childTnLst>
                           </p:cTn>
                         </p:par>
@@ -16127,59 +13224,32 @@
                     </p:cTn>
                   </p:par>
                   <p:par>
-                    <p:cTn id="9" fill="hold">
+                    <p:cTn id="7" fill="hold">
                       <p:stCondLst>
                         <p:cond delay="indefinite"/>
                       </p:stCondLst>
                       <p:childTnLst>
                         <p:par>
-                          <p:cTn id="10" fill="hold">
+                          <p:cTn id="8" fill="hold">
                             <p:stCondLst>
                               <p:cond delay="0"/>
                             </p:stCondLst>
                             <p:childTnLst>
                               <p:par>
-                                <p:cTn id="11" presetID="1" presetClass="entr" presetSubtype="0" fill="hold" grpId="0" nodeType="clickEffect">
+                                <p:cTn id="9" presetID="1" presetClass="entr" presetSubtype="0" fill="hold" grpId="0" nodeType="clickEffect">
                                   <p:stCondLst>
                                     <p:cond delay="0"/>
                                   </p:stCondLst>
                                   <p:childTnLst>
                                     <p:set>
                                       <p:cBhvr>
-                                        <p:cTn id="12" dur="1" fill="hold">
+                                        <p:cTn id="10" dur="1" fill="hold">
                                           <p:stCondLst>
                                             <p:cond delay="0"/>
                                           </p:stCondLst>
                                         </p:cTn>
                                         <p:tgtEl>
                                           <p:spTgt spid="7"/>
-                                        </p:tgtEl>
-                                        <p:attrNameLst>
-                                          <p:attrName>style.visibility</p:attrName>
-                                        </p:attrNameLst>
-                                      </p:cBhvr>
-                                      <p:to>
-                                        <p:strVal val="visible"/>
-                                      </p:to>
-                                    </p:set>
-                                  </p:childTnLst>
-                                </p:cTn>
-                              </p:par>
-                              <p:par>
-                                <p:cTn id="13" presetID="1" presetClass="entr" presetSubtype="0" fill="hold" nodeType="withEffect">
-                                  <p:stCondLst>
-                                    <p:cond delay="0"/>
-                                  </p:stCondLst>
-                                  <p:childTnLst>
-                                    <p:set>
-                                      <p:cBhvr>
-                                        <p:cTn id="14" dur="1" fill="hold">
-                                          <p:stCondLst>
-                                            <p:cond delay="0"/>
-                                          </p:stCondLst>
-                                        </p:cTn>
-                                        <p:tgtEl>
-                                          <p:spTgt spid="9"/>
                                         </p:tgtEl>
                                         <p:attrNameLst>
                                           <p:attrName>style.visibility</p:attrName>
@@ -16228,9 +13298,9 @@
 </file>
 
 <file path=ppt/theme/theme1.xml><?xml version="1.0" encoding="utf-8"?>
-<a:theme xmlns:a="http://schemas.openxmlformats.org/drawingml/2006/main" name="Сетка">
+<a:theme xmlns:a="http://schemas.openxmlformats.org/drawingml/2006/main" name="Тема Office">
   <a:themeElements>
-    <a:clrScheme name="Сетка">
+    <a:clrScheme name="Стандартная">
       <a:dk1>
         <a:sysClr val="windowText" lastClr="000000"/>
       </a:dk1>
@@ -16238,48 +13308,100 @@
         <a:sysClr val="window" lastClr="FFFFFF"/>
       </a:lt1>
       <a:dk2>
-        <a:srgbClr val="363D46"/>
+        <a:srgbClr val="44546A"/>
       </a:dk2>
       <a:lt2>
-        <a:srgbClr val="EBEBEB"/>
+        <a:srgbClr val="E7E6E6"/>
       </a:lt2>
       <a:accent1>
-        <a:srgbClr val="6F6F6F"/>
+        <a:srgbClr val="4472C4"/>
       </a:accent1>
       <a:accent2>
-        <a:srgbClr val="BFBFA5"/>
+        <a:srgbClr val="ED7D31"/>
       </a:accent2>
       <a:accent3>
-        <a:srgbClr val="DCD084"/>
+        <a:srgbClr val="A5A5A5"/>
       </a:accent3>
       <a:accent4>
-        <a:srgbClr val="E7BF5F"/>
+        <a:srgbClr val="FFC000"/>
       </a:accent4>
       <a:accent5>
-        <a:srgbClr val="E9A039"/>
+        <a:srgbClr val="5B9BD5"/>
       </a:accent5>
       <a:accent6>
-        <a:srgbClr val="CF7133"/>
+        <a:srgbClr val="70AD47"/>
       </a:accent6>
       <a:hlink>
-        <a:srgbClr val="F28943"/>
+        <a:srgbClr val="0563C1"/>
       </a:hlink>
       <a:folHlink>
-        <a:srgbClr val="F1B76C"/>
+        <a:srgbClr val="954F72"/>
       </a:folHlink>
     </a:clrScheme>
-    <a:fontScheme name="Сетка">
+    <a:fontScheme name="Стандартная">
       <a:majorFont>
-        <a:latin typeface="Century Gothic" panose="020B0502020202020204"/>
+        <a:latin typeface="Calibri Light" panose="020F0302020204030204"/>
         <a:ea typeface=""/>
         <a:cs typeface=""/>
-        <a:font script="Jpan" typeface="ＭＳ ゴシック"/>
+        <a:font script="Jpan" typeface="游ゴシック Light"/>
         <a:font script="Hang" typeface="맑은 고딕"/>
-        <a:font script="Hans" typeface="宋体"/>
+        <a:font script="Hans" typeface="等线 Light"/>
         <a:font script="Hant" typeface="新細明體"/>
-        <a:font script="Arab" typeface="Tahoma"/>
-        <a:font script="Hebr" typeface="Gisha"/>
-        <a:font script="Thai" typeface="DilleniaUPC"/>
+        <a:font script="Arab" typeface="Times New Roman"/>
+        <a:font script="Hebr" typeface="Times New Roman"/>
+        <a:font script="Thai" typeface="Angsana New"/>
+        <a:font script="Ethi" typeface="Nyala"/>
+        <a:font script="Beng" typeface="Vrinda"/>
+        <a:font script="Gujr" typeface="Shruti"/>
+        <a:font script="Khmr" typeface="MoolBoran"/>
+        <a:font script="Knda" typeface="Tunga"/>
+        <a:font script="Guru" typeface="Raavi"/>
+        <a:font script="Cans" typeface="Euphemia"/>
+        <a:font script="Cher" typeface="Plantagenet Cherokee"/>
+        <a:font script="Yiii" typeface="Microsoft Yi Baiti"/>
+        <a:font script="Tibt" typeface="Microsoft Himalaya"/>
+        <a:font script="Thaa" typeface="MV Boli"/>
+        <a:font script="Deva" typeface="Mangal"/>
+        <a:font script="Telu" typeface="Gautami"/>
+        <a:font script="Taml" typeface="Latha"/>
+        <a:font script="Syrc" typeface="Estrangelo Edessa"/>
+        <a:font script="Orya" typeface="Kalinga"/>
+        <a:font script="Mlym" typeface="Kartika"/>
+        <a:font script="Laoo" typeface="DokChampa"/>
+        <a:font script="Sinh" typeface="Iskoola Pota"/>
+        <a:font script="Mong" typeface="Mongolian Baiti"/>
+        <a:font script="Viet" typeface="Times New Roman"/>
+        <a:font script="Uigh" typeface="Microsoft Uighur"/>
+        <a:font script="Geor" typeface="Sylfaen"/>
+        <a:font script="Armn" typeface="Arial"/>
+        <a:font script="Bugi" typeface="Leelawadee UI"/>
+        <a:font script="Bopo" typeface="Microsoft JhengHei"/>
+        <a:font script="Java" typeface="Javanese Text"/>
+        <a:font script="Lisu" typeface="Segoe UI"/>
+        <a:font script="Mymr" typeface="Myanmar Text"/>
+        <a:font script="Nkoo" typeface="Ebrima"/>
+        <a:font script="Olck" typeface="Nirmala UI"/>
+        <a:font script="Osma" typeface="Ebrima"/>
+        <a:font script="Phag" typeface="Phagspa"/>
+        <a:font script="Syrn" typeface="Estrangelo Edessa"/>
+        <a:font script="Syrj" typeface="Estrangelo Edessa"/>
+        <a:font script="Syre" typeface="Estrangelo Edessa"/>
+        <a:font script="Sora" typeface="Nirmala UI"/>
+        <a:font script="Tale" typeface="Microsoft Tai Le"/>
+        <a:font script="Talu" typeface="Microsoft New Tai Lue"/>
+        <a:font script="Tfng" typeface="Ebrima"/>
+      </a:majorFont>
+      <a:minorFont>
+        <a:latin typeface="Calibri" panose="020F0502020204030204"/>
+        <a:ea typeface=""/>
+        <a:cs typeface=""/>
+        <a:font script="Jpan" typeface="游ゴシック"/>
+        <a:font script="Hang" typeface="맑은 고딕"/>
+        <a:font script="Hans" typeface="等线"/>
+        <a:font script="Hant" typeface="新細明體"/>
+        <a:font script="Arab" typeface="Arial"/>
+        <a:font script="Hebr" typeface="Arial"/>
+        <a:font script="Thai" typeface="Cordia New"/>
         <a:font script="Ethi" typeface="Nyala"/>
         <a:font script="Beng" typeface="Vrinda"/>
         <a:font script="Gujr" typeface="Shruti"/>
@@ -16300,47 +13422,29 @@
         <a:font script="Laoo" typeface="DokChampa"/>
         <a:font script="Sinh" typeface="Iskoola Pota"/>
         <a:font script="Mong" typeface="Mongolian Baiti"/>
-        <a:font script="Viet" typeface="Tahoma"/>
+        <a:font script="Viet" typeface="Arial"/>
         <a:font script="Uigh" typeface="Microsoft Uighur"/>
         <a:font script="Geor" typeface="Sylfaen"/>
-      </a:majorFont>
-      <a:minorFont>
-        <a:latin typeface="Century Gothic" panose="020B0502020202020204"/>
-        <a:ea typeface=""/>
-        <a:cs typeface=""/>
-        <a:font script="Jpan" typeface="ＭＳ ゴシック"/>
-        <a:font script="Hang" typeface="맑은 고딕"/>
-        <a:font script="Hans" typeface="宋体"/>
-        <a:font script="Hant" typeface="新細明體"/>
-        <a:font script="Arab" typeface="Tahoma"/>
-        <a:font script="Hebr" typeface="Gisha"/>
-        <a:font script="Thai" typeface="DilleniaUPC"/>
-        <a:font script="Ethi" typeface="Nyala"/>
-        <a:font script="Beng" typeface="Vrinda"/>
-        <a:font script="Gujr" typeface="Shruti"/>
-        <a:font script="Khmr" typeface="DaunPenh"/>
-        <a:font script="Knda" typeface="Tunga"/>
-        <a:font script="Guru" typeface="Raavi"/>
-        <a:font script="Cans" typeface="Euphemia"/>
-        <a:font script="Cher" typeface="Plantagenet Cherokee"/>
-        <a:font script="Yiii" typeface="Microsoft Yi Baiti"/>
-        <a:font script="Tibt" typeface="Microsoft Himalaya"/>
-        <a:font script="Thaa" typeface="MV Boli"/>
-        <a:font script="Deva" typeface="Mangal"/>
-        <a:font script="Telu" typeface="Gautami"/>
-        <a:font script="Taml" typeface="Latha"/>
-        <a:font script="Syrc" typeface="Estrangelo Edessa"/>
-        <a:font script="Orya" typeface="Kalinga"/>
-        <a:font script="Mlym" typeface="Kartika"/>
-        <a:font script="Laoo" typeface="DokChampa"/>
-        <a:font script="Sinh" typeface="Iskoola Pota"/>
-        <a:font script="Mong" typeface="Mongolian Baiti"/>
-        <a:font script="Viet" typeface="Verdana"/>
-        <a:font script="Uigh" typeface="Microsoft Uighur"/>
-        <a:font script="Geor" typeface="Sylfaen"/>
+        <a:font script="Armn" typeface="Arial"/>
+        <a:font script="Bugi" typeface="Leelawadee UI"/>
+        <a:font script="Bopo" typeface="Microsoft JhengHei"/>
+        <a:font script="Java" typeface="Javanese Text"/>
+        <a:font script="Lisu" typeface="Segoe UI"/>
+        <a:font script="Mymr" typeface="Myanmar Text"/>
+        <a:font script="Nkoo" typeface="Ebrima"/>
+        <a:font script="Olck" typeface="Nirmala UI"/>
+        <a:font script="Osma" typeface="Ebrima"/>
+        <a:font script="Phag" typeface="Phagspa"/>
+        <a:font script="Syrn" typeface="Estrangelo Edessa"/>
+        <a:font script="Syrj" typeface="Estrangelo Edessa"/>
+        <a:font script="Syre" typeface="Estrangelo Edessa"/>
+        <a:font script="Sora" typeface="Nirmala UI"/>
+        <a:font script="Tale" typeface="Microsoft Tai Le"/>
+        <a:font script="Talu" typeface="Microsoft New Tai Lue"/>
+        <a:font script="Tfng" typeface="Ebrima"/>
       </a:minorFont>
     </a:fontScheme>
-    <a:fmtScheme name="Сетка">
+    <a:fmtScheme name="Стандартная">
       <a:fillStyleLst>
         <a:solidFill>
           <a:schemeClr val="phClr"/>
@@ -16349,13 +13453,23 @@
           <a:gsLst>
             <a:gs pos="0">
               <a:schemeClr val="phClr">
-                <a:tint val="60000"/>
                 <a:lumMod val="110000"/>
+                <a:satMod val="105000"/>
+                <a:tint val="67000"/>
+              </a:schemeClr>
+            </a:gs>
+            <a:gs pos="50000">
+              <a:schemeClr val="phClr">
+                <a:lumMod val="105000"/>
+                <a:satMod val="103000"/>
+                <a:tint val="73000"/>
               </a:schemeClr>
             </a:gs>
             <a:gs pos="100000">
               <a:schemeClr val="phClr">
-                <a:tint val="82000"/>
+                <a:lumMod val="105000"/>
+                <a:satMod val="109000"/>
+                <a:tint val="81000"/>
               </a:schemeClr>
             </a:gs>
           </a:gsLst>
@@ -16365,14 +13479,23 @@
           <a:gsLst>
             <a:gs pos="0">
               <a:schemeClr val="phClr">
-                <a:tint val="96000"/>
-                <a:lumMod val="104000"/>
+                <a:satMod val="103000"/>
+                <a:lumMod val="102000"/>
+                <a:tint val="94000"/>
+              </a:schemeClr>
+            </a:gs>
+            <a:gs pos="50000">
+              <a:schemeClr val="phClr">
+                <a:satMod val="110000"/>
+                <a:lumMod val="100000"/>
+                <a:shade val="100000"/>
               </a:schemeClr>
             </a:gs>
             <a:gs pos="100000">
               <a:schemeClr val="phClr">
-                <a:shade val="84000"/>
-                <a:lumMod val="84000"/>
+                <a:lumMod val="99000"/>
+                <a:satMod val="120000"/>
+                <a:shade val="78000"/>
               </a:schemeClr>
             </a:gs>
           </a:gsLst>
@@ -16380,23 +13503,26 @@
         </a:gradFill>
       </a:fillStyleLst>
       <a:lnStyleLst>
-        <a:ln w="9525" cap="rnd" cmpd="sng" algn="ctr">
+        <a:ln w="6350" cap="flat" cmpd="sng" algn="ctr">
           <a:solidFill>
             <a:schemeClr val="phClr"/>
           </a:solidFill>
           <a:prstDash val="solid"/>
+          <a:miter lim="800000"/>
         </a:ln>
-        <a:ln w="19050" cap="rnd" cmpd="sng" algn="ctr">
+        <a:ln w="12700" cap="flat" cmpd="sng" algn="ctr">
           <a:solidFill>
             <a:schemeClr val="phClr"/>
           </a:solidFill>
           <a:prstDash val="solid"/>
+          <a:miter lim="800000"/>
         </a:ln>
-        <a:ln w="25400" cap="rnd" cmpd="sng" algn="ctr">
+        <a:ln w="19050" cap="flat" cmpd="sng" algn="ctr">
           <a:solidFill>
             <a:schemeClr val="phClr"/>
           </a:solidFill>
           <a:prstDash val="solid"/>
+          <a:miter lim="800000"/>
         </a:ln>
       </a:lnStyleLst>
       <a:effectStyleLst>
@@ -16404,72 +13530,55 @@
           <a:effectLst/>
         </a:effectStyle>
         <a:effectStyle>
-          <a:effectLst>
-            <a:innerShdw blurRad="50800" dist="25400" dir="13500000">
-              <a:srgbClr val="000000">
-                <a:alpha val="55000"/>
-              </a:srgbClr>
-            </a:innerShdw>
-          </a:effectLst>
+          <a:effectLst/>
         </a:effectStyle>
         <a:effectStyle>
           <a:effectLst>
-            <a:outerShdw blurRad="50800" dist="38100" dir="5400000" rotWithShape="0">
+            <a:outerShdw blurRad="57150" dist="19050" dir="5400000" algn="ctr" rotWithShape="0">
               <a:srgbClr val="000000">
-                <a:alpha val="60000"/>
+                <a:alpha val="63000"/>
               </a:srgbClr>
             </a:outerShdw>
           </a:effectLst>
-          <a:scene3d>
-            <a:camera prst="orthographicFront">
-              <a:rot lat="0" lon="0" rev="0"/>
-            </a:camera>
-            <a:lightRig rig="threePt" dir="tl"/>
-          </a:scene3d>
-          <a:sp3d>
-            <a:bevelT w="25400" h="25400" prst="slope"/>
-          </a:sp3d>
         </a:effectStyle>
       </a:effectStyleLst>
       <a:bgFillStyleLst>
         <a:solidFill>
           <a:schemeClr val="phClr"/>
         </a:solidFill>
+        <a:solidFill>
+          <a:schemeClr val="phClr">
+            <a:tint val="95000"/>
+            <a:satMod val="170000"/>
+          </a:schemeClr>
+        </a:solidFill>
         <a:gradFill rotWithShape="1">
           <a:gsLst>
             <a:gs pos="0">
               <a:schemeClr val="phClr">
-                <a:tint val="90000"/>
-                <a:lumMod val="110000"/>
+                <a:tint val="93000"/>
+                <a:satMod val="150000"/>
+                <a:shade val="98000"/>
+                <a:lumMod val="102000"/>
+              </a:schemeClr>
+            </a:gs>
+            <a:gs pos="50000">
+              <a:schemeClr val="phClr">
+                <a:tint val="98000"/>
+                <a:satMod val="130000"/>
+                <a:shade val="90000"/>
+                <a:lumMod val="103000"/>
               </a:schemeClr>
             </a:gs>
             <a:gs pos="100000">
               <a:schemeClr val="phClr">
-                <a:shade val="64000"/>
-                <a:lumMod val="98000"/>
+                <a:shade val="63000"/>
+                <a:satMod val="120000"/>
               </a:schemeClr>
             </a:gs>
           </a:gsLst>
           <a:lin ang="5400000" scaled="0"/>
         </a:gradFill>
-        <a:blipFill rotWithShape="1">
-          <a:blip xmlns:r="http://schemas.openxmlformats.org/officeDocument/2006/relationships" r:embed="rId1">
-            <a:duotone>
-              <a:schemeClr val="phClr">
-                <a:shade val="28000"/>
-                <a:satMod val="94000"/>
-                <a:lumMod val="20000"/>
-              </a:schemeClr>
-              <a:schemeClr val="phClr">
-                <a:tint val="94000"/>
-                <a:shade val="84000"/>
-                <a:satMod val="148000"/>
-                <a:lumMod val="114000"/>
-              </a:schemeClr>
-            </a:duotone>
-          </a:blip>
-          <a:stretch/>
-        </a:blipFill>
       </a:bgFillStyleLst>
     </a:fmtScheme>
   </a:themeElements>
@@ -16477,7 +13586,7 @@
   <a:extraClrSchemeLst/>
   <a:extLst>
     <a:ext uri="{05A4C25C-085E-4340-85A3-A5531E510DB2}">
-      <thm15:themeFamily xmlns:thm15="http://schemas.microsoft.com/office/thememl/2012/main" name="Mesh" id="{789EC3FE-34FD-429C-9918-760025E6C145}" vid="{B8BE45C0-8141-4D58-8C71-A009BC26FBBB}"/>
+      <thm15:themeFamily xmlns:thm15="http://schemas.microsoft.com/office/thememl/2012/main" name="Office Theme" id="{62F939B6-93AF-4DB8-9C6B-D6C7DFDC589F}" vid="{4A3C46E8-61CC-4603-A589-7422A47A8E4A}"/>
     </a:ext>
   </a:extLst>
 </a:theme>
